--- a/docs/notes-feature-tutorial.pptx
+++ b/docs/notes-feature-tutorial.pptx
@@ -3279,7 +3279,7 @@
                   <a:srgbClr val="64748B"/>
                 </a:solidFill>
               </a:rPr>
-              <a:t>Copy-paste version: docs/COPY-PASTE-TUTORIAL.md  ·  Full record: docs/TUTORIAL-WALKTHROUGH.md</a:t>
+              <a:t>Copy-paste version: docs/COPY-PASTE-FEATURE.md  ·  Full record: docs/TUTORIAL-WALKTHROUGH.md</a:t>
             </a:r>
           </a:p>
         </p:txBody>
@@ -3357,6 +3357,677 @@
                   <a:srgbClr val="0F172A"/>
                 </a:solidFill>
               </a:rPr>
+              <a:t>STEP 3c</a:t>
+            </a:r>
+          </a:p>
+        </p:txBody>
+      </p:sp>
+      <p:sp>
+        <p:nvSpPr>
+          <p:cNvPr id="3" name="TextBox 2"/>
+          <p:cNvSpPr txBox="1"/>
+          <p:nvPr/>
+        </p:nvSpPr>
+        <p:spPr>
+          <a:xfrm>
+            <a:off x="2194560" y="384048"/>
+            <a:ext cx="9692640" cy="685800"/>
+          </a:xfrm>
+          <a:prstGeom prst="rect">
+            <a:avLst/>
+          </a:prstGeom>
+          <a:noFill/>
+        </p:spPr>
+        <p:txBody>
+          <a:bodyPr wrap="square">
+            <a:spAutoFit/>
+          </a:bodyPr>
+          <a:lstStyle/>
+          <a:p>
+            <a:pPr algn="l">
+              <a:spcAft>
+                <a:spcPts val="800"/>
+              </a:spcAft>
+            </a:pPr>
+            <a:r>
+              <a:rPr sz="3000" b="1">
+                <a:solidFill>
+                  <a:srgbClr val="0F172A"/>
+                </a:solidFill>
+              </a:rPr>
+              <a:t>The live list — a Client Component</a:t>
+            </a:r>
+          </a:p>
+        </p:txBody>
+      </p:sp>
+      <p:sp>
+        <p:nvSpPr>
+          <p:cNvPr id="4" name="TextBox 3"/>
+          <p:cNvSpPr txBox="1"/>
+          <p:nvPr/>
+        </p:nvSpPr>
+        <p:spPr>
+          <a:xfrm>
+            <a:off x="548640" y="1115568"/>
+            <a:ext cx="11064240" cy="457200"/>
+          </a:xfrm>
+          <a:prstGeom prst="rect">
+            <a:avLst/>
+          </a:prstGeom>
+          <a:noFill/>
+        </p:spPr>
+        <p:txBody>
+          <a:bodyPr wrap="square">
+            <a:spAutoFit/>
+          </a:bodyPr>
+          <a:lstStyle/>
+          <a:p>
+            <a:pPr algn="l">
+              <a:spcAft>
+                <a:spcPts val="800"/>
+              </a:spcAft>
+            </a:pPr>
+            <a:r>
+              <a:rPr sz="1500" b="0">
+                <a:solidFill>
+                  <a:srgbClr val="64748B"/>
+                </a:solidFill>
+              </a:rPr>
+              <a:t>'use client' earns its place here: a real-time Firestore subscription</a:t>
+            </a:r>
+          </a:p>
+        </p:txBody>
+      </p:sp>
+      <p:sp>
+        <p:nvSpPr>
+          <p:cNvPr id="5" name="Rounded Rectangle 4"/>
+          <p:cNvSpPr/>
+          <p:nvPr/>
+        </p:nvSpPr>
+        <p:spPr>
+          <a:xfrm>
+            <a:off x="548640" y="1737360"/>
+            <a:ext cx="8138160" cy="4572000"/>
+          </a:xfrm>
+          <a:prstGeom prst="roundRect">
+            <a:avLst/>
+          </a:prstGeom>
+          <a:solidFill>
+            <a:srgbClr val="1E293B"/>
+          </a:solidFill>
+          <a:ln>
+            <a:noFill/>
+          </a:ln>
+          <a:effectLst/>
+        </p:spPr>
+        <p:style>
+          <a:lnRef idx="1">
+            <a:schemeClr val="accent1"/>
+          </a:lnRef>
+          <a:fillRef idx="3">
+            <a:schemeClr val="accent1"/>
+          </a:fillRef>
+          <a:effectRef idx="2">
+            <a:schemeClr val="accent1"/>
+          </a:effectRef>
+          <a:fontRef idx="minor">
+            <a:schemeClr val="lt1"/>
+          </a:fontRef>
+        </p:style>
+        <p:txBody>
+          <a:bodyPr rtlCol="0" anchor="t" wrap="none" lIns="228600" rIns="182880" tIns="128016"/>
+          <a:lstStyle/>
+          <a:p>
+            <a:pPr algn="ctr">
+              <a:spcAft>
+                <a:spcPts val="700"/>
+              </a:spcAft>
+            </a:pPr>
+            <a:r>
+              <a:rPr sz="1000" b="1">
+                <a:solidFill>
+                  <a:srgbClr val="F59E0B"/>
+                </a:solidFill>
+                <a:latin typeface="Courier New"/>
+              </a:rPr>
+              <a:t>frontend/src/features/notes/components/NotesList.tsx  (new)</a:t>
+            </a:r>
+          </a:p>
+          <a:p>
+            <a:pPr>
+              <a:spcAft>
+                <a:spcPts val="100"/>
+              </a:spcAft>
+            </a:pPr>
+            <a:r>
+              <a:rPr sz="1100">
+                <a:solidFill>
+                  <a:srgbClr val="E2E8F0"/>
+                </a:solidFill>
+                <a:latin typeface="Courier New"/>
+              </a:rPr>
+              <a:t>'use client'</a:t>
+            </a:r>
+          </a:p>
+          <a:p>
+            <a:pPr>
+              <a:spcAft>
+                <a:spcPts val="100"/>
+              </a:spcAft>
+            </a:pPr>
+            <a:r>
+              <a:rPr sz="1100">
+                <a:solidFill>
+                  <a:srgbClr val="E2E8F0"/>
+                </a:solidFill>
+                <a:latin typeface="Courier New"/>
+              </a:rPr>
+              <a:t> </a:t>
+            </a:r>
+          </a:p>
+          <a:p>
+            <a:pPr>
+              <a:spcAft>
+                <a:spcPts val="100"/>
+              </a:spcAft>
+            </a:pPr>
+            <a:r>
+              <a:rPr sz="1100">
+                <a:solidFill>
+                  <a:srgbClr val="E2E8F0"/>
+                </a:solidFill>
+                <a:latin typeface="Courier New"/>
+              </a:rPr>
+              <a:t>export function NotesList() {</a:t>
+            </a:r>
+          </a:p>
+          <a:p>
+            <a:pPr>
+              <a:spcAft>
+                <a:spcPts val="100"/>
+              </a:spcAft>
+            </a:pPr>
+            <a:r>
+              <a:rPr sz="1100">
+                <a:solidFill>
+                  <a:srgbClr val="E2E8F0"/>
+                </a:solidFill>
+                <a:latin typeface="Courier New"/>
+              </a:rPr>
+              <a:t>  const { user } = useAuth()</a:t>
+            </a:r>
+          </a:p>
+          <a:p>
+            <a:pPr>
+              <a:spcAft>
+                <a:spcPts val="100"/>
+              </a:spcAft>
+            </a:pPr>
+            <a:r>
+              <a:rPr sz="1100">
+                <a:solidFill>
+                  <a:srgbClr val="E2E8F0"/>
+                </a:solidFill>
+                <a:latin typeface="Courier New"/>
+              </a:rPr>
+              <a:t>  const { data: notes, loading } = useCollection(</a:t>
+            </a:r>
+          </a:p>
+          <a:p>
+            <a:pPr>
+              <a:spcAft>
+                <a:spcPts val="100"/>
+              </a:spcAft>
+            </a:pPr>
+            <a:r>
+              <a:rPr sz="1100">
+                <a:solidFill>
+                  <a:srgbClr val="E2E8F0"/>
+                </a:solidFill>
+                <a:latin typeface="Courier New"/>
+              </a:rPr>
+              <a:t>    getNotesCollection(),</a:t>
+            </a:r>
+          </a:p>
+          <a:p>
+            <a:pPr>
+              <a:spcAft>
+                <a:spcPts val="100"/>
+              </a:spcAft>
+            </a:pPr>
+            <a:r>
+              <a:rPr sz="1100">
+                <a:solidFill>
+                  <a:srgbClr val="E2E8F0"/>
+                </a:solidFill>
+                <a:latin typeface="Courier New"/>
+              </a:rPr>
+              <a:t>    where('uid', '==', user?.uid ?? ''),</a:t>
+            </a:r>
+          </a:p>
+          <a:p>
+            <a:pPr>
+              <a:spcAft>
+                <a:spcPts val="100"/>
+              </a:spcAft>
+            </a:pPr>
+            <a:r>
+              <a:rPr sz="1100">
+                <a:solidFill>
+                  <a:srgbClr val="E2E8F0"/>
+                </a:solidFill>
+                <a:latin typeface="Courier New"/>
+              </a:rPr>
+              <a:t>  )</a:t>
+            </a:r>
+          </a:p>
+          <a:p>
+            <a:pPr>
+              <a:spcAft>
+                <a:spcPts val="100"/>
+              </a:spcAft>
+            </a:pPr>
+            <a:r>
+              <a:rPr sz="1100">
+                <a:solidFill>
+                  <a:srgbClr val="E2E8F0"/>
+                </a:solidFill>
+                <a:latin typeface="Courier New"/>
+              </a:rPr>
+              <a:t> </a:t>
+            </a:r>
+          </a:p>
+          <a:p>
+            <a:pPr>
+              <a:spcAft>
+                <a:spcPts val="100"/>
+              </a:spcAft>
+            </a:pPr>
+            <a:r>
+              <a:rPr sz="1100">
+                <a:solidFill>
+                  <a:srgbClr val="E2E8F0"/>
+                </a:solidFill>
+                <a:latin typeface="Courier New"/>
+              </a:rPr>
+              <a:t>  if (loading) return &lt;LoadingSpinner /&gt;</a:t>
+            </a:r>
+          </a:p>
+          <a:p>
+            <a:pPr>
+              <a:spcAft>
+                <a:spcPts val="100"/>
+              </a:spcAft>
+            </a:pPr>
+            <a:r>
+              <a:rPr sz="1100">
+                <a:solidFill>
+                  <a:srgbClr val="E2E8F0"/>
+                </a:solidFill>
+                <a:latin typeface="Courier New"/>
+              </a:rPr>
+              <a:t>  if (notes.length === 0) return &lt;EmptyState title="No notes yet" /&gt;</a:t>
+            </a:r>
+          </a:p>
+          <a:p>
+            <a:pPr>
+              <a:spcAft>
+                <a:spcPts val="100"/>
+              </a:spcAft>
+            </a:pPr>
+            <a:r>
+              <a:rPr sz="1100">
+                <a:solidFill>
+                  <a:srgbClr val="E2E8F0"/>
+                </a:solidFill>
+                <a:latin typeface="Courier New"/>
+              </a:rPr>
+              <a:t> </a:t>
+            </a:r>
+          </a:p>
+          <a:p>
+            <a:pPr>
+              <a:spcAft>
+                <a:spcPts val="100"/>
+              </a:spcAft>
+            </a:pPr>
+            <a:r>
+              <a:rPr sz="1100">
+                <a:solidFill>
+                  <a:srgbClr val="E2E8F0"/>
+                </a:solidFill>
+                <a:latin typeface="Courier New"/>
+              </a:rPr>
+              <a:t>  return (</a:t>
+            </a:r>
+          </a:p>
+          <a:p>
+            <a:pPr>
+              <a:spcAft>
+                <a:spcPts val="100"/>
+              </a:spcAft>
+            </a:pPr>
+            <a:r>
+              <a:rPr sz="1100">
+                <a:solidFill>
+                  <a:srgbClr val="E2E8F0"/>
+                </a:solidFill>
+                <a:latin typeface="Courier New"/>
+              </a:rPr>
+              <a:t>    &lt;ul className="space-y-2"&gt;</a:t>
+            </a:r>
+          </a:p>
+          <a:p>
+            <a:pPr>
+              <a:spcAft>
+                <a:spcPts val="100"/>
+              </a:spcAft>
+            </a:pPr>
+            <a:r>
+              <a:rPr sz="1100">
+                <a:solidFill>
+                  <a:srgbClr val="E2E8F0"/>
+                </a:solidFill>
+                <a:latin typeface="Courier New"/>
+              </a:rPr>
+              <a:t>      {notes.map((note) =&gt; (</a:t>
+            </a:r>
+          </a:p>
+          <a:p>
+            <a:pPr>
+              <a:spcAft>
+                <a:spcPts val="100"/>
+              </a:spcAft>
+            </a:pPr>
+            <a:r>
+              <a:rPr sz="1100">
+                <a:solidFill>
+                  <a:srgbClr val="E2E8F0"/>
+                </a:solidFill>
+                <a:latin typeface="Courier New"/>
+              </a:rPr>
+              <a:t>        &lt;li key={note.id} className="rounded-lg border p-4"&gt;</a:t>
+            </a:r>
+          </a:p>
+          <a:p>
+            <a:pPr>
+              <a:spcAft>
+                <a:spcPts val="100"/>
+              </a:spcAft>
+            </a:pPr>
+            <a:r>
+              <a:rPr sz="1100">
+                <a:solidFill>
+                  <a:srgbClr val="E2E8F0"/>
+                </a:solidFill>
+                <a:latin typeface="Courier New"/>
+              </a:rPr>
+              <a:t>          &lt;h3 className="font-medium"&gt;{note.title}&lt;/h3&gt;</a:t>
+            </a:r>
+          </a:p>
+          <a:p>
+            <a:pPr>
+              <a:spcAft>
+                <a:spcPts val="100"/>
+              </a:spcAft>
+            </a:pPr>
+            <a:r>
+              <a:rPr sz="1100">
+                <a:solidFill>
+                  <a:srgbClr val="E2E8F0"/>
+                </a:solidFill>
+                <a:latin typeface="Courier New"/>
+              </a:rPr>
+              <a:t>          &lt;p className="text-sm text-zinc-500"&gt;{note.body}&lt;/p&gt;</a:t>
+            </a:r>
+          </a:p>
+          <a:p>
+            <a:pPr>
+              <a:spcAft>
+                <a:spcPts val="100"/>
+              </a:spcAft>
+            </a:pPr>
+            <a:r>
+              <a:rPr sz="1100">
+                <a:solidFill>
+                  <a:srgbClr val="E2E8F0"/>
+                </a:solidFill>
+                <a:latin typeface="Courier New"/>
+              </a:rPr>
+              <a:t>        &lt;/li&gt;</a:t>
+            </a:r>
+          </a:p>
+          <a:p>
+            <a:pPr>
+              <a:spcAft>
+                <a:spcPts val="100"/>
+              </a:spcAft>
+            </a:pPr>
+            <a:r>
+              <a:rPr sz="1100">
+                <a:solidFill>
+                  <a:srgbClr val="E2E8F0"/>
+                </a:solidFill>
+                <a:latin typeface="Courier New"/>
+              </a:rPr>
+              <a:t>      ))}</a:t>
+            </a:r>
+          </a:p>
+          <a:p>
+            <a:pPr>
+              <a:spcAft>
+                <a:spcPts val="100"/>
+              </a:spcAft>
+            </a:pPr>
+            <a:r>
+              <a:rPr sz="1100">
+                <a:solidFill>
+                  <a:srgbClr val="E2E8F0"/>
+                </a:solidFill>
+                <a:latin typeface="Courier New"/>
+              </a:rPr>
+              <a:t>    &lt;/ul&gt;</a:t>
+            </a:r>
+          </a:p>
+          <a:p>
+            <a:pPr>
+              <a:spcAft>
+                <a:spcPts val="100"/>
+              </a:spcAft>
+            </a:pPr>
+            <a:r>
+              <a:rPr sz="1100">
+                <a:solidFill>
+                  <a:srgbClr val="E2E8F0"/>
+                </a:solidFill>
+                <a:latin typeface="Courier New"/>
+              </a:rPr>
+              <a:t>  )</a:t>
+            </a:r>
+          </a:p>
+          <a:p>
+            <a:pPr>
+              <a:spcAft>
+                <a:spcPts val="100"/>
+              </a:spcAft>
+            </a:pPr>
+            <a:r>
+              <a:rPr sz="1100">
+                <a:solidFill>
+                  <a:srgbClr val="E2E8F0"/>
+                </a:solidFill>
+                <a:latin typeface="Courier New"/>
+              </a:rPr>
+              <a:t>}</a:t>
+            </a:r>
+          </a:p>
+        </p:txBody>
+      </p:sp>
+      <p:sp>
+        <p:nvSpPr>
+          <p:cNvPr id="6" name="TextBox 5"/>
+          <p:cNvSpPr txBox="1"/>
+          <p:nvPr/>
+        </p:nvSpPr>
+        <p:spPr>
+          <a:xfrm>
+            <a:off x="8961120" y="1828800"/>
+            <a:ext cx="2834640" cy="4572000"/>
+          </a:xfrm>
+          <a:prstGeom prst="rect">
+            <a:avLst/>
+          </a:prstGeom>
+          <a:noFill/>
+        </p:spPr>
+        <p:txBody>
+          <a:bodyPr wrap="square">
+            <a:spAutoFit/>
+          </a:bodyPr>
+          <a:lstStyle/>
+          <a:p>
+            <a:pPr algn="l">
+              <a:spcAft>
+                <a:spcPts val="1000"/>
+              </a:spcAft>
+            </a:pPr>
+            <a:r>
+              <a:rPr sz="1300" b="1">
+                <a:solidFill>
+                  <a:srgbClr val="F59E0B"/>
+                </a:solidFill>
+              </a:rPr>
+              <a:t>•  </a:t>
+            </a:r>
+            <a:r>
+              <a:rPr sz="1300" b="0">
+                <a:solidFill>
+                  <a:srgbClr val="334155"/>
+                </a:solidFill>
+              </a:rPr>
+              <a:t>useCollection() → onSnapshot: UI updates live</a:t>
+            </a:r>
+          </a:p>
+          <a:p>
+            <a:pPr algn="l">
+              <a:spcAft>
+                <a:spcPts val="1000"/>
+              </a:spcAft>
+            </a:pPr>
+            <a:r>
+              <a:rPr sz="1300" b="1">
+                <a:solidFill>
+                  <a:srgbClr val="F59E0B"/>
+                </a:solidFill>
+              </a:rPr>
+              <a:t>•  </a:t>
+            </a:r>
+            <a:r>
+              <a:rPr sz="1300" b="0">
+                <a:solidFill>
+                  <a:srgbClr val="334155"/>
+                </a:solidFill>
+              </a:rPr>
+              <a:t>Query filters by uid — and the rules enforce it anyway</a:t>
+            </a:r>
+          </a:p>
+          <a:p>
+            <a:pPr algn="l">
+              <a:spcAft>
+                <a:spcPts val="1000"/>
+              </a:spcAft>
+            </a:pPr>
+            <a:r>
+              <a:rPr sz="1300" b="1">
+                <a:solidFill>
+                  <a:srgbClr val="F59E0B"/>
+                </a:solidFill>
+              </a:rPr>
+              <a:t>•  </a:t>
+            </a:r>
+            <a:r>
+              <a:rPr sz="1300" b="0">
+                <a:solidFill>
+                  <a:srgbClr val="334155"/>
+                </a:solidFill>
+              </a:rPr>
+              <a:t>Loading / empty states from shared components</a:t>
+            </a:r>
+          </a:p>
+        </p:txBody>
+      </p:sp>
+    </p:spTree>
+  </p:cSld>
+  <p:clrMapOvr>
+    <a:masterClrMapping/>
+  </p:clrMapOvr>
+</p:sld>
+</file>
+
+<file path=ppt/slides/slide11.xml><?xml version="1.0" encoding="utf-8"?>
+<p:sld xmlns:a="http://schemas.openxmlformats.org/drawingml/2006/main" xmlns:p="http://schemas.openxmlformats.org/presentationml/2006/main" xmlns:r="http://schemas.openxmlformats.org/officeDocument/2006/relationships">
+  <p:cSld>
+    <p:bg>
+      <p:bgPr>
+        <a:solidFill>
+          <a:srgbClr val="FFFFFF"/>
+        </a:solidFill>
+        <a:effectLst/>
+      </p:bgPr>
+    </p:bg>
+    <p:spTree>
+      <p:nvGrpSpPr>
+        <p:cNvPr id="1" name=""/>
+        <p:cNvGrpSpPr/>
+        <p:nvPr/>
+      </p:nvGrpSpPr>
+      <p:grpSpPr/>
+      <p:sp>
+        <p:nvSpPr>
+          <p:cNvPr id="2" name="Rounded Rectangle 1"/>
+          <p:cNvSpPr/>
+          <p:nvPr/>
+        </p:nvSpPr>
+        <p:spPr>
+          <a:xfrm>
+            <a:off x="548640" y="457200"/>
+            <a:ext cx="1417320" cy="457200"/>
+          </a:xfrm>
+          <a:prstGeom prst="roundRect">
+            <a:avLst/>
+          </a:prstGeom>
+          <a:solidFill>
+            <a:srgbClr val="F59E0B"/>
+          </a:solidFill>
+          <a:ln>
+            <a:noFill/>
+          </a:ln>
+          <a:effectLst/>
+        </p:spPr>
+        <p:style>
+          <a:lnRef idx="1">
+            <a:schemeClr val="accent1"/>
+          </a:lnRef>
+          <a:fillRef idx="3">
+            <a:schemeClr val="accent1"/>
+          </a:fillRef>
+          <a:effectRef idx="2">
+            <a:schemeClr val="accent1"/>
+          </a:effectRef>
+          <a:fontRef idx="minor">
+            <a:schemeClr val="lt1"/>
+          </a:fontRef>
+        </p:style>
+        <p:txBody>
+          <a:bodyPr rtlCol="0" anchor="ctr"/>
+          <a:lstStyle/>
+          <a:p>
+            <a:pPr algn="ctr"/>
+            <a:r>
+              <a:rPr sz="1600" b="1">
+                <a:solidFill>
+                  <a:srgbClr val="0F172A"/>
+                </a:solidFill>
+              </a:rPr>
               <a:t>STEP 3d</a:t>
             </a:r>
           </a:p>
@@ -3653,7 +4324,7 @@
 </p:sld>
 </file>
 
-<file path=ppt/slides/slide11.xml><?xml version="1.0" encoding="utf-8"?>
+<file path=ppt/slides/slide12.xml><?xml version="1.0" encoding="utf-8"?>
 <p:sld xmlns:a="http://schemas.openxmlformats.org/drawingml/2006/main" xmlns:p="http://schemas.openxmlformats.org/presentationml/2006/main" xmlns:r="http://schemas.openxmlformats.org/officeDocument/2006/relationships">
   <p:cSld>
     <p:bg>
@@ -4212,7 +4883,7 @@
 </p:sld>
 </file>
 
-<file path=ppt/slides/slide12.xml><?xml version="1.0" encoding="utf-8"?>
+<file path=ppt/slides/slide13.xml><?xml version="1.0" encoding="utf-8"?>
 <p:sld xmlns:a="http://schemas.openxmlformats.org/drawingml/2006/main" xmlns:p="http://schemas.openxmlformats.org/presentationml/2006/main" xmlns:r="http://schemas.openxmlformats.org/officeDocument/2006/relationships">
   <p:cSld>
     <p:bg>
@@ -4649,7 +5320,7 @@
 </p:sld>
 </file>
 
-<file path=ppt/slides/slide13.xml><?xml version="1.0" encoding="utf-8"?>
+<file path=ppt/slides/slide14.xml><?xml version="1.0" encoding="utf-8"?>
 <p:sld xmlns:a="http://schemas.openxmlformats.org/drawingml/2006/main" xmlns:p="http://schemas.openxmlformats.org/presentationml/2006/main" xmlns:r="http://schemas.openxmlformats.org/officeDocument/2006/relationships">
   <p:cSld>
     <p:bg>
@@ -5271,7 +5942,7 @@
 </p:sld>
 </file>
 
-<file path=ppt/slides/slide14.xml><?xml version="1.0" encoding="utf-8"?>
+<file path=ppt/slides/slide15.xml><?xml version="1.0" encoding="utf-8"?>
 <p:sld xmlns:a="http://schemas.openxmlformats.org/drawingml/2006/main" xmlns:p="http://schemas.openxmlformats.org/presentationml/2006/main" xmlns:r="http://schemas.openxmlformats.org/officeDocument/2006/relationships">
   <p:cSld>
     <p:bg>
@@ -5543,7 +6214,7 @@
                   <a:srgbClr val="334155"/>
                 </a:solidFill>
               </a:rPr>
-              <a:t>Then: open a PR to develop, and before review ask Claude to run the security-reviewer agent over your staged changes.</a:t>
+              <a:t>Then: open a PR to main, and before review ask Claude to run the security-reviewer agent over your staged changes.</a:t>
             </a:r>
           </a:p>
           <a:p>
@@ -5558,7 +6229,7 @@
                   <a:srgbClr val="F59E0B"/>
                 </a:solidFill>
               </a:rPr>
-              <a:t>Total for this feature: 9 frontend/rules/docs files + 3 optional backend files. All of it scaffoldable with skills — or copy-paste, see COPY-PASTE-TUTORIAL.md.</a:t>
+              <a:t>Total for this feature: 9 frontend/rules/docs files + 3 optional backend files. All of it scaffoldable with skills — or copy-paste, see COPY-PASTE-FEATURE.md.</a:t>
             </a:r>
             <a:r>
               <a:rPr sz="1600" b="0">
@@ -5579,7 +6250,7 @@
 </p:sld>
 </file>
 
-<file path=ppt/slides/slide15.xml><?xml version="1.0" encoding="utf-8"?>
+<file path=ppt/slides/slide16.xml><?xml version="1.0" encoding="utf-8"?>
 <p:sld xmlns:a="http://schemas.openxmlformats.org/drawingml/2006/main" xmlns:p="http://schemas.openxmlformats.org/presentationml/2006/main" xmlns:r="http://schemas.openxmlformats.org/officeDocument/2006/relationships">
   <p:cSld>
     <p:bg>
@@ -5873,7 +6544,7 @@
                   <a:srgbClr val="64748B"/>
                 </a:solidFill>
               </a:rPr>
-              <a:t>Copy-paste version: docs/COPY-PASTE-TUTORIAL.md  ·  Full record: docs/TUTORIAL-WALKTHROUGH.md</a:t>
+              <a:t>Copy-paste version: docs/COPY-PASTE-FEATURE.md  ·  Full record: docs/TUTORIAL-WALKTHROUGH.md</a:t>
             </a:r>
           </a:p>
         </p:txBody>
@@ -5886,9 +6557,577 @@
 </p:sld>
 </file>
 
-<file path=ppt/slides/slide16.xml><?xml version="1.0" encoding="utf-8"?>
+<file path=ppt/slides/slide2.xml><?xml version="1.0" encoding="utf-8"?>
 <p:sld xmlns:a="http://schemas.openxmlformats.org/drawingml/2006/main" xmlns:p="http://schemas.openxmlformats.org/presentationml/2006/main" xmlns:r="http://schemas.openxmlformats.org/officeDocument/2006/relationships">
   <p:cSld>
+    <p:bg>
+      <p:bgPr>
+        <a:solidFill>
+          <a:srgbClr val="FFFFFF"/>
+        </a:solidFill>
+        <a:effectLst/>
+      </p:bgPr>
+    </p:bg>
+    <p:spTree>
+      <p:nvGrpSpPr>
+        <p:cNvPr id="1" name=""/>
+        <p:cNvGrpSpPr/>
+        <p:nvPr/>
+      </p:nvGrpSpPr>
+      <p:grpSpPr/>
+      <p:sp>
+        <p:nvSpPr>
+          <p:cNvPr id="2" name="TextBox 1"/>
+          <p:cNvSpPr txBox="1"/>
+          <p:nvPr/>
+        </p:nvSpPr>
+        <p:spPr>
+          <a:xfrm>
+            <a:off x="548640" y="384048"/>
+            <a:ext cx="11338560" cy="685800"/>
+          </a:xfrm>
+          <a:prstGeom prst="rect">
+            <a:avLst/>
+          </a:prstGeom>
+          <a:noFill/>
+        </p:spPr>
+        <p:txBody>
+          <a:bodyPr wrap="square">
+            <a:spAutoFit/>
+          </a:bodyPr>
+          <a:lstStyle/>
+          <a:p>
+            <a:pPr algn="l">
+              <a:spcAft>
+                <a:spcPts val="800"/>
+              </a:spcAft>
+            </a:pPr>
+            <a:r>
+              <a:rPr sz="3000" b="1">
+                <a:solidFill>
+                  <a:srgbClr val="0F172A"/>
+                </a:solidFill>
+              </a:rPr>
+              <a:t>The recipe</a:t>
+            </a:r>
+          </a:p>
+        </p:txBody>
+      </p:sp>
+      <p:sp>
+        <p:nvSpPr>
+          <p:cNvPr id="3" name="TextBox 2"/>
+          <p:cNvSpPr txBox="1"/>
+          <p:nvPr/>
+        </p:nvSpPr>
+        <p:spPr>
+          <a:xfrm>
+            <a:off x="548640" y="1115568"/>
+            <a:ext cx="11064240" cy="457200"/>
+          </a:xfrm>
+          <a:prstGeom prst="rect">
+            <a:avLst/>
+          </a:prstGeom>
+          <a:noFill/>
+        </p:spPr>
+        <p:txBody>
+          <a:bodyPr wrap="square">
+            <a:spAutoFit/>
+          </a:bodyPr>
+          <a:lstStyle/>
+          <a:p>
+            <a:pPr algn="l">
+              <a:spcAft>
+                <a:spcPts val="800"/>
+              </a:spcAft>
+            </a:pPr>
+            <a:r>
+              <a:rPr sz="1500" b="0">
+                <a:solidFill>
+                  <a:srgbClr val="64748B"/>
+                </a:solidFill>
+              </a:rPr>
+              <a:t>Three steps for every feature — plus one optional</a:t>
+            </a:r>
+          </a:p>
+        </p:txBody>
+      </p:sp>
+      <p:sp>
+        <p:nvSpPr>
+          <p:cNvPr id="4" name="Rounded Rectangle 3"/>
+          <p:cNvSpPr/>
+          <p:nvPr/>
+        </p:nvSpPr>
+        <p:spPr>
+          <a:xfrm>
+            <a:off x="548640" y="2084832"/>
+            <a:ext cx="1371600" cy="438912"/>
+          </a:xfrm>
+          <a:prstGeom prst="roundRect">
+            <a:avLst/>
+          </a:prstGeom>
+          <a:solidFill>
+            <a:srgbClr val="0F172A"/>
+          </a:solidFill>
+          <a:ln>
+            <a:noFill/>
+          </a:ln>
+          <a:effectLst/>
+        </p:spPr>
+        <p:style>
+          <a:lnRef idx="1">
+            <a:schemeClr val="accent1"/>
+          </a:lnRef>
+          <a:fillRef idx="3">
+            <a:schemeClr val="accent1"/>
+          </a:fillRef>
+          <a:effectRef idx="2">
+            <a:schemeClr val="accent1"/>
+          </a:effectRef>
+          <a:fontRef idx="minor">
+            <a:schemeClr val="lt1"/>
+          </a:fontRef>
+        </p:style>
+        <p:txBody>
+          <a:bodyPr rtlCol="0" anchor="ctr"/>
+          <a:lstStyle/>
+          <a:p>
+            <a:pPr algn="ctr"/>
+            <a:r>
+              <a:rPr sz="1300" b="1">
+                <a:solidFill>
+                  <a:srgbClr val="FFFFFF"/>
+                </a:solidFill>
+              </a:rPr>
+              <a:t>STEP 1</a:t>
+            </a:r>
+          </a:p>
+        </p:txBody>
+      </p:sp>
+      <p:sp>
+        <p:nvSpPr>
+          <p:cNvPr id="5" name="TextBox 4"/>
+          <p:cNvSpPr txBox="1"/>
+          <p:nvPr/>
+        </p:nvSpPr>
+        <p:spPr>
+          <a:xfrm>
+            <a:off x="2286000" y="1920240"/>
+            <a:ext cx="9326880" cy="914400"/>
+          </a:xfrm>
+          <a:prstGeom prst="rect">
+            <a:avLst/>
+          </a:prstGeom>
+          <a:noFill/>
+        </p:spPr>
+        <p:txBody>
+          <a:bodyPr wrap="square">
+            <a:spAutoFit/>
+          </a:bodyPr>
+          <a:lstStyle/>
+          <a:p>
+            <a:pPr algn="l">
+              <a:spcAft>
+                <a:spcPts val="200"/>
+              </a:spcAft>
+            </a:pPr>
+            <a:r>
+              <a:rPr sz="2000" b="1">
+                <a:solidFill>
+                  <a:srgbClr val="0F172A"/>
+                </a:solidFill>
+              </a:rPr>
+              <a:t>Define the data</a:t>
+            </a:r>
+          </a:p>
+          <a:p>
+            <a:pPr algn="l">
+              <a:spcAft>
+                <a:spcPts val="800"/>
+              </a:spcAft>
+            </a:pPr>
+            <a:r>
+              <a:rPr sz="1400" b="0">
+                <a:solidFill>
+                  <a:srgbClr val="334155"/>
+                </a:solidFill>
+              </a:rPr>
+              <a:t>Type · typed collection · security rules · schema doc</a:t>
+            </a:r>
+          </a:p>
+        </p:txBody>
+      </p:sp>
+      <p:sp>
+        <p:nvSpPr>
+          <p:cNvPr id="6" name="Rounded Rectangle 5"/>
+          <p:cNvSpPr/>
+          <p:nvPr/>
+        </p:nvSpPr>
+        <p:spPr>
+          <a:xfrm>
+            <a:off x="548640" y="3163824"/>
+            <a:ext cx="1371600" cy="438912"/>
+          </a:xfrm>
+          <a:prstGeom prst="roundRect">
+            <a:avLst/>
+          </a:prstGeom>
+          <a:solidFill>
+            <a:srgbClr val="0F172A"/>
+          </a:solidFill>
+          <a:ln>
+            <a:noFill/>
+          </a:ln>
+          <a:effectLst/>
+        </p:spPr>
+        <p:style>
+          <a:lnRef idx="1">
+            <a:schemeClr val="accent1"/>
+          </a:lnRef>
+          <a:fillRef idx="3">
+            <a:schemeClr val="accent1"/>
+          </a:fillRef>
+          <a:effectRef idx="2">
+            <a:schemeClr val="accent1"/>
+          </a:effectRef>
+          <a:fontRef idx="minor">
+            <a:schemeClr val="lt1"/>
+          </a:fontRef>
+        </p:style>
+        <p:txBody>
+          <a:bodyPr rtlCol="0" anchor="ctr"/>
+          <a:lstStyle/>
+          <a:p>
+            <a:pPr algn="ctr"/>
+            <a:r>
+              <a:rPr sz="1300" b="1">
+                <a:solidFill>
+                  <a:srgbClr val="FFFFFF"/>
+                </a:solidFill>
+              </a:rPr>
+              <a:t>STEP 2</a:t>
+            </a:r>
+          </a:p>
+        </p:txBody>
+      </p:sp>
+      <p:sp>
+        <p:nvSpPr>
+          <p:cNvPr id="7" name="TextBox 6"/>
+          <p:cNvSpPr txBox="1"/>
+          <p:nvPr/>
+        </p:nvSpPr>
+        <p:spPr>
+          <a:xfrm>
+            <a:off x="2286000" y="2999232"/>
+            <a:ext cx="9326880" cy="914400"/>
+          </a:xfrm>
+          <a:prstGeom prst="rect">
+            <a:avLst/>
+          </a:prstGeom>
+          <a:noFill/>
+        </p:spPr>
+        <p:txBody>
+          <a:bodyPr wrap="square">
+            <a:spAutoFit/>
+          </a:bodyPr>
+          <a:lstStyle/>
+          <a:p>
+            <a:pPr algn="l">
+              <a:spcAft>
+                <a:spcPts val="200"/>
+              </a:spcAft>
+            </a:pPr>
+            <a:r>
+              <a:rPr sz="2000" b="1">
+                <a:solidFill>
+                  <a:srgbClr val="0F172A"/>
+                </a:solidFill>
+              </a:rPr>
+              <a:t>Write the mutation</a:t>
+            </a:r>
+          </a:p>
+          <a:p>
+            <a:pPr algn="l">
+              <a:spcAft>
+                <a:spcPts val="800"/>
+              </a:spcAft>
+            </a:pPr>
+            <a:r>
+              <a:rPr sz="1400" b="0">
+                <a:solidFill>
+                  <a:srgbClr val="334155"/>
+                </a:solidFill>
+              </a:rPr>
+              <a:t>A Server Action: requireAuth → Zod → ActionResult</a:t>
+            </a:r>
+          </a:p>
+        </p:txBody>
+      </p:sp>
+      <p:sp>
+        <p:nvSpPr>
+          <p:cNvPr id="8" name="Rounded Rectangle 7"/>
+          <p:cNvSpPr/>
+          <p:nvPr/>
+        </p:nvSpPr>
+        <p:spPr>
+          <a:xfrm>
+            <a:off x="548640" y="4242816"/>
+            <a:ext cx="1371600" cy="438912"/>
+          </a:xfrm>
+          <a:prstGeom prst="roundRect">
+            <a:avLst/>
+          </a:prstGeom>
+          <a:solidFill>
+            <a:srgbClr val="0F172A"/>
+          </a:solidFill>
+          <a:ln>
+            <a:noFill/>
+          </a:ln>
+          <a:effectLst/>
+        </p:spPr>
+        <p:style>
+          <a:lnRef idx="1">
+            <a:schemeClr val="accent1"/>
+          </a:lnRef>
+          <a:fillRef idx="3">
+            <a:schemeClr val="accent1"/>
+          </a:fillRef>
+          <a:effectRef idx="2">
+            <a:schemeClr val="accent1"/>
+          </a:effectRef>
+          <a:fontRef idx="minor">
+            <a:schemeClr val="lt1"/>
+          </a:fontRef>
+        </p:style>
+        <p:txBody>
+          <a:bodyPr rtlCol="0" anchor="ctr"/>
+          <a:lstStyle/>
+          <a:p>
+            <a:pPr algn="ctr"/>
+            <a:r>
+              <a:rPr sz="1300" b="1">
+                <a:solidFill>
+                  <a:srgbClr val="FFFFFF"/>
+                </a:solidFill>
+              </a:rPr>
+              <a:t>STEP 3</a:t>
+            </a:r>
+          </a:p>
+        </p:txBody>
+      </p:sp>
+      <p:sp>
+        <p:nvSpPr>
+          <p:cNvPr id="9" name="TextBox 8"/>
+          <p:cNvSpPr txBox="1"/>
+          <p:nvPr/>
+        </p:nvSpPr>
+        <p:spPr>
+          <a:xfrm>
+            <a:off x="2286000" y="4078224"/>
+            <a:ext cx="9326880" cy="914400"/>
+          </a:xfrm>
+          <a:prstGeom prst="rect">
+            <a:avLst/>
+          </a:prstGeom>
+          <a:noFill/>
+        </p:spPr>
+        <p:txBody>
+          <a:bodyPr wrap="square">
+            <a:spAutoFit/>
+          </a:bodyPr>
+          <a:lstStyle/>
+          <a:p>
+            <a:pPr algn="l">
+              <a:spcAft>
+                <a:spcPts val="200"/>
+              </a:spcAft>
+            </a:pPr>
+            <a:r>
+              <a:rPr sz="2000" b="1">
+                <a:solidFill>
+                  <a:srgbClr val="0F172A"/>
+                </a:solidFill>
+              </a:rPr>
+              <a:t>Show the data</a:t>
+            </a:r>
+          </a:p>
+          <a:p>
+            <a:pPr algn="l">
+              <a:spcAft>
+                <a:spcPts val="800"/>
+              </a:spcAft>
+            </a:pPr>
+            <a:r>
+              <a:rPr sz="1400" b="0">
+                <a:solidFill>
+                  <a:srgbClr val="334155"/>
+                </a:solidFill>
+              </a:rPr>
+              <a:t>Form to add notes + a live list to see them</a:t>
+            </a:r>
+          </a:p>
+        </p:txBody>
+      </p:sp>
+      <p:sp>
+        <p:nvSpPr>
+          <p:cNvPr id="10" name="Rounded Rectangle 9"/>
+          <p:cNvSpPr/>
+          <p:nvPr/>
+        </p:nvSpPr>
+        <p:spPr>
+          <a:xfrm>
+            <a:off x="548640" y="5321808"/>
+            <a:ext cx="1371600" cy="438912"/>
+          </a:xfrm>
+          <a:prstGeom prst="roundRect">
+            <a:avLst/>
+          </a:prstGeom>
+          <a:solidFill>
+            <a:srgbClr val="64748B"/>
+          </a:solidFill>
+          <a:ln>
+            <a:noFill/>
+          </a:ln>
+          <a:effectLst/>
+        </p:spPr>
+        <p:style>
+          <a:lnRef idx="1">
+            <a:schemeClr val="accent1"/>
+          </a:lnRef>
+          <a:fillRef idx="3">
+            <a:schemeClr val="accent1"/>
+          </a:fillRef>
+          <a:effectRef idx="2">
+            <a:schemeClr val="accent1"/>
+          </a:effectRef>
+          <a:fontRef idx="minor">
+            <a:schemeClr val="lt1"/>
+          </a:fontRef>
+        </p:style>
+        <p:txBody>
+          <a:bodyPr rtlCol="0" anchor="ctr"/>
+          <a:lstStyle/>
+          <a:p>
+            <a:pPr algn="ctr"/>
+            <a:r>
+              <a:rPr sz="1300" b="1">
+                <a:solidFill>
+                  <a:srgbClr val="FFFFFF"/>
+                </a:solidFill>
+              </a:rPr>
+              <a:t>OPTIONAL</a:t>
+            </a:r>
+          </a:p>
+        </p:txBody>
+      </p:sp>
+      <p:sp>
+        <p:nvSpPr>
+          <p:cNvPr id="11" name="TextBox 10"/>
+          <p:cNvSpPr txBox="1"/>
+          <p:nvPr/>
+        </p:nvSpPr>
+        <p:spPr>
+          <a:xfrm>
+            <a:off x="2286000" y="5157216"/>
+            <a:ext cx="9326880" cy="914400"/>
+          </a:xfrm>
+          <a:prstGeom prst="rect">
+            <a:avLst/>
+          </a:prstGeom>
+          <a:noFill/>
+        </p:spPr>
+        <p:txBody>
+          <a:bodyPr wrap="square">
+            <a:spAutoFit/>
+          </a:bodyPr>
+          <a:lstStyle/>
+          <a:p>
+            <a:pPr algn="l">
+              <a:spcAft>
+                <a:spcPts val="200"/>
+              </a:spcAft>
+            </a:pPr>
+            <a:r>
+              <a:rPr sz="2000" b="1">
+                <a:solidFill>
+                  <a:srgbClr val="0F172A"/>
+                </a:solidFill>
+              </a:rPr>
+              <a:t>API endpoint</a:t>
+            </a:r>
+          </a:p>
+          <a:p>
+            <a:pPr algn="l">
+              <a:spcAft>
+                <a:spcPts val="800"/>
+              </a:spcAft>
+            </a:pPr>
+            <a:r>
+              <a:rPr sz="1400" b="0">
+                <a:solidFill>
+                  <a:srgbClr val="334155"/>
+                </a:solidFill>
+              </a:rPr>
+              <a:t>Express route + tests, only if server-to-server logic is needed</a:t>
+            </a:r>
+          </a:p>
+        </p:txBody>
+      </p:sp>
+      <p:sp>
+        <p:nvSpPr>
+          <p:cNvPr id="12" name="TextBox 11"/>
+          <p:cNvSpPr txBox="1"/>
+          <p:nvPr/>
+        </p:nvSpPr>
+        <p:spPr>
+          <a:xfrm>
+            <a:off x="548640" y="6172200"/>
+            <a:ext cx="11064240" cy="548640"/>
+          </a:xfrm>
+          <a:prstGeom prst="rect">
+            <a:avLst/>
+          </a:prstGeom>
+          <a:noFill/>
+        </p:spPr>
+        <p:txBody>
+          <a:bodyPr wrap="square">
+            <a:spAutoFit/>
+          </a:bodyPr>
+          <a:lstStyle/>
+          <a:p>
+            <a:pPr algn="l">
+              <a:spcAft>
+                <a:spcPts val="800"/>
+              </a:spcAft>
+            </a:pPr>
+            <a:r>
+              <a:rPr sz="1400" b="0">
+                <a:solidFill>
+                  <a:srgbClr val="64748B"/>
+                </a:solidFill>
+              </a:rPr>
+              <a:t>Before starting: pnpm run dev running against your real Firebase project, and a signed-in test user.</a:t>
+            </a:r>
+          </a:p>
+        </p:txBody>
+      </p:sp>
+    </p:spTree>
+  </p:cSld>
+  <p:clrMapOvr>
+    <a:masterClrMapping/>
+  </p:clrMapOvr>
+</p:sld>
+</file>
+
+<file path=ppt/slides/slide3.xml><?xml version="1.0" encoding="utf-8"?>
+<p:sld xmlns:a="http://schemas.openxmlformats.org/drawingml/2006/main" xmlns:p="http://schemas.openxmlformats.org/presentationml/2006/main" xmlns:r="http://schemas.openxmlformats.org/officeDocument/2006/relationships">
+  <p:cSld>
+    <p:bg>
+      <p:bgPr>
+        <a:solidFill>
+          <a:srgbClr val="FFFFFF"/>
+        </a:solidFill>
+        <a:effectLst/>
+      </p:bgPr>
+    </p:bg>
     <p:spTree>
       <p:nvGrpSpPr>
         <p:cNvPr id="1" name=""/>
@@ -5943,7 +7182,7 @@
                   <a:srgbClr val="0F172A"/>
                 </a:solidFill>
               </a:rPr>
-              <a:t>STEP 3a</a:t>
+              <a:t>STEP 1a</a:t>
             </a:r>
           </a:p>
         </p:txBody>
@@ -5981,7 +7220,7 @@
                   <a:srgbClr val="0F172A"/>
                 </a:solidFill>
               </a:rPr>
-              <a:t>The form — a Client Component</a:t>
+              <a:t>The TypeScript type</a:t>
             </a:r>
           </a:p>
         </p:txBody>
@@ -6019,7 +7258,1860 @@
                   <a:srgbClr val="64748B"/>
                 </a:solidFill>
               </a:rPr>
-              <a:t>Calls the Server Action like a normal async function · react-hook-form + zod</a:t>
+              <a:t>Append to the shared Firestore types — the single place types live</a:t>
+            </a:r>
+          </a:p>
+        </p:txBody>
+      </p:sp>
+      <p:sp>
+        <p:nvSpPr>
+          <p:cNvPr id="5" name="Rounded Rectangle 4"/>
+          <p:cNvSpPr/>
+          <p:nvPr/>
+        </p:nvSpPr>
+        <p:spPr>
+          <a:xfrm>
+            <a:off x="548640" y="1737360"/>
+            <a:ext cx="6949440" cy="4114800"/>
+          </a:xfrm>
+          <a:prstGeom prst="roundRect">
+            <a:avLst/>
+          </a:prstGeom>
+          <a:solidFill>
+            <a:srgbClr val="1E293B"/>
+          </a:solidFill>
+          <a:ln>
+            <a:noFill/>
+          </a:ln>
+          <a:effectLst/>
+        </p:spPr>
+        <p:style>
+          <a:lnRef idx="1">
+            <a:schemeClr val="accent1"/>
+          </a:lnRef>
+          <a:fillRef idx="3">
+            <a:schemeClr val="accent1"/>
+          </a:fillRef>
+          <a:effectRef idx="2">
+            <a:schemeClr val="accent1"/>
+          </a:effectRef>
+          <a:fontRef idx="minor">
+            <a:schemeClr val="lt1"/>
+          </a:fontRef>
+        </p:style>
+        <p:txBody>
+          <a:bodyPr rtlCol="0" anchor="t" wrap="none" lIns="228600" rIns="182880" tIns="128016"/>
+          <a:lstStyle/>
+          <a:p>
+            <a:pPr algn="ctr">
+              <a:spcAft>
+                <a:spcPts val="700"/>
+              </a:spcAft>
+            </a:pPr>
+            <a:r>
+              <a:rPr sz="1300" b="1">
+                <a:solidFill>
+                  <a:srgbClr val="F59E0B"/>
+                </a:solidFill>
+                <a:latin typeface="Courier New"/>
+              </a:rPr>
+              <a:t>frontend/src/types/firestore.ts  (append)</a:t>
+            </a:r>
+          </a:p>
+          <a:p>
+            <a:pPr>
+              <a:spcAft>
+                <a:spcPts val="100"/>
+              </a:spcAft>
+            </a:pPr>
+            <a:r>
+              <a:rPr sz="1400">
+                <a:solidFill>
+                  <a:srgbClr val="E2E8F0"/>
+                </a:solidFill>
+                <a:latin typeface="Courier New"/>
+              </a:rPr>
+              <a:t>export interface Note {</a:t>
+            </a:r>
+          </a:p>
+          <a:p>
+            <a:pPr>
+              <a:spcAft>
+                <a:spcPts val="100"/>
+              </a:spcAft>
+            </a:pPr>
+            <a:r>
+              <a:rPr sz="1400">
+                <a:solidFill>
+                  <a:srgbClr val="E2E8F0"/>
+                </a:solidFill>
+                <a:latin typeface="Courier New"/>
+              </a:rPr>
+              <a:t>  id: string</a:t>
+            </a:r>
+          </a:p>
+          <a:p>
+            <a:pPr>
+              <a:spcAft>
+                <a:spcPts val="100"/>
+              </a:spcAft>
+            </a:pPr>
+            <a:r>
+              <a:rPr sz="1400">
+                <a:solidFill>
+                  <a:srgbClr val="E2E8F0"/>
+                </a:solidFill>
+                <a:latin typeface="Courier New"/>
+              </a:rPr>
+              <a:t>  uid: string  // owner — used by security rules</a:t>
+            </a:r>
+          </a:p>
+          <a:p>
+            <a:pPr>
+              <a:spcAft>
+                <a:spcPts val="100"/>
+              </a:spcAft>
+            </a:pPr>
+            <a:r>
+              <a:rPr sz="1400">
+                <a:solidFill>
+                  <a:srgbClr val="E2E8F0"/>
+                </a:solidFill>
+                <a:latin typeface="Courier New"/>
+              </a:rPr>
+              <a:t>  title: string</a:t>
+            </a:r>
+          </a:p>
+          <a:p>
+            <a:pPr>
+              <a:spcAft>
+                <a:spcPts val="100"/>
+              </a:spcAft>
+            </a:pPr>
+            <a:r>
+              <a:rPr sz="1400">
+                <a:solidFill>
+                  <a:srgbClr val="E2E8F0"/>
+                </a:solidFill>
+                <a:latin typeface="Courier New"/>
+              </a:rPr>
+              <a:t>  body: string</a:t>
+            </a:r>
+          </a:p>
+          <a:p>
+            <a:pPr>
+              <a:spcAft>
+                <a:spcPts val="100"/>
+              </a:spcAft>
+            </a:pPr>
+            <a:r>
+              <a:rPr sz="1400">
+                <a:solidFill>
+                  <a:srgbClr val="E2E8F0"/>
+                </a:solidFill>
+                <a:latin typeface="Courier New"/>
+              </a:rPr>
+              <a:t>  createdAt: Timestamp</a:t>
+            </a:r>
+          </a:p>
+          <a:p>
+            <a:pPr>
+              <a:spcAft>
+                <a:spcPts val="100"/>
+              </a:spcAft>
+            </a:pPr>
+            <a:r>
+              <a:rPr sz="1400">
+                <a:solidFill>
+                  <a:srgbClr val="E2E8F0"/>
+                </a:solidFill>
+                <a:latin typeface="Courier New"/>
+              </a:rPr>
+              <a:t>  updatedAt: Timestamp</a:t>
+            </a:r>
+          </a:p>
+          <a:p>
+            <a:pPr>
+              <a:spcAft>
+                <a:spcPts val="100"/>
+              </a:spcAft>
+            </a:pPr>
+            <a:r>
+              <a:rPr sz="1400">
+                <a:solidFill>
+                  <a:srgbClr val="E2E8F0"/>
+                </a:solidFill>
+                <a:latin typeface="Courier New"/>
+              </a:rPr>
+              <a:t>  _schemaVersion: 1</a:t>
+            </a:r>
+          </a:p>
+          <a:p>
+            <a:pPr>
+              <a:spcAft>
+                <a:spcPts val="100"/>
+              </a:spcAft>
+            </a:pPr>
+            <a:r>
+              <a:rPr sz="1400">
+                <a:solidFill>
+                  <a:srgbClr val="E2E8F0"/>
+                </a:solidFill>
+                <a:latin typeface="Courier New"/>
+              </a:rPr>
+              <a:t>}</a:t>
+            </a:r>
+          </a:p>
+        </p:txBody>
+      </p:sp>
+      <p:sp>
+        <p:nvSpPr>
+          <p:cNvPr id="6" name="TextBox 5"/>
+          <p:cNvSpPr txBox="1"/>
+          <p:nvPr/>
+        </p:nvSpPr>
+        <p:spPr>
+          <a:xfrm>
+            <a:off x="7772400" y="1828800"/>
+            <a:ext cx="3931920" cy="4572000"/>
+          </a:xfrm>
+          <a:prstGeom prst="rect">
+            <a:avLst/>
+          </a:prstGeom>
+          <a:noFill/>
+        </p:spPr>
+        <p:txBody>
+          <a:bodyPr wrap="square">
+            <a:spAutoFit/>
+          </a:bodyPr>
+          <a:lstStyle/>
+          <a:p>
+            <a:pPr algn="l">
+              <a:spcAft>
+                <a:spcPts val="1000"/>
+              </a:spcAft>
+            </a:pPr>
+            <a:r>
+              <a:rPr sz="1500" b="1">
+                <a:solidFill>
+                  <a:srgbClr val="F59E0B"/>
+                </a:solidFill>
+              </a:rPr>
+              <a:t>•  </a:t>
+            </a:r>
+            <a:r>
+              <a:rPr sz="1500" b="0">
+                <a:solidFill>
+                  <a:srgbClr val="334155"/>
+                </a:solidFill>
+              </a:rPr>
+              <a:t>uid ties every note to its owner — rules and queries both key on it</a:t>
+            </a:r>
+          </a:p>
+          <a:p>
+            <a:pPr algn="l">
+              <a:spcAft>
+                <a:spcPts val="1000"/>
+              </a:spcAft>
+            </a:pPr>
+            <a:r>
+              <a:rPr sz="1500" b="1">
+                <a:solidFill>
+                  <a:srgbClr val="F59E0B"/>
+                </a:solidFill>
+              </a:rPr>
+              <a:t>•  </a:t>
+            </a:r>
+            <a:r>
+              <a:rPr sz="1500" b="0">
+                <a:solidFill>
+                  <a:srgbClr val="334155"/>
+                </a:solidFill>
+              </a:rPr>
+              <a:t>_schemaVersion is mandatory on every collection (enables lazy migration via /evolve-schema)</a:t>
+            </a:r>
+          </a:p>
+          <a:p>
+            <a:pPr algn="l">
+              <a:spcAft>
+                <a:spcPts val="1000"/>
+              </a:spcAft>
+            </a:pPr>
+            <a:r>
+              <a:rPr sz="1500" b="1">
+                <a:solidFill>
+                  <a:srgbClr val="F59E0B"/>
+                </a:solidFill>
+              </a:rPr>
+              <a:t>•  </a:t>
+            </a:r>
+            <a:r>
+              <a:rPr sz="1500" b="0">
+                <a:solidFill>
+                  <a:srgbClr val="334155"/>
+                </a:solidFill>
+              </a:rPr>
+              <a:t>Timestamps come from Firestore, not JS Dates</a:t>
+            </a:r>
+          </a:p>
+        </p:txBody>
+      </p:sp>
+    </p:spTree>
+  </p:cSld>
+  <p:clrMapOvr>
+    <a:masterClrMapping/>
+  </p:clrMapOvr>
+</p:sld>
+</file>
+
+<file path=ppt/slides/slide4.xml><?xml version="1.0" encoding="utf-8"?>
+<p:sld xmlns:a="http://schemas.openxmlformats.org/drawingml/2006/main" xmlns:p="http://schemas.openxmlformats.org/presentationml/2006/main" xmlns:r="http://schemas.openxmlformats.org/officeDocument/2006/relationships">
+  <p:cSld>
+    <p:bg>
+      <p:bgPr>
+        <a:solidFill>
+          <a:srgbClr val="FFFFFF"/>
+        </a:solidFill>
+        <a:effectLst/>
+      </p:bgPr>
+    </p:bg>
+    <p:spTree>
+      <p:nvGrpSpPr>
+        <p:cNvPr id="1" name=""/>
+        <p:cNvGrpSpPr/>
+        <p:nvPr/>
+      </p:nvGrpSpPr>
+      <p:grpSpPr/>
+      <p:sp>
+        <p:nvSpPr>
+          <p:cNvPr id="2" name="Rounded Rectangle 1"/>
+          <p:cNvSpPr/>
+          <p:nvPr/>
+        </p:nvSpPr>
+        <p:spPr>
+          <a:xfrm>
+            <a:off x="548640" y="457200"/>
+            <a:ext cx="1417320" cy="457200"/>
+          </a:xfrm>
+          <a:prstGeom prst="roundRect">
+            <a:avLst/>
+          </a:prstGeom>
+          <a:solidFill>
+            <a:srgbClr val="F59E0B"/>
+          </a:solidFill>
+          <a:ln>
+            <a:noFill/>
+          </a:ln>
+          <a:effectLst/>
+        </p:spPr>
+        <p:style>
+          <a:lnRef idx="1">
+            <a:schemeClr val="accent1"/>
+          </a:lnRef>
+          <a:fillRef idx="3">
+            <a:schemeClr val="accent1"/>
+          </a:fillRef>
+          <a:effectRef idx="2">
+            <a:schemeClr val="accent1"/>
+          </a:effectRef>
+          <a:fontRef idx="minor">
+            <a:schemeClr val="lt1"/>
+          </a:fontRef>
+        </p:style>
+        <p:txBody>
+          <a:bodyPr rtlCol="0" anchor="ctr"/>
+          <a:lstStyle/>
+          <a:p>
+            <a:pPr algn="ctr"/>
+            <a:r>
+              <a:rPr sz="1600" b="1">
+                <a:solidFill>
+                  <a:srgbClr val="0F172A"/>
+                </a:solidFill>
+              </a:rPr>
+              <a:t>STEP 1b</a:t>
+            </a:r>
+          </a:p>
+        </p:txBody>
+      </p:sp>
+      <p:sp>
+        <p:nvSpPr>
+          <p:cNvPr id="3" name="TextBox 2"/>
+          <p:cNvSpPr txBox="1"/>
+          <p:nvPr/>
+        </p:nvSpPr>
+        <p:spPr>
+          <a:xfrm>
+            <a:off x="2194560" y="384048"/>
+            <a:ext cx="9692640" cy="685800"/>
+          </a:xfrm>
+          <a:prstGeom prst="rect">
+            <a:avLst/>
+          </a:prstGeom>
+          <a:noFill/>
+        </p:spPr>
+        <p:txBody>
+          <a:bodyPr wrap="square">
+            <a:spAutoFit/>
+          </a:bodyPr>
+          <a:lstStyle/>
+          <a:p>
+            <a:pPr algn="l">
+              <a:spcAft>
+                <a:spcPts val="800"/>
+              </a:spcAft>
+            </a:pPr>
+            <a:r>
+              <a:rPr sz="3000" b="1">
+                <a:solidFill>
+                  <a:srgbClr val="0F172A"/>
+                </a:solidFill>
+              </a:rPr>
+              <a:t>The typed collection</a:t>
+            </a:r>
+          </a:p>
+        </p:txBody>
+      </p:sp>
+      <p:sp>
+        <p:nvSpPr>
+          <p:cNvPr id="4" name="TextBox 3"/>
+          <p:cNvSpPr txBox="1"/>
+          <p:nvPr/>
+        </p:nvSpPr>
+        <p:spPr>
+          <a:xfrm>
+            <a:off x="548640" y="1115568"/>
+            <a:ext cx="11064240" cy="457200"/>
+          </a:xfrm>
+          <a:prstGeom prst="rect">
+            <a:avLst/>
+          </a:prstGeom>
+          <a:noFill/>
+        </p:spPr>
+        <p:txBody>
+          <a:bodyPr wrap="square">
+            <a:spAutoFit/>
+          </a:bodyPr>
+          <a:lstStyle/>
+          <a:p>
+            <a:pPr algn="l">
+              <a:spcAft>
+                <a:spcPts val="800"/>
+              </a:spcAft>
+            </a:pPr>
+            <a:r>
+              <a:rPr sz="1500" b="0">
+                <a:solidFill>
+                  <a:srgbClr val="64748B"/>
+                </a:solidFill>
+              </a:rPr>
+              <a:t>Follow the existing getUsersCollection() pattern — function-style, lazy client init</a:t>
+            </a:r>
+          </a:p>
+        </p:txBody>
+      </p:sp>
+      <p:sp>
+        <p:nvSpPr>
+          <p:cNvPr id="5" name="Rounded Rectangle 4"/>
+          <p:cNvSpPr/>
+          <p:nvPr/>
+        </p:nvSpPr>
+        <p:spPr>
+          <a:xfrm>
+            <a:off x="548640" y="1737360"/>
+            <a:ext cx="6949440" cy="3840480"/>
+          </a:xfrm>
+          <a:prstGeom prst="roundRect">
+            <a:avLst/>
+          </a:prstGeom>
+          <a:solidFill>
+            <a:srgbClr val="1E293B"/>
+          </a:solidFill>
+          <a:ln>
+            <a:noFill/>
+          </a:ln>
+          <a:effectLst/>
+        </p:spPr>
+        <p:style>
+          <a:lnRef idx="1">
+            <a:schemeClr val="accent1"/>
+          </a:lnRef>
+          <a:fillRef idx="3">
+            <a:schemeClr val="accent1"/>
+          </a:fillRef>
+          <a:effectRef idx="2">
+            <a:schemeClr val="accent1"/>
+          </a:effectRef>
+          <a:fontRef idx="minor">
+            <a:schemeClr val="lt1"/>
+          </a:fontRef>
+        </p:style>
+        <p:txBody>
+          <a:bodyPr rtlCol="0" anchor="t" wrap="none" lIns="228600" rIns="182880" tIns="128016"/>
+          <a:lstStyle/>
+          <a:p>
+            <a:pPr algn="ctr">
+              <a:spcAft>
+                <a:spcPts val="700"/>
+              </a:spcAft>
+            </a:pPr>
+            <a:r>
+              <a:rPr sz="1300" b="1">
+                <a:solidFill>
+                  <a:srgbClr val="F59E0B"/>
+                </a:solidFill>
+                <a:latin typeface="Courier New"/>
+              </a:rPr>
+              <a:t>frontend/src/lib/firebase/firestore.ts  (append)</a:t>
+            </a:r>
+          </a:p>
+          <a:p>
+            <a:pPr>
+              <a:spcAft>
+                <a:spcPts val="100"/>
+              </a:spcAft>
+            </a:pPr>
+            <a:r>
+              <a:rPr sz="1400">
+                <a:solidFill>
+                  <a:srgbClr val="E2E8F0"/>
+                </a:solidFill>
+                <a:latin typeface="Courier New"/>
+              </a:rPr>
+              <a:t>import type { Note, UserProfile } from '@/types/firestore'</a:t>
+            </a:r>
+          </a:p>
+          <a:p>
+            <a:pPr>
+              <a:spcAft>
+                <a:spcPts val="100"/>
+              </a:spcAft>
+            </a:pPr>
+            <a:r>
+              <a:rPr sz="1400">
+                <a:solidFill>
+                  <a:srgbClr val="E2E8F0"/>
+                </a:solidFill>
+                <a:latin typeface="Courier New"/>
+              </a:rPr>
+              <a:t> </a:t>
+            </a:r>
+          </a:p>
+          <a:p>
+            <a:pPr>
+              <a:spcAft>
+                <a:spcPts val="100"/>
+              </a:spcAft>
+            </a:pPr>
+            <a:r>
+              <a:rPr sz="1400">
+                <a:solidFill>
+                  <a:srgbClr val="E2E8F0"/>
+                </a:solidFill>
+                <a:latin typeface="Courier New"/>
+              </a:rPr>
+              <a:t>export function getNotesCollection() {</a:t>
+            </a:r>
+          </a:p>
+          <a:p>
+            <a:pPr>
+              <a:spcAft>
+                <a:spcPts val="100"/>
+              </a:spcAft>
+            </a:pPr>
+            <a:r>
+              <a:rPr sz="1400">
+                <a:solidFill>
+                  <a:srgbClr val="E2E8F0"/>
+                </a:solidFill>
+                <a:latin typeface="Courier New"/>
+              </a:rPr>
+              <a:t>  return typedCollection&lt;Note&gt;('notes')</a:t>
+            </a:r>
+          </a:p>
+          <a:p>
+            <a:pPr>
+              <a:spcAft>
+                <a:spcPts val="100"/>
+              </a:spcAft>
+            </a:pPr>
+            <a:r>
+              <a:rPr sz="1400">
+                <a:solidFill>
+                  <a:srgbClr val="E2E8F0"/>
+                </a:solidFill>
+                <a:latin typeface="Courier New"/>
+              </a:rPr>
+              <a:t>}</a:t>
+            </a:r>
+          </a:p>
+          <a:p>
+            <a:pPr>
+              <a:spcAft>
+                <a:spcPts val="100"/>
+              </a:spcAft>
+            </a:pPr>
+            <a:r>
+              <a:rPr sz="1400">
+                <a:solidFill>
+                  <a:srgbClr val="E2E8F0"/>
+                </a:solidFill>
+                <a:latin typeface="Courier New"/>
+              </a:rPr>
+              <a:t> </a:t>
+            </a:r>
+          </a:p>
+          <a:p>
+            <a:pPr>
+              <a:spcAft>
+                <a:spcPts val="100"/>
+              </a:spcAft>
+            </a:pPr>
+            <a:r>
+              <a:rPr sz="1400">
+                <a:solidFill>
+                  <a:srgbClr val="E2E8F0"/>
+                </a:solidFill>
+                <a:latin typeface="Courier New"/>
+              </a:rPr>
+              <a:t>export function noteDoc(id: string) {</a:t>
+            </a:r>
+          </a:p>
+          <a:p>
+            <a:pPr>
+              <a:spcAft>
+                <a:spcPts val="100"/>
+              </a:spcAft>
+            </a:pPr>
+            <a:r>
+              <a:rPr sz="1400">
+                <a:solidFill>
+                  <a:srgbClr val="E2E8F0"/>
+                </a:solidFill>
+                <a:latin typeface="Courier New"/>
+              </a:rPr>
+              <a:t>  return doc(getNotesCollection(), id)</a:t>
+            </a:r>
+          </a:p>
+          <a:p>
+            <a:pPr>
+              <a:spcAft>
+                <a:spcPts val="100"/>
+              </a:spcAft>
+            </a:pPr>
+            <a:r>
+              <a:rPr sz="1400">
+                <a:solidFill>
+                  <a:srgbClr val="E2E8F0"/>
+                </a:solidFill>
+                <a:latin typeface="Courier New"/>
+              </a:rPr>
+              <a:t>}</a:t>
+            </a:r>
+          </a:p>
+        </p:txBody>
+      </p:sp>
+      <p:sp>
+        <p:nvSpPr>
+          <p:cNvPr id="6" name="TextBox 5"/>
+          <p:cNvSpPr txBox="1"/>
+          <p:nvPr/>
+        </p:nvSpPr>
+        <p:spPr>
+          <a:xfrm>
+            <a:off x="7772400" y="1828800"/>
+            <a:ext cx="3931920" cy="4572000"/>
+          </a:xfrm>
+          <a:prstGeom prst="rect">
+            <a:avLst/>
+          </a:prstGeom>
+          <a:noFill/>
+        </p:spPr>
+        <p:txBody>
+          <a:bodyPr wrap="square">
+            <a:spAutoFit/>
+          </a:bodyPr>
+          <a:lstStyle/>
+          <a:p>
+            <a:pPr algn="l">
+              <a:spcAft>
+                <a:spcPts val="1000"/>
+              </a:spcAft>
+            </a:pPr>
+            <a:r>
+              <a:rPr sz="1500" b="1">
+                <a:solidFill>
+                  <a:srgbClr val="F59E0B"/>
+                </a:solidFill>
+              </a:rPr>
+              <a:t>•  </a:t>
+            </a:r>
+            <a:r>
+              <a:rPr sz="1500" b="0">
+                <a:solidFill>
+                  <a:srgbClr val="334155"/>
+                </a:solidFill>
+              </a:rPr>
+              <a:t>Everything that touches the 'notes' collection goes through this — one place, fully typed</a:t>
+            </a:r>
+          </a:p>
+          <a:p>
+            <a:pPr algn="l">
+              <a:spcAft>
+                <a:spcPts val="1000"/>
+              </a:spcAft>
+            </a:pPr>
+            <a:r>
+              <a:rPr sz="1500" b="1">
+                <a:solidFill>
+                  <a:srgbClr val="F59E0B"/>
+                </a:solidFill>
+              </a:rPr>
+              <a:t>•  </a:t>
+            </a:r>
+            <a:r>
+              <a:rPr sz="1500" b="0">
+                <a:solidFill>
+                  <a:srgbClr val="334155"/>
+                </a:solidFill>
+              </a:rPr>
+              <a:t>typedCollection is module-private on purpose; collections are exposed as functions</a:t>
+            </a:r>
+          </a:p>
+        </p:txBody>
+      </p:sp>
+    </p:spTree>
+  </p:cSld>
+  <p:clrMapOvr>
+    <a:masterClrMapping/>
+  </p:clrMapOvr>
+</p:sld>
+</file>
+
+<file path=ppt/slides/slide5.xml><?xml version="1.0" encoding="utf-8"?>
+<p:sld xmlns:a="http://schemas.openxmlformats.org/drawingml/2006/main" xmlns:p="http://schemas.openxmlformats.org/presentationml/2006/main" xmlns:r="http://schemas.openxmlformats.org/officeDocument/2006/relationships">
+  <p:cSld>
+    <p:bg>
+      <p:bgPr>
+        <a:solidFill>
+          <a:srgbClr val="FFFFFF"/>
+        </a:solidFill>
+        <a:effectLst/>
+      </p:bgPr>
+    </p:bg>
+    <p:spTree>
+      <p:nvGrpSpPr>
+        <p:cNvPr id="1" name=""/>
+        <p:cNvGrpSpPr/>
+        <p:nvPr/>
+      </p:nvGrpSpPr>
+      <p:grpSpPr/>
+      <p:sp>
+        <p:nvSpPr>
+          <p:cNvPr id="2" name="Rounded Rectangle 1"/>
+          <p:cNvSpPr/>
+          <p:nvPr/>
+        </p:nvSpPr>
+        <p:spPr>
+          <a:xfrm>
+            <a:off x="548640" y="457200"/>
+            <a:ext cx="1417320" cy="457200"/>
+          </a:xfrm>
+          <a:prstGeom prst="roundRect">
+            <a:avLst/>
+          </a:prstGeom>
+          <a:solidFill>
+            <a:srgbClr val="F59E0B"/>
+          </a:solidFill>
+          <a:ln>
+            <a:noFill/>
+          </a:ln>
+          <a:effectLst/>
+        </p:spPr>
+        <p:style>
+          <a:lnRef idx="1">
+            <a:schemeClr val="accent1"/>
+          </a:lnRef>
+          <a:fillRef idx="3">
+            <a:schemeClr val="accent1"/>
+          </a:fillRef>
+          <a:effectRef idx="2">
+            <a:schemeClr val="accent1"/>
+          </a:effectRef>
+          <a:fontRef idx="minor">
+            <a:schemeClr val="lt1"/>
+          </a:fontRef>
+        </p:style>
+        <p:txBody>
+          <a:bodyPr rtlCol="0" anchor="ctr"/>
+          <a:lstStyle/>
+          <a:p>
+            <a:pPr algn="ctr"/>
+            <a:r>
+              <a:rPr sz="1600" b="1">
+                <a:solidFill>
+                  <a:srgbClr val="0F172A"/>
+                </a:solidFill>
+              </a:rPr>
+              <a:t>STEP 1c</a:t>
+            </a:r>
+          </a:p>
+        </p:txBody>
+      </p:sp>
+      <p:sp>
+        <p:nvSpPr>
+          <p:cNvPr id="3" name="TextBox 2"/>
+          <p:cNvSpPr txBox="1"/>
+          <p:nvPr/>
+        </p:nvSpPr>
+        <p:spPr>
+          <a:xfrm>
+            <a:off x="2194560" y="384048"/>
+            <a:ext cx="9692640" cy="685800"/>
+          </a:xfrm>
+          <a:prstGeom prst="rect">
+            <a:avLst/>
+          </a:prstGeom>
+          <a:noFill/>
+        </p:spPr>
+        <p:txBody>
+          <a:bodyPr wrap="square">
+            <a:spAutoFit/>
+          </a:bodyPr>
+          <a:lstStyle/>
+          <a:p>
+            <a:pPr algn="l">
+              <a:spcAft>
+                <a:spcPts val="800"/>
+              </a:spcAft>
+            </a:pPr>
+            <a:r>
+              <a:rPr sz="3000" b="1">
+                <a:solidFill>
+                  <a:srgbClr val="0F172A"/>
+                </a:solidFill>
+              </a:rPr>
+              <a:t>Security rules</a:t>
+            </a:r>
+          </a:p>
+        </p:txBody>
+      </p:sp>
+      <p:sp>
+        <p:nvSpPr>
+          <p:cNvPr id="4" name="TextBox 3"/>
+          <p:cNvSpPr txBox="1"/>
+          <p:nvPr/>
+        </p:nvSpPr>
+        <p:spPr>
+          <a:xfrm>
+            <a:off x="548640" y="1115568"/>
+            <a:ext cx="11064240" cy="457200"/>
+          </a:xfrm>
+          <a:prstGeom prst="rect">
+            <a:avLst/>
+          </a:prstGeom>
+          <a:noFill/>
+        </p:spPr>
+        <p:txBody>
+          <a:bodyPr wrap="square">
+            <a:spAutoFit/>
+          </a:bodyPr>
+          <a:lstStyle/>
+          <a:p>
+            <a:pPr algn="l">
+              <a:spcAft>
+                <a:spcPts val="800"/>
+              </a:spcAft>
+            </a:pPr>
+            <a:r>
+              <a:rPr sz="1500" b="0">
+                <a:solidFill>
+                  <a:srgbClr val="64748B"/>
+                </a:solidFill>
+              </a:rPr>
+              <a:t>The last line of defence — assume the client is hostile</a:t>
+            </a:r>
+          </a:p>
+        </p:txBody>
+      </p:sp>
+      <p:sp>
+        <p:nvSpPr>
+          <p:cNvPr id="5" name="Rounded Rectangle 4"/>
+          <p:cNvSpPr/>
+          <p:nvPr/>
+        </p:nvSpPr>
+        <p:spPr>
+          <a:xfrm>
+            <a:off x="548640" y="1737360"/>
+            <a:ext cx="8138160" cy="4297680"/>
+          </a:xfrm>
+          <a:prstGeom prst="roundRect">
+            <a:avLst/>
+          </a:prstGeom>
+          <a:solidFill>
+            <a:srgbClr val="1E293B"/>
+          </a:solidFill>
+          <a:ln>
+            <a:noFill/>
+          </a:ln>
+          <a:effectLst/>
+        </p:spPr>
+        <p:style>
+          <a:lnRef idx="1">
+            <a:schemeClr val="accent1"/>
+          </a:lnRef>
+          <a:fillRef idx="3">
+            <a:schemeClr val="accent1"/>
+          </a:fillRef>
+          <a:effectRef idx="2">
+            <a:schemeClr val="accent1"/>
+          </a:effectRef>
+          <a:fontRef idx="minor">
+            <a:schemeClr val="lt1"/>
+          </a:fontRef>
+        </p:style>
+        <p:txBody>
+          <a:bodyPr rtlCol="0" anchor="t" wrap="none" lIns="228600" rIns="182880" tIns="128016"/>
+          <a:lstStyle/>
+          <a:p>
+            <a:pPr algn="ctr">
+              <a:spcAft>
+                <a:spcPts val="700"/>
+              </a:spcAft>
+            </a:pPr>
+            <a:r>
+              <a:rPr sz="1000" b="1">
+                <a:solidFill>
+                  <a:srgbClr val="F59E0B"/>
+                </a:solidFill>
+                <a:latin typeface="Courier New"/>
+              </a:rPr>
+              <a:t>firebase/firestore.rules  (add above the marker comment)</a:t>
+            </a:r>
+          </a:p>
+          <a:p>
+            <a:pPr>
+              <a:spcAft>
+                <a:spcPts val="100"/>
+              </a:spcAft>
+            </a:pPr>
+            <a:r>
+              <a:rPr sz="1100">
+                <a:solidFill>
+                  <a:srgbClr val="E2E8F0"/>
+                </a:solidFill>
+                <a:latin typeface="Courier New"/>
+              </a:rPr>
+              <a:t>match /notes/{noteId} {</a:t>
+            </a:r>
+          </a:p>
+          <a:p>
+            <a:pPr>
+              <a:spcAft>
+                <a:spcPts val="100"/>
+              </a:spcAft>
+            </a:pPr>
+            <a:r>
+              <a:rPr sz="1100">
+                <a:solidFill>
+                  <a:srgbClr val="E2E8F0"/>
+                </a:solidFill>
+                <a:latin typeface="Courier New"/>
+              </a:rPr>
+              <a:t>  allow read: if isAuthenticated() &amp;&amp; isOwner(resource.data.uid)</a:t>
+            </a:r>
+          </a:p>
+          <a:p>
+            <a:pPr>
+              <a:spcAft>
+                <a:spcPts val="100"/>
+              </a:spcAft>
+            </a:pPr>
+            <a:r>
+              <a:rPr sz="1100">
+                <a:solidFill>
+                  <a:srgbClr val="E2E8F0"/>
+                </a:solidFill>
+                <a:latin typeface="Courier New"/>
+              </a:rPr>
+              <a:t>              &amp;&amp; notDeleted();</a:t>
+            </a:r>
+          </a:p>
+          <a:p>
+            <a:pPr>
+              <a:spcAft>
+                <a:spcPts val="100"/>
+              </a:spcAft>
+            </a:pPr>
+            <a:r>
+              <a:rPr sz="1100">
+                <a:solidFill>
+                  <a:srgbClr val="E2E8F0"/>
+                </a:solidFill>
+                <a:latin typeface="Courier New"/>
+              </a:rPr>
+              <a:t> </a:t>
+            </a:r>
+          </a:p>
+          <a:p>
+            <a:pPr>
+              <a:spcAft>
+                <a:spcPts val="100"/>
+              </a:spcAft>
+            </a:pPr>
+            <a:r>
+              <a:rPr sz="1100">
+                <a:solidFill>
+                  <a:srgbClr val="E2E8F0"/>
+                </a:solidFill>
+                <a:latin typeface="Courier New"/>
+              </a:rPr>
+              <a:t>  allow create: if isAuthenticated()</a:t>
+            </a:r>
+          </a:p>
+          <a:p>
+            <a:pPr>
+              <a:spcAft>
+                <a:spcPts val="100"/>
+              </a:spcAft>
+            </a:pPr>
+            <a:r>
+              <a:rPr sz="1100">
+                <a:solidFill>
+                  <a:srgbClr val="E2E8F0"/>
+                </a:solidFill>
+                <a:latin typeface="Courier New"/>
+              </a:rPr>
+              <a:t>    &amp;&amp; isOwner(request.resource.data.uid)</a:t>
+            </a:r>
+          </a:p>
+          <a:p>
+            <a:pPr>
+              <a:spcAft>
+                <a:spcPts val="100"/>
+              </a:spcAft>
+            </a:pPr>
+            <a:r>
+              <a:rPr sz="1100">
+                <a:solidFill>
+                  <a:srgbClr val="E2E8F0"/>
+                </a:solidFill>
+                <a:latin typeface="Courier New"/>
+              </a:rPr>
+              <a:t>    &amp;&amp; request.resource.data.keys().hasOnly(</a:t>
+            </a:r>
+          </a:p>
+          <a:p>
+            <a:pPr>
+              <a:spcAft>
+                <a:spcPts val="100"/>
+              </a:spcAft>
+            </a:pPr>
+            <a:r>
+              <a:rPr sz="1100">
+                <a:solidFill>
+                  <a:srgbClr val="E2E8F0"/>
+                </a:solidFill>
+                <a:latin typeface="Courier New"/>
+              </a:rPr>
+              <a:t>         ['uid','title','body','createdAt','updatedAt','_schemaVersion']);</a:t>
+            </a:r>
+          </a:p>
+          <a:p>
+            <a:pPr>
+              <a:spcAft>
+                <a:spcPts val="100"/>
+              </a:spcAft>
+            </a:pPr>
+            <a:r>
+              <a:rPr sz="1100">
+                <a:solidFill>
+                  <a:srgbClr val="E2E8F0"/>
+                </a:solidFill>
+                <a:latin typeface="Courier New"/>
+              </a:rPr>
+              <a:t> </a:t>
+            </a:r>
+          </a:p>
+          <a:p>
+            <a:pPr>
+              <a:spcAft>
+                <a:spcPts val="100"/>
+              </a:spcAft>
+            </a:pPr>
+            <a:r>
+              <a:rPr sz="1100">
+                <a:solidFill>
+                  <a:srgbClr val="E2E8F0"/>
+                </a:solidFill>
+                <a:latin typeface="Courier New"/>
+              </a:rPr>
+              <a:t>  allow update: if isAuthenticated() &amp;&amp; isOwner(resource.data.uid)</a:t>
+            </a:r>
+          </a:p>
+          <a:p>
+            <a:pPr>
+              <a:spcAft>
+                <a:spcPts val="100"/>
+              </a:spcAft>
+            </a:pPr>
+            <a:r>
+              <a:rPr sz="1100">
+                <a:solidFill>
+                  <a:srgbClr val="E2E8F0"/>
+                </a:solidFill>
+                <a:latin typeface="Courier New"/>
+              </a:rPr>
+              <a:t>    &amp;&amp; request.resource.data.uid == resource.data.uid  // uid immutable</a:t>
+            </a:r>
+          </a:p>
+          <a:p>
+            <a:pPr>
+              <a:spcAft>
+                <a:spcPts val="100"/>
+              </a:spcAft>
+            </a:pPr>
+            <a:r>
+              <a:rPr sz="1100">
+                <a:solidFill>
+                  <a:srgbClr val="E2E8F0"/>
+                </a:solidFill>
+                <a:latin typeface="Courier New"/>
+              </a:rPr>
+              <a:t>    &amp;&amp; request.resource.data.keys().hasOnly([...]);</a:t>
+            </a:r>
+          </a:p>
+          <a:p>
+            <a:pPr>
+              <a:spcAft>
+                <a:spcPts val="100"/>
+              </a:spcAft>
+            </a:pPr>
+            <a:r>
+              <a:rPr sz="1100">
+                <a:solidFill>
+                  <a:srgbClr val="E2E8F0"/>
+                </a:solidFill>
+                <a:latin typeface="Courier New"/>
+              </a:rPr>
+              <a:t> </a:t>
+            </a:r>
+          </a:p>
+          <a:p>
+            <a:pPr>
+              <a:spcAft>
+                <a:spcPts val="100"/>
+              </a:spcAft>
+            </a:pPr>
+            <a:r>
+              <a:rPr sz="1100">
+                <a:solidFill>
+                  <a:srgbClr val="E2E8F0"/>
+                </a:solidFill>
+                <a:latin typeface="Courier New"/>
+              </a:rPr>
+              <a:t>  allow delete: if false;  // soft-delete only — set deletedAt</a:t>
+            </a:r>
+          </a:p>
+          <a:p>
+            <a:pPr>
+              <a:spcAft>
+                <a:spcPts val="100"/>
+              </a:spcAft>
+            </a:pPr>
+            <a:r>
+              <a:rPr sz="1100">
+                <a:solidFill>
+                  <a:srgbClr val="E2E8F0"/>
+                </a:solidFill>
+                <a:latin typeface="Courier New"/>
+              </a:rPr>
+              <a:t>}</a:t>
+            </a:r>
+          </a:p>
+        </p:txBody>
+      </p:sp>
+      <p:sp>
+        <p:nvSpPr>
+          <p:cNvPr id="6" name="TextBox 5"/>
+          <p:cNvSpPr txBox="1"/>
+          <p:nvPr/>
+        </p:nvSpPr>
+        <p:spPr>
+          <a:xfrm>
+            <a:off x="8961120" y="1828800"/>
+            <a:ext cx="2834640" cy="4572000"/>
+          </a:xfrm>
+          <a:prstGeom prst="rect">
+            <a:avLst/>
+          </a:prstGeom>
+          <a:noFill/>
+        </p:spPr>
+        <p:txBody>
+          <a:bodyPr wrap="square">
+            <a:spAutoFit/>
+          </a:bodyPr>
+          <a:lstStyle/>
+          <a:p>
+            <a:pPr algn="l">
+              <a:spcAft>
+                <a:spcPts val="1000"/>
+              </a:spcAft>
+            </a:pPr>
+            <a:r>
+              <a:rPr sz="1300" b="1">
+                <a:solidFill>
+                  <a:srgbClr val="F59E0B"/>
+                </a:solidFill>
+              </a:rPr>
+              <a:t>•  </a:t>
+            </a:r>
+            <a:r>
+              <a:rPr sz="1300" b="0">
+                <a:solidFill>
+                  <a:srgbClr val="334155"/>
+                </a:solidFill>
+              </a:rPr>
+              <a:t>Owner-only via isOwner(uid)</a:t>
+            </a:r>
+          </a:p>
+          <a:p>
+            <a:pPr algn="l">
+              <a:spcAft>
+                <a:spcPts val="1000"/>
+              </a:spcAft>
+            </a:pPr>
+            <a:r>
+              <a:rPr sz="1300" b="1">
+                <a:solidFill>
+                  <a:srgbClr val="F59E0B"/>
+                </a:solidFill>
+              </a:rPr>
+              <a:t>•  </a:t>
+            </a:r>
+            <a:r>
+              <a:rPr sz="1300" b="0">
+                <a:solidFill>
+                  <a:srgbClr val="334155"/>
+                </a:solidFill>
+              </a:rPr>
+              <a:t>hasOnly() blocks smuggled fields</a:t>
+            </a:r>
+          </a:p>
+          <a:p>
+            <a:pPr algn="l">
+              <a:spcAft>
+                <a:spcPts val="1000"/>
+              </a:spcAft>
+            </a:pPr>
+            <a:r>
+              <a:rPr sz="1300" b="1">
+                <a:solidFill>
+                  <a:srgbClr val="F59E0B"/>
+                </a:solidFill>
+              </a:rPr>
+              <a:t>•  </a:t>
+            </a:r>
+            <a:r>
+              <a:rPr sz="1300" b="0">
+                <a:solidFill>
+                  <a:srgbClr val="334155"/>
+                </a:solidFill>
+              </a:rPr>
+              <a:t>uid can never change</a:t>
+            </a:r>
+          </a:p>
+          <a:p>
+            <a:pPr algn="l">
+              <a:spcAft>
+                <a:spcPts val="1000"/>
+              </a:spcAft>
+            </a:pPr>
+            <a:r>
+              <a:rPr sz="1300" b="1">
+                <a:solidFill>
+                  <a:srgbClr val="F59E0B"/>
+                </a:solidFill>
+              </a:rPr>
+              <a:t>•  </a:t>
+            </a:r>
+            <a:r>
+              <a:rPr sz="1300" b="0">
+                <a:solidFill>
+                  <a:srgbClr val="334155"/>
+                </a:solidFill>
+              </a:rPr>
+              <a:t>No hard deletes, ever</a:t>
+            </a:r>
+          </a:p>
+          <a:p>
+            <a:pPr algn="l">
+              <a:spcAft>
+                <a:spcPts val="1000"/>
+              </a:spcAft>
+            </a:pPr>
+            <a:r>
+              <a:rPr sz="1300" b="1">
+                <a:solidFill>
+                  <a:srgbClr val="F59E0B"/>
+                </a:solidFill>
+              </a:rPr>
+              <a:t>•  </a:t>
+            </a:r>
+            <a:r>
+              <a:rPr sz="1300" b="0">
+                <a:solidFill>
+                  <a:srgbClr val="334155"/>
+                </a:solidFill>
+              </a:rPr>
+              <a:t>Deploy it: npx firebase-tools deploy --only firestore:rules</a:t>
+            </a:r>
+          </a:p>
+        </p:txBody>
+      </p:sp>
+    </p:spTree>
+  </p:cSld>
+  <p:clrMapOvr>
+    <a:masterClrMapping/>
+  </p:clrMapOvr>
+</p:sld>
+</file>
+
+<file path=ppt/slides/slide6.xml><?xml version="1.0" encoding="utf-8"?>
+<p:sld xmlns:a="http://schemas.openxmlformats.org/drawingml/2006/main" xmlns:p="http://schemas.openxmlformats.org/presentationml/2006/main" xmlns:r="http://schemas.openxmlformats.org/officeDocument/2006/relationships">
+  <p:cSld>
+    <p:bg>
+      <p:bgPr>
+        <a:solidFill>
+          <a:srgbClr val="FFFFFF"/>
+        </a:solidFill>
+        <a:effectLst/>
+      </p:bgPr>
+    </p:bg>
+    <p:spTree>
+      <p:nvGrpSpPr>
+        <p:cNvPr id="1" name=""/>
+        <p:cNvGrpSpPr/>
+        <p:nvPr/>
+      </p:nvGrpSpPr>
+      <p:grpSpPr/>
+      <p:sp>
+        <p:nvSpPr>
+          <p:cNvPr id="2" name="Rounded Rectangle 1"/>
+          <p:cNvSpPr/>
+          <p:nvPr/>
+        </p:nvSpPr>
+        <p:spPr>
+          <a:xfrm>
+            <a:off x="548640" y="457200"/>
+            <a:ext cx="1417320" cy="457200"/>
+          </a:xfrm>
+          <a:prstGeom prst="roundRect">
+            <a:avLst/>
+          </a:prstGeom>
+          <a:solidFill>
+            <a:srgbClr val="F59E0B"/>
+          </a:solidFill>
+          <a:ln>
+            <a:noFill/>
+          </a:ln>
+          <a:effectLst/>
+        </p:spPr>
+        <p:style>
+          <a:lnRef idx="1">
+            <a:schemeClr val="accent1"/>
+          </a:lnRef>
+          <a:fillRef idx="3">
+            <a:schemeClr val="accent1"/>
+          </a:fillRef>
+          <a:effectRef idx="2">
+            <a:schemeClr val="accent1"/>
+          </a:effectRef>
+          <a:fontRef idx="minor">
+            <a:schemeClr val="lt1"/>
+          </a:fontRef>
+        </p:style>
+        <p:txBody>
+          <a:bodyPr rtlCol="0" anchor="ctr"/>
+          <a:lstStyle/>
+          <a:p>
+            <a:pPr algn="ctr"/>
+            <a:r>
+              <a:rPr sz="1600" b="1">
+                <a:solidFill>
+                  <a:srgbClr val="0F172A"/>
+                </a:solidFill>
+              </a:rPr>
+              <a:t>STEP 1d</a:t>
+            </a:r>
+          </a:p>
+        </p:txBody>
+      </p:sp>
+      <p:sp>
+        <p:nvSpPr>
+          <p:cNvPr id="3" name="TextBox 2"/>
+          <p:cNvSpPr txBox="1"/>
+          <p:nvPr/>
+        </p:nvSpPr>
+        <p:spPr>
+          <a:xfrm>
+            <a:off x="2194560" y="384048"/>
+            <a:ext cx="9692640" cy="685800"/>
+          </a:xfrm>
+          <a:prstGeom prst="rect">
+            <a:avLst/>
+          </a:prstGeom>
+          <a:noFill/>
+        </p:spPr>
+        <p:txBody>
+          <a:bodyPr wrap="square">
+            <a:spAutoFit/>
+          </a:bodyPr>
+          <a:lstStyle/>
+          <a:p>
+            <a:pPr algn="l">
+              <a:spcAft>
+                <a:spcPts val="800"/>
+              </a:spcAft>
+            </a:pPr>
+            <a:r>
+              <a:rPr sz="3000" b="1">
+                <a:solidFill>
+                  <a:srgbClr val="0F172A"/>
+                </a:solidFill>
+              </a:rPr>
+              <a:t>Document the schema</a:t>
+            </a:r>
+          </a:p>
+        </p:txBody>
+      </p:sp>
+      <p:sp>
+        <p:nvSpPr>
+          <p:cNvPr id="4" name="TextBox 3"/>
+          <p:cNvSpPr txBox="1"/>
+          <p:nvPr/>
+        </p:nvSpPr>
+        <p:spPr>
+          <a:xfrm>
+            <a:off x="548640" y="1115568"/>
+            <a:ext cx="11064240" cy="457200"/>
+          </a:xfrm>
+          <a:prstGeom prst="rect">
+            <a:avLst/>
+          </a:prstGeom>
+          <a:noFill/>
+        </p:spPr>
+        <p:txBody>
+          <a:bodyPr wrap="square">
+            <a:spAutoFit/>
+          </a:bodyPr>
+          <a:lstStyle/>
+          <a:p>
+            <a:pPr algn="l">
+              <a:spcAft>
+                <a:spcPts val="800"/>
+              </a:spcAft>
+            </a:pPr>
+            <a:r>
+              <a:rPr sz="1500" b="0">
+                <a:solidFill>
+                  <a:srgbClr val="64748B"/>
+                </a:solidFill>
+              </a:rPr>
+              <a:t>docs/FIRESTORE-SCHEMA.md — so the next person (or next Claude session) knows the shape</a:t>
+            </a:r>
+          </a:p>
+        </p:txBody>
+      </p:sp>
+      <p:sp>
+        <p:nvSpPr>
+          <p:cNvPr id="5" name="Rounded Rectangle 4"/>
+          <p:cNvSpPr/>
+          <p:nvPr/>
+        </p:nvSpPr>
+        <p:spPr>
+          <a:xfrm>
+            <a:off x="548640" y="1737360"/>
+            <a:ext cx="7498079" cy="3291840"/>
+          </a:xfrm>
+          <a:prstGeom prst="roundRect">
+            <a:avLst/>
+          </a:prstGeom>
+          <a:solidFill>
+            <a:srgbClr val="1E293B"/>
+          </a:solidFill>
+          <a:ln>
+            <a:noFill/>
+          </a:ln>
+          <a:effectLst/>
+        </p:spPr>
+        <p:style>
+          <a:lnRef idx="1">
+            <a:schemeClr val="accent1"/>
+          </a:lnRef>
+          <a:fillRef idx="3">
+            <a:schemeClr val="accent1"/>
+          </a:fillRef>
+          <a:effectRef idx="2">
+            <a:schemeClr val="accent1"/>
+          </a:effectRef>
+          <a:fontRef idx="minor">
+            <a:schemeClr val="lt1"/>
+          </a:fontRef>
+        </p:style>
+        <p:txBody>
+          <a:bodyPr rtlCol="0" anchor="t" wrap="none" lIns="228600" rIns="182880" tIns="128016"/>
+          <a:lstStyle/>
+          <a:p>
+            <a:pPr algn="ctr">
+              <a:spcAft>
+                <a:spcPts val="700"/>
+              </a:spcAft>
+            </a:pPr>
+            <a:r>
+              <a:rPr sz="1100" b="1">
+                <a:solidFill>
+                  <a:srgbClr val="F59E0B"/>
+                </a:solidFill>
+                <a:latin typeface="Courier New"/>
+              </a:rPr>
+              <a:t>docs/FIRESTORE-SCHEMA.md  (append)</a:t>
+            </a:r>
+          </a:p>
+          <a:p>
+            <a:pPr>
+              <a:spcAft>
+                <a:spcPts val="100"/>
+              </a:spcAft>
+            </a:pPr>
+            <a:r>
+              <a:rPr sz="1200">
+                <a:solidFill>
+                  <a:srgbClr val="94A3B8"/>
+                </a:solidFill>
+                <a:latin typeface="Courier New"/>
+              </a:rPr>
+              <a:t>## `notes` collection</a:t>
+            </a:r>
+          </a:p>
+          <a:p>
+            <a:pPr>
+              <a:spcAft>
+                <a:spcPts val="100"/>
+              </a:spcAft>
+            </a:pPr>
+            <a:r>
+              <a:rPr sz="1200">
+                <a:solidFill>
+                  <a:srgbClr val="E2E8F0"/>
+                </a:solidFill>
+                <a:latin typeface="Courier New"/>
+              </a:rPr>
+              <a:t> </a:t>
+            </a:r>
+          </a:p>
+          <a:p>
+            <a:pPr>
+              <a:spcAft>
+                <a:spcPts val="100"/>
+              </a:spcAft>
+            </a:pPr>
+            <a:r>
+              <a:rPr sz="1200">
+                <a:solidFill>
+                  <a:srgbClr val="E2E8F0"/>
+                </a:solidFill>
+                <a:latin typeface="Courier New"/>
+              </a:rPr>
+              <a:t>**Path:** /notes/{noteId}   **Access:** owner-only</a:t>
+            </a:r>
+          </a:p>
+          <a:p>
+            <a:pPr>
+              <a:spcAft>
+                <a:spcPts val="100"/>
+              </a:spcAft>
+            </a:pPr>
+            <a:r>
+              <a:rPr sz="1200">
+                <a:solidFill>
+                  <a:srgbClr val="E2E8F0"/>
+                </a:solidFill>
+                <a:latin typeface="Courier New"/>
+              </a:rPr>
+              <a:t> </a:t>
+            </a:r>
+          </a:p>
+          <a:p>
+            <a:pPr>
+              <a:spcAft>
+                <a:spcPts val="100"/>
+              </a:spcAft>
+            </a:pPr>
+            <a:r>
+              <a:rPr sz="1200">
+                <a:solidFill>
+                  <a:srgbClr val="E2E8F0"/>
+                </a:solidFill>
+                <a:latin typeface="Courier New"/>
+              </a:rPr>
+              <a:t>| Field          | Type      | Description            |</a:t>
+            </a:r>
+          </a:p>
+          <a:p>
+            <a:pPr>
+              <a:spcAft>
+                <a:spcPts val="100"/>
+              </a:spcAft>
+            </a:pPr>
+            <a:r>
+              <a:rPr sz="1200">
+                <a:solidFill>
+                  <a:srgbClr val="E2E8F0"/>
+                </a:solidFill>
+                <a:latin typeface="Courier New"/>
+              </a:rPr>
+              <a:t>| uid            | string    | Owner's Auth UID       |</a:t>
+            </a:r>
+          </a:p>
+          <a:p>
+            <a:pPr>
+              <a:spcAft>
+                <a:spcPts val="100"/>
+              </a:spcAft>
+            </a:pPr>
+            <a:r>
+              <a:rPr sz="1200">
+                <a:solidFill>
+                  <a:srgbClr val="E2E8F0"/>
+                </a:solidFill>
+                <a:latin typeface="Courier New"/>
+              </a:rPr>
+              <a:t>| title          | string    | 1–200 chars            |</a:t>
+            </a:r>
+          </a:p>
+          <a:p>
+            <a:pPr>
+              <a:spcAft>
+                <a:spcPts val="100"/>
+              </a:spcAft>
+            </a:pPr>
+            <a:r>
+              <a:rPr sz="1200">
+                <a:solidFill>
+                  <a:srgbClr val="E2E8F0"/>
+                </a:solidFill>
+                <a:latin typeface="Courier New"/>
+              </a:rPr>
+              <a:t>| body           | string    | up to 10 000 chars     |</a:t>
+            </a:r>
+          </a:p>
+          <a:p>
+            <a:pPr>
+              <a:spcAft>
+                <a:spcPts val="100"/>
+              </a:spcAft>
+            </a:pPr>
+            <a:r>
+              <a:rPr sz="1200">
+                <a:solidFill>
+                  <a:srgbClr val="E2E8F0"/>
+                </a:solidFill>
+                <a:latin typeface="Courier New"/>
+              </a:rPr>
+              <a:t>| _schemaVersion | 1         | for lazy migration     |</a:t>
+            </a:r>
+          </a:p>
+        </p:txBody>
+      </p:sp>
+      <p:sp>
+        <p:nvSpPr>
+          <p:cNvPr id="6" name="TextBox 5"/>
+          <p:cNvSpPr txBox="1"/>
+          <p:nvPr/>
+        </p:nvSpPr>
+        <p:spPr>
+          <a:xfrm>
+            <a:off x="548640" y="6172200"/>
+            <a:ext cx="11064240" cy="548640"/>
+          </a:xfrm>
+          <a:prstGeom prst="rect">
+            <a:avLst/>
+          </a:prstGeom>
+          <a:noFill/>
+        </p:spPr>
+        <p:txBody>
+          <a:bodyPr wrap="square">
+            <a:spAutoFit/>
+          </a:bodyPr>
+          <a:lstStyle/>
+          <a:p>
+            <a:pPr algn="l">
+              <a:spcAft>
+                <a:spcPts val="800"/>
+              </a:spcAft>
+            </a:pPr>
+            <a:r>
+              <a:rPr sz="1400" b="0">
+                <a:solidFill>
+                  <a:srgbClr val="F59E0B"/>
+                </a:solidFill>
+              </a:rPr>
+              <a:t>Shortcut: the /firebase-collection skill does steps 1a–1d in one go — type, collection, rules, and docs.</a:t>
+            </a:r>
+          </a:p>
+        </p:txBody>
+      </p:sp>
+    </p:spTree>
+  </p:cSld>
+  <p:clrMapOvr>
+    <a:masterClrMapping/>
+  </p:clrMapOvr>
+</p:sld>
+</file>
+
+<file path=ppt/slides/slide7.xml><?xml version="1.0" encoding="utf-8"?>
+<p:sld xmlns:a="http://schemas.openxmlformats.org/drawingml/2006/main" xmlns:p="http://schemas.openxmlformats.org/presentationml/2006/main" xmlns:r="http://schemas.openxmlformats.org/officeDocument/2006/relationships">
+  <p:cSld>
+    <p:bg>
+      <p:bgPr>
+        <a:solidFill>
+          <a:srgbClr val="FFFFFF"/>
+        </a:solidFill>
+        <a:effectLst/>
+      </p:bgPr>
+    </p:bg>
+    <p:spTree>
+      <p:nvGrpSpPr>
+        <p:cNvPr id="1" name=""/>
+        <p:cNvGrpSpPr/>
+        <p:nvPr/>
+      </p:nvGrpSpPr>
+      <p:grpSpPr/>
+      <p:sp>
+        <p:nvSpPr>
+          <p:cNvPr id="2" name="Rounded Rectangle 1"/>
+          <p:cNvSpPr/>
+          <p:nvPr/>
+        </p:nvSpPr>
+        <p:spPr>
+          <a:xfrm>
+            <a:off x="548640" y="457200"/>
+            <a:ext cx="1417320" cy="457200"/>
+          </a:xfrm>
+          <a:prstGeom prst="roundRect">
+            <a:avLst/>
+          </a:prstGeom>
+          <a:solidFill>
+            <a:srgbClr val="F59E0B"/>
+          </a:solidFill>
+          <a:ln>
+            <a:noFill/>
+          </a:ln>
+          <a:effectLst/>
+        </p:spPr>
+        <p:style>
+          <a:lnRef idx="1">
+            <a:schemeClr val="accent1"/>
+          </a:lnRef>
+          <a:fillRef idx="3">
+            <a:schemeClr val="accent1"/>
+          </a:fillRef>
+          <a:effectRef idx="2">
+            <a:schemeClr val="accent1"/>
+          </a:effectRef>
+          <a:fontRef idx="minor">
+            <a:schemeClr val="lt1"/>
+          </a:fontRef>
+        </p:style>
+        <p:txBody>
+          <a:bodyPr rtlCol="0" anchor="ctr"/>
+          <a:lstStyle/>
+          <a:p>
+            <a:pPr algn="ctr"/>
+            <a:r>
+              <a:rPr sz="1600" b="1">
+                <a:solidFill>
+                  <a:srgbClr val="0F172A"/>
+                </a:solidFill>
+              </a:rPr>
+              <a:t>STEP 2</a:t>
+            </a:r>
+          </a:p>
+        </p:txBody>
+      </p:sp>
+      <p:sp>
+        <p:nvSpPr>
+          <p:cNvPr id="3" name="TextBox 2"/>
+          <p:cNvSpPr txBox="1"/>
+          <p:nvPr/>
+        </p:nvSpPr>
+        <p:spPr>
+          <a:xfrm>
+            <a:off x="2194560" y="384048"/>
+            <a:ext cx="9692640" cy="685800"/>
+          </a:xfrm>
+          <a:prstGeom prst="rect">
+            <a:avLst/>
+          </a:prstGeom>
+          <a:noFill/>
+        </p:spPr>
+        <p:txBody>
+          <a:bodyPr wrap="square">
+            <a:spAutoFit/>
+          </a:bodyPr>
+          <a:lstStyle/>
+          <a:p>
+            <a:pPr algn="l">
+              <a:spcAft>
+                <a:spcPts val="800"/>
+              </a:spcAft>
+            </a:pPr>
+            <a:r>
+              <a:rPr sz="3000" b="1">
+                <a:solidFill>
+                  <a:srgbClr val="0F172A"/>
+                </a:solidFill>
+              </a:rPr>
+              <a:t>The mutation — a Server Action</a:t>
+            </a:r>
+          </a:p>
+        </p:txBody>
+      </p:sp>
+      <p:sp>
+        <p:nvSpPr>
+          <p:cNvPr id="4" name="TextBox 3"/>
+          <p:cNvSpPr txBox="1"/>
+          <p:nvPr/>
+        </p:nvSpPr>
+        <p:spPr>
+          <a:xfrm>
+            <a:off x="548640" y="1115568"/>
+            <a:ext cx="11064240" cy="457200"/>
+          </a:xfrm>
+          <a:prstGeom prst="rect">
+            <a:avLst/>
+          </a:prstGeom>
+          <a:noFill/>
+        </p:spPr>
+        <p:txBody>
+          <a:bodyPr wrap="square">
+            <a:spAutoFit/>
+          </a:bodyPr>
+          <a:lstStyle/>
+          <a:p>
+            <a:pPr algn="l">
+              <a:spcAft>
+                <a:spcPts val="800"/>
+              </a:spcAft>
+            </a:pPr>
+            <a:r>
+              <a:rPr sz="1500" b="0">
+                <a:solidFill>
+                  <a:srgbClr val="64748B"/>
+                </a:solidFill>
+              </a:rPr>
+              <a:t>Runs on the server, called like a function · the three-beat pattern</a:t>
             </a:r>
           </a:p>
         </p:txBody>
@@ -6076,7 +9168,7 @@
                 </a:solidFill>
                 <a:latin typeface="Courier New"/>
               </a:rPr>
-              <a:t>frontend/src/features/notes/components/CreateNoteForm.tsx  (new)</a:t>
+              <a:t>frontend/src/features/notes/actions/notes.actions.ts  (new)</a:t>
             </a:r>
           </a:p>
           <a:p>
@@ -6092,7 +9184,7 @@
                 </a:solidFill>
                 <a:latin typeface="Courier New"/>
               </a:rPr>
-              <a:t>'use client'</a:t>
+              <a:t>'use server'</a:t>
             </a:r>
           </a:p>
           <a:p>
@@ -6124,7 +9216,7 @@
                 </a:solidFill>
                 <a:latin typeface="Courier New"/>
               </a:rPr>
-              <a:t>import { useForm } from 'react-hook-form'</a:t>
+              <a:t>const createNoteSchema = z.object({</a:t>
             </a:r>
           </a:p>
           <a:p>
@@ -6140,7 +9232,7 @@
                 </a:solidFill>
                 <a:latin typeface="Courier New"/>
               </a:rPr>
-              <a:t>import { zodResolver } from '@hookform/resolvers/zod'</a:t>
+              <a:t>  title: z.string().min(1).max(200),</a:t>
             </a:r>
           </a:p>
           <a:p>
@@ -6156,7 +9248,7 @@
                 </a:solidFill>
                 <a:latin typeface="Courier New"/>
               </a:rPr>
-              <a:t>import { toast } from 'sonner'</a:t>
+              <a:t>  body: z.string().max(10_000),</a:t>
             </a:r>
           </a:p>
           <a:p>
@@ -6172,7 +9264,7 @@
                 </a:solidFill>
                 <a:latin typeface="Courier New"/>
               </a:rPr>
-              <a:t>import { createNote } from '@/features/notes/actions/notes.actions'</a:t>
+              <a:t>})</a:t>
             </a:r>
           </a:p>
           <a:p>
@@ -6204,7 +9296,7 @@
                 </a:solidFill>
                 <a:latin typeface="Courier New"/>
               </a:rPr>
-              <a:t>const createNoteFormSchema = z.object({</a:t>
+              <a:t>export async function createNote(input: unknown):</a:t>
             </a:r>
           </a:p>
           <a:p>
@@ -6220,7 +9312,7 @@
                 </a:solidFill>
                 <a:latin typeface="Courier New"/>
               </a:rPr>
-              <a:t>  title: z.string().min(1, 'Title is required').max(200),</a:t>
+              <a:t>    Promise&lt;ActionResult&lt;string&gt;&gt; {</a:t>
             </a:r>
           </a:p>
           <a:p>
@@ -6236,7 +9328,7 @@
                 </a:solidFill>
                 <a:latin typeface="Courier New"/>
               </a:rPr>
-              <a:t>  body: z.string().max(10_000),</a:t>
+              <a:t>  const session = await requireAuth()              // beat 1: who?</a:t>
             </a:r>
           </a:p>
           <a:p>
@@ -6252,7 +9344,7 @@
                 </a:solidFill>
                 <a:latin typeface="Courier New"/>
               </a:rPr>
-              <a:t>})</a:t>
+              <a:t> </a:t>
             </a:r>
           </a:p>
           <a:p>
@@ -6268,6 +9360,54 @@
                 </a:solidFill>
                 <a:latin typeface="Courier New"/>
               </a:rPr>
+              <a:t>  const parsed = createNoteSchema.safeParse(input) // beat 2: sane?</a:t>
+            </a:r>
+          </a:p>
+          <a:p>
+            <a:pPr>
+              <a:spcAft>
+                <a:spcPts val="100"/>
+              </a:spcAft>
+            </a:pPr>
+            <a:r>
+              <a:rPr sz="1100">
+                <a:solidFill>
+                  <a:srgbClr val="E2E8F0"/>
+                </a:solidFill>
+                <a:latin typeface="Courier New"/>
+              </a:rPr>
+              <a:t>  if (!parsed.success)</a:t>
+            </a:r>
+          </a:p>
+          <a:p>
+            <a:pPr>
+              <a:spcAft>
+                <a:spcPts val="100"/>
+              </a:spcAft>
+            </a:pPr>
+            <a:r>
+              <a:rPr sz="1100">
+                <a:solidFill>
+                  <a:srgbClr val="E2E8F0"/>
+                </a:solidFill>
+                <a:latin typeface="Courier New"/>
+              </a:rPr>
+              <a:t>    return { success: false, error: '…' }</a:t>
+            </a:r>
+          </a:p>
+          <a:p>
+            <a:pPr>
+              <a:spcAft>
+                <a:spcPts val="100"/>
+              </a:spcAft>
+            </a:pPr>
+            <a:r>
+              <a:rPr sz="1100">
+                <a:solidFill>
+                  <a:srgbClr val="E2E8F0"/>
+                </a:solidFill>
+                <a:latin typeface="Courier New"/>
+              </a:rPr>
               <a:t> </a:t>
             </a:r>
           </a:p>
@@ -6284,7 +9424,7 @@
                 </a:solidFill>
                 <a:latin typeface="Courier New"/>
               </a:rPr>
-              <a:t>export function CreateNoteForm() {</a:t>
+              <a:t>  const ref = await adminDb.collection('notes').add({  // beat 3</a:t>
             </a:r>
           </a:p>
           <a:p>
@@ -6300,7 +9440,7 @@
                 </a:solidFill>
                 <a:latin typeface="Courier New"/>
               </a:rPr>
-              <a:t>  const { register, handleSubmit, reset, formState } = useForm(...)</a:t>
+              <a:t>    ...parsed.data, uid: session.uid,</a:t>
             </a:r>
           </a:p>
           <a:p>
@@ -6316,7 +9456,7 @@
                 </a:solidFill>
                 <a:latin typeface="Courier New"/>
               </a:rPr>
-              <a:t> </a:t>
+              <a:t>    createdAt: now, updatedAt: now, _schemaVersion: 1,</a:t>
             </a:r>
           </a:p>
           <a:p>
@@ -6332,7 +9472,7 @@
                 </a:solidFill>
                 <a:latin typeface="Courier New"/>
               </a:rPr>
-              <a:t>  const onSubmit = async (data) =&gt; {</a:t>
+              <a:t>  })</a:t>
             </a:r>
           </a:p>
           <a:p>
@@ -6348,55 +9488,7 @@
                 </a:solidFill>
                 <a:latin typeface="Courier New"/>
               </a:rPr>
-              <a:t>    const result = await createNote(data)</a:t>
-            </a:r>
-          </a:p>
-          <a:p>
-            <a:pPr>
-              <a:spcAft>
-                <a:spcPts val="100"/>
-              </a:spcAft>
-            </a:pPr>
-            <a:r>
-              <a:rPr sz="1100">
-                <a:solidFill>
-                  <a:srgbClr val="E2E8F0"/>
-                </a:solidFill>
-                <a:latin typeface="Courier New"/>
-              </a:rPr>
-              <a:t>    if (result.success) { toast.success('Note created'); reset() }</a:t>
-            </a:r>
-          </a:p>
-          <a:p>
-            <a:pPr>
-              <a:spcAft>
-                <a:spcPts val="100"/>
-              </a:spcAft>
-            </a:pPr>
-            <a:r>
-              <a:rPr sz="1100">
-                <a:solidFill>
-                  <a:srgbClr val="E2E8F0"/>
-                </a:solidFill>
-                <a:latin typeface="Courier New"/>
-              </a:rPr>
-              <a:t>    else toast.error(result.error ?? 'Failed to create note')</a:t>
-            </a:r>
-          </a:p>
-          <a:p>
-            <a:pPr>
-              <a:spcAft>
-                <a:spcPts val="100"/>
-              </a:spcAft>
-            </a:pPr>
-            <a:r>
-              <a:rPr sz="1100">
-                <a:solidFill>
-                  <a:srgbClr val="E2E8F0"/>
-                </a:solidFill>
-                <a:latin typeface="Courier New"/>
-              </a:rPr>
-              <a:t>  }</a:t>
+              <a:t>  return { success: true, data: ref.id }</a:t>
             </a:r>
           </a:p>
           <a:p>
@@ -6450,7 +9542,7 @@
                   <a:srgbClr val="F59E0B"/>
                 </a:solidFill>
               </a:rPr>
-              <a:t>react-hook-form + zod — same pattern as the sign-up form</a:t>
+              <a:t>•  </a:t>
             </a:r>
             <a:r>
               <a:rPr sz="1300" b="0">
@@ -6458,7 +9550,7 @@
                   <a:srgbClr val="334155"/>
                 </a:solidFill>
               </a:rPr>
-              <a:t/>
+              <a:t>1 · requireAuth() — redirects if nobody</a:t>
             </a:r>
           </a:p>
           <a:p>
@@ -6473,7 +9565,7 @@
                   <a:srgbClr val="F59E0B"/>
                 </a:solidFill>
               </a:rPr>
-              <a:t>onSubmit calls createNote(data) directly, no fetch needed</a:t>
+              <a:t>•  </a:t>
             </a:r>
             <a:r>
               <a:rPr sz="1300" b="0">
@@ -6481,7 +9573,7 @@
                   <a:srgbClr val="334155"/>
                 </a:solidFill>
               </a:rPr>
-              <a:t/>
+              <a:t>2 · Zod parse — nothing unvalidated touches the DB</a:t>
             </a:r>
           </a:p>
           <a:p>
@@ -6496,7 +9588,7 @@
                   <a:srgbClr val="F59E0B"/>
                 </a:solidFill>
               </a:rPr>
-              <a:t>No manual refresh — NotesList's onSnapshot picks up the write</a:t>
+              <a:t>•  </a:t>
             </a:r>
             <a:r>
               <a:rPr sz="1300" b="0">
@@ -6504,7 +9596,7 @@
                   <a:srgbClr val="334155"/>
                 </a:solidFill>
               </a:rPr>
-              <a:t/>
+              <a:t>3 · return ActionResult — never throw at the caller</a:t>
             </a:r>
           </a:p>
         </p:txBody>
@@ -6517,577 +9609,9 @@
 </p:sld>
 </file>
 
-<file path=ppt/slides/slide2.xml><?xml version="1.0" encoding="utf-8"?>
+<file path=ppt/slides/slide8.xml><?xml version="1.0" encoding="utf-8"?>
 <p:sld xmlns:a="http://schemas.openxmlformats.org/drawingml/2006/main" xmlns:p="http://schemas.openxmlformats.org/presentationml/2006/main" xmlns:r="http://schemas.openxmlformats.org/officeDocument/2006/relationships">
   <p:cSld>
-    <p:bg>
-      <p:bgPr>
-        <a:solidFill>
-          <a:srgbClr val="FFFFFF"/>
-        </a:solidFill>
-        <a:effectLst/>
-      </p:bgPr>
-    </p:bg>
-    <p:spTree>
-      <p:nvGrpSpPr>
-        <p:cNvPr id="1" name=""/>
-        <p:cNvGrpSpPr/>
-        <p:nvPr/>
-      </p:nvGrpSpPr>
-      <p:grpSpPr/>
-      <p:sp>
-        <p:nvSpPr>
-          <p:cNvPr id="2" name="TextBox 1"/>
-          <p:cNvSpPr txBox="1"/>
-          <p:nvPr/>
-        </p:nvSpPr>
-        <p:spPr>
-          <a:xfrm>
-            <a:off x="548640" y="384048"/>
-            <a:ext cx="11338560" cy="685800"/>
-          </a:xfrm>
-          <a:prstGeom prst="rect">
-            <a:avLst/>
-          </a:prstGeom>
-          <a:noFill/>
-        </p:spPr>
-        <p:txBody>
-          <a:bodyPr wrap="square">
-            <a:spAutoFit/>
-          </a:bodyPr>
-          <a:lstStyle/>
-          <a:p>
-            <a:pPr algn="l">
-              <a:spcAft>
-                <a:spcPts val="800"/>
-              </a:spcAft>
-            </a:pPr>
-            <a:r>
-              <a:rPr sz="3000" b="1">
-                <a:solidFill>
-                  <a:srgbClr val="0F172A"/>
-                </a:solidFill>
-              </a:rPr>
-              <a:t>The recipe</a:t>
-            </a:r>
-          </a:p>
-        </p:txBody>
-      </p:sp>
-      <p:sp>
-        <p:nvSpPr>
-          <p:cNvPr id="3" name="TextBox 2"/>
-          <p:cNvSpPr txBox="1"/>
-          <p:nvPr/>
-        </p:nvSpPr>
-        <p:spPr>
-          <a:xfrm>
-            <a:off x="548640" y="1115568"/>
-            <a:ext cx="11064240" cy="457200"/>
-          </a:xfrm>
-          <a:prstGeom prst="rect">
-            <a:avLst/>
-          </a:prstGeom>
-          <a:noFill/>
-        </p:spPr>
-        <p:txBody>
-          <a:bodyPr wrap="square">
-            <a:spAutoFit/>
-          </a:bodyPr>
-          <a:lstStyle/>
-          <a:p>
-            <a:pPr algn="l">
-              <a:spcAft>
-                <a:spcPts val="800"/>
-              </a:spcAft>
-            </a:pPr>
-            <a:r>
-              <a:rPr sz="1500" b="0">
-                <a:solidFill>
-                  <a:srgbClr val="64748B"/>
-                </a:solidFill>
-              </a:rPr>
-              <a:t>Three steps for every feature — plus one optional</a:t>
-            </a:r>
-          </a:p>
-        </p:txBody>
-      </p:sp>
-      <p:sp>
-        <p:nvSpPr>
-          <p:cNvPr id="4" name="Rounded Rectangle 3"/>
-          <p:cNvSpPr/>
-          <p:nvPr/>
-        </p:nvSpPr>
-        <p:spPr>
-          <a:xfrm>
-            <a:off x="548640" y="2084832"/>
-            <a:ext cx="1371600" cy="438912"/>
-          </a:xfrm>
-          <a:prstGeom prst="roundRect">
-            <a:avLst/>
-          </a:prstGeom>
-          <a:solidFill>
-            <a:srgbClr val="0F172A"/>
-          </a:solidFill>
-          <a:ln>
-            <a:noFill/>
-          </a:ln>
-          <a:effectLst/>
-        </p:spPr>
-        <p:style>
-          <a:lnRef idx="1">
-            <a:schemeClr val="accent1"/>
-          </a:lnRef>
-          <a:fillRef idx="3">
-            <a:schemeClr val="accent1"/>
-          </a:fillRef>
-          <a:effectRef idx="2">
-            <a:schemeClr val="accent1"/>
-          </a:effectRef>
-          <a:fontRef idx="minor">
-            <a:schemeClr val="lt1"/>
-          </a:fontRef>
-        </p:style>
-        <p:txBody>
-          <a:bodyPr rtlCol="0" anchor="ctr"/>
-          <a:lstStyle/>
-          <a:p>
-            <a:pPr algn="ctr"/>
-            <a:r>
-              <a:rPr sz="1300" b="1">
-                <a:solidFill>
-                  <a:srgbClr val="FFFFFF"/>
-                </a:solidFill>
-              </a:rPr>
-              <a:t>STEP 1</a:t>
-            </a:r>
-          </a:p>
-        </p:txBody>
-      </p:sp>
-      <p:sp>
-        <p:nvSpPr>
-          <p:cNvPr id="5" name="TextBox 4"/>
-          <p:cNvSpPr txBox="1"/>
-          <p:nvPr/>
-        </p:nvSpPr>
-        <p:spPr>
-          <a:xfrm>
-            <a:off x="2286000" y="1920240"/>
-            <a:ext cx="9326880" cy="914400"/>
-          </a:xfrm>
-          <a:prstGeom prst="rect">
-            <a:avLst/>
-          </a:prstGeom>
-          <a:noFill/>
-        </p:spPr>
-        <p:txBody>
-          <a:bodyPr wrap="square">
-            <a:spAutoFit/>
-          </a:bodyPr>
-          <a:lstStyle/>
-          <a:p>
-            <a:pPr algn="l">
-              <a:spcAft>
-                <a:spcPts val="200"/>
-              </a:spcAft>
-            </a:pPr>
-            <a:r>
-              <a:rPr sz="2000" b="1">
-                <a:solidFill>
-                  <a:srgbClr val="0F172A"/>
-                </a:solidFill>
-              </a:rPr>
-              <a:t>Define the data</a:t>
-            </a:r>
-          </a:p>
-          <a:p>
-            <a:pPr algn="l">
-              <a:spcAft>
-                <a:spcPts val="800"/>
-              </a:spcAft>
-            </a:pPr>
-            <a:r>
-              <a:rPr sz="1400" b="0">
-                <a:solidFill>
-                  <a:srgbClr val="334155"/>
-                </a:solidFill>
-              </a:rPr>
-              <a:t>Type · typed collection · security rules · schema doc</a:t>
-            </a:r>
-          </a:p>
-        </p:txBody>
-      </p:sp>
-      <p:sp>
-        <p:nvSpPr>
-          <p:cNvPr id="6" name="Rounded Rectangle 5"/>
-          <p:cNvSpPr/>
-          <p:nvPr/>
-        </p:nvSpPr>
-        <p:spPr>
-          <a:xfrm>
-            <a:off x="548640" y="3163824"/>
-            <a:ext cx="1371600" cy="438912"/>
-          </a:xfrm>
-          <a:prstGeom prst="roundRect">
-            <a:avLst/>
-          </a:prstGeom>
-          <a:solidFill>
-            <a:srgbClr val="0F172A"/>
-          </a:solidFill>
-          <a:ln>
-            <a:noFill/>
-          </a:ln>
-          <a:effectLst/>
-        </p:spPr>
-        <p:style>
-          <a:lnRef idx="1">
-            <a:schemeClr val="accent1"/>
-          </a:lnRef>
-          <a:fillRef idx="3">
-            <a:schemeClr val="accent1"/>
-          </a:fillRef>
-          <a:effectRef idx="2">
-            <a:schemeClr val="accent1"/>
-          </a:effectRef>
-          <a:fontRef idx="minor">
-            <a:schemeClr val="lt1"/>
-          </a:fontRef>
-        </p:style>
-        <p:txBody>
-          <a:bodyPr rtlCol="0" anchor="ctr"/>
-          <a:lstStyle/>
-          <a:p>
-            <a:pPr algn="ctr"/>
-            <a:r>
-              <a:rPr sz="1300" b="1">
-                <a:solidFill>
-                  <a:srgbClr val="FFFFFF"/>
-                </a:solidFill>
-              </a:rPr>
-              <a:t>STEP 2</a:t>
-            </a:r>
-          </a:p>
-        </p:txBody>
-      </p:sp>
-      <p:sp>
-        <p:nvSpPr>
-          <p:cNvPr id="7" name="TextBox 6"/>
-          <p:cNvSpPr txBox="1"/>
-          <p:nvPr/>
-        </p:nvSpPr>
-        <p:spPr>
-          <a:xfrm>
-            <a:off x="2286000" y="2999232"/>
-            <a:ext cx="9326880" cy="914400"/>
-          </a:xfrm>
-          <a:prstGeom prst="rect">
-            <a:avLst/>
-          </a:prstGeom>
-          <a:noFill/>
-        </p:spPr>
-        <p:txBody>
-          <a:bodyPr wrap="square">
-            <a:spAutoFit/>
-          </a:bodyPr>
-          <a:lstStyle/>
-          <a:p>
-            <a:pPr algn="l">
-              <a:spcAft>
-                <a:spcPts val="200"/>
-              </a:spcAft>
-            </a:pPr>
-            <a:r>
-              <a:rPr sz="2000" b="1">
-                <a:solidFill>
-                  <a:srgbClr val="0F172A"/>
-                </a:solidFill>
-              </a:rPr>
-              <a:t>Write the mutation</a:t>
-            </a:r>
-          </a:p>
-          <a:p>
-            <a:pPr algn="l">
-              <a:spcAft>
-                <a:spcPts val="800"/>
-              </a:spcAft>
-            </a:pPr>
-            <a:r>
-              <a:rPr sz="1400" b="0">
-                <a:solidFill>
-                  <a:srgbClr val="334155"/>
-                </a:solidFill>
-              </a:rPr>
-              <a:t>A Server Action: requireAuth → Zod → ActionResult</a:t>
-            </a:r>
-          </a:p>
-        </p:txBody>
-      </p:sp>
-      <p:sp>
-        <p:nvSpPr>
-          <p:cNvPr id="8" name="Rounded Rectangle 7"/>
-          <p:cNvSpPr/>
-          <p:nvPr/>
-        </p:nvSpPr>
-        <p:spPr>
-          <a:xfrm>
-            <a:off x="548640" y="4242816"/>
-            <a:ext cx="1371600" cy="438912"/>
-          </a:xfrm>
-          <a:prstGeom prst="roundRect">
-            <a:avLst/>
-          </a:prstGeom>
-          <a:solidFill>
-            <a:srgbClr val="0F172A"/>
-          </a:solidFill>
-          <a:ln>
-            <a:noFill/>
-          </a:ln>
-          <a:effectLst/>
-        </p:spPr>
-        <p:style>
-          <a:lnRef idx="1">
-            <a:schemeClr val="accent1"/>
-          </a:lnRef>
-          <a:fillRef idx="3">
-            <a:schemeClr val="accent1"/>
-          </a:fillRef>
-          <a:effectRef idx="2">
-            <a:schemeClr val="accent1"/>
-          </a:effectRef>
-          <a:fontRef idx="minor">
-            <a:schemeClr val="lt1"/>
-          </a:fontRef>
-        </p:style>
-        <p:txBody>
-          <a:bodyPr rtlCol="0" anchor="ctr"/>
-          <a:lstStyle/>
-          <a:p>
-            <a:pPr algn="ctr"/>
-            <a:r>
-              <a:rPr sz="1300" b="1">
-                <a:solidFill>
-                  <a:srgbClr val="FFFFFF"/>
-                </a:solidFill>
-              </a:rPr>
-              <a:t>STEP 3</a:t>
-            </a:r>
-          </a:p>
-        </p:txBody>
-      </p:sp>
-      <p:sp>
-        <p:nvSpPr>
-          <p:cNvPr id="9" name="TextBox 8"/>
-          <p:cNvSpPr txBox="1"/>
-          <p:nvPr/>
-        </p:nvSpPr>
-        <p:spPr>
-          <a:xfrm>
-            <a:off x="2286000" y="4078224"/>
-            <a:ext cx="9326880" cy="914400"/>
-          </a:xfrm>
-          <a:prstGeom prst="rect">
-            <a:avLst/>
-          </a:prstGeom>
-          <a:noFill/>
-        </p:spPr>
-        <p:txBody>
-          <a:bodyPr wrap="square">
-            <a:spAutoFit/>
-          </a:bodyPr>
-          <a:lstStyle/>
-          <a:p>
-            <a:pPr algn="l">
-              <a:spcAft>
-                <a:spcPts val="200"/>
-              </a:spcAft>
-            </a:pPr>
-            <a:r>
-              <a:rPr sz="2000" b="1">
-                <a:solidFill>
-                  <a:srgbClr val="0F172A"/>
-                </a:solidFill>
-              </a:rPr>
-              <a:t>Show the data</a:t>
-            </a:r>
-          </a:p>
-          <a:p>
-            <a:pPr algn="l">
-              <a:spcAft>
-                <a:spcPts val="800"/>
-              </a:spcAft>
-            </a:pPr>
-            <a:r>
-              <a:rPr sz="1400" b="0">
-                <a:solidFill>
-                  <a:srgbClr val="334155"/>
-                </a:solidFill>
-              </a:rPr>
-              <a:t>Form to add notes + a live list to see them</a:t>
-            </a:r>
-          </a:p>
-        </p:txBody>
-      </p:sp>
-      <p:sp>
-        <p:nvSpPr>
-          <p:cNvPr id="10" name="Rounded Rectangle 9"/>
-          <p:cNvSpPr/>
-          <p:nvPr/>
-        </p:nvSpPr>
-        <p:spPr>
-          <a:xfrm>
-            <a:off x="548640" y="5321808"/>
-            <a:ext cx="1371600" cy="438912"/>
-          </a:xfrm>
-          <a:prstGeom prst="roundRect">
-            <a:avLst/>
-          </a:prstGeom>
-          <a:solidFill>
-            <a:srgbClr val="64748B"/>
-          </a:solidFill>
-          <a:ln>
-            <a:noFill/>
-          </a:ln>
-          <a:effectLst/>
-        </p:spPr>
-        <p:style>
-          <a:lnRef idx="1">
-            <a:schemeClr val="accent1"/>
-          </a:lnRef>
-          <a:fillRef idx="3">
-            <a:schemeClr val="accent1"/>
-          </a:fillRef>
-          <a:effectRef idx="2">
-            <a:schemeClr val="accent1"/>
-          </a:effectRef>
-          <a:fontRef idx="minor">
-            <a:schemeClr val="lt1"/>
-          </a:fontRef>
-        </p:style>
-        <p:txBody>
-          <a:bodyPr rtlCol="0" anchor="ctr"/>
-          <a:lstStyle/>
-          <a:p>
-            <a:pPr algn="ctr"/>
-            <a:r>
-              <a:rPr sz="1300" b="1">
-                <a:solidFill>
-                  <a:srgbClr val="FFFFFF"/>
-                </a:solidFill>
-              </a:rPr>
-              <a:t>OPTIONAL</a:t>
-            </a:r>
-          </a:p>
-        </p:txBody>
-      </p:sp>
-      <p:sp>
-        <p:nvSpPr>
-          <p:cNvPr id="11" name="TextBox 10"/>
-          <p:cNvSpPr txBox="1"/>
-          <p:nvPr/>
-        </p:nvSpPr>
-        <p:spPr>
-          <a:xfrm>
-            <a:off x="2286000" y="5157216"/>
-            <a:ext cx="9326880" cy="914400"/>
-          </a:xfrm>
-          <a:prstGeom prst="rect">
-            <a:avLst/>
-          </a:prstGeom>
-          <a:noFill/>
-        </p:spPr>
-        <p:txBody>
-          <a:bodyPr wrap="square">
-            <a:spAutoFit/>
-          </a:bodyPr>
-          <a:lstStyle/>
-          <a:p>
-            <a:pPr algn="l">
-              <a:spcAft>
-                <a:spcPts val="200"/>
-              </a:spcAft>
-            </a:pPr>
-            <a:r>
-              <a:rPr sz="2000" b="1">
-                <a:solidFill>
-                  <a:srgbClr val="0F172A"/>
-                </a:solidFill>
-              </a:rPr>
-              <a:t>API endpoint</a:t>
-            </a:r>
-          </a:p>
-          <a:p>
-            <a:pPr algn="l">
-              <a:spcAft>
-                <a:spcPts val="800"/>
-              </a:spcAft>
-            </a:pPr>
-            <a:r>
-              <a:rPr sz="1400" b="0">
-                <a:solidFill>
-                  <a:srgbClr val="334155"/>
-                </a:solidFill>
-              </a:rPr>
-              <a:t>Express route + tests, only if server-to-server logic is needed</a:t>
-            </a:r>
-          </a:p>
-        </p:txBody>
-      </p:sp>
-      <p:sp>
-        <p:nvSpPr>
-          <p:cNvPr id="12" name="TextBox 11"/>
-          <p:cNvSpPr txBox="1"/>
-          <p:nvPr/>
-        </p:nvSpPr>
-        <p:spPr>
-          <a:xfrm>
-            <a:off x="548640" y="6172200"/>
-            <a:ext cx="11064240" cy="548640"/>
-          </a:xfrm>
-          <a:prstGeom prst="rect">
-            <a:avLst/>
-          </a:prstGeom>
-          <a:noFill/>
-        </p:spPr>
-        <p:txBody>
-          <a:bodyPr wrap="square">
-            <a:spAutoFit/>
-          </a:bodyPr>
-          <a:lstStyle/>
-          <a:p>
-            <a:pPr algn="l">
-              <a:spcAft>
-                <a:spcPts val="800"/>
-              </a:spcAft>
-            </a:pPr>
-            <a:r>
-              <a:rPr sz="1400" b="0">
-                <a:solidFill>
-                  <a:srgbClr val="64748B"/>
-                </a:solidFill>
-              </a:rPr>
-              <a:t>Before starting: pnpm run dev running against your real Firebase project, and a signed-in test user.</a:t>
-            </a:r>
-          </a:p>
-        </p:txBody>
-      </p:sp>
-    </p:spTree>
-  </p:cSld>
-  <p:clrMapOvr>
-    <a:masterClrMapping/>
-  </p:clrMapOvr>
-</p:sld>
-</file>
-
-<file path=ppt/slides/slide3.xml><?xml version="1.0" encoding="utf-8"?>
-<p:sld xmlns:a="http://schemas.openxmlformats.org/drawingml/2006/main" xmlns:p="http://schemas.openxmlformats.org/presentationml/2006/main" xmlns:r="http://schemas.openxmlformats.org/officeDocument/2006/relationships">
-  <p:cSld>
-    <p:bg>
-      <p:bgPr>
-        <a:solidFill>
-          <a:srgbClr val="FFFFFF"/>
-        </a:solidFill>
-        <a:effectLst/>
-      </p:bgPr>
-    </p:bg>
     <p:spTree>
       <p:nvGrpSpPr>
         <p:cNvPr id="1" name=""/>
@@ -7142,7 +9666,7 @@
                   <a:srgbClr val="0F172A"/>
                 </a:solidFill>
               </a:rPr>
-              <a:t>STEP 1a</a:t>
+              <a:t>STEP 3a</a:t>
             </a:r>
           </a:p>
         </p:txBody>
@@ -7180,7 +9704,7 @@
                   <a:srgbClr val="0F172A"/>
                 </a:solidFill>
               </a:rPr>
-              <a:t>The TypeScript type</a:t>
+              <a:t>The form — a Client Component</a:t>
             </a:r>
           </a:p>
         </p:txBody>
@@ -7218,7 +9742,7 @@
                   <a:srgbClr val="64748B"/>
                 </a:solidFill>
               </a:rPr>
-              <a:t>Append to the shared Firestore types — the single place types live</a:t>
+              <a:t>Calls the Server Action like a normal async function · react-hook-form + zod</a:t>
             </a:r>
           </a:p>
         </p:txBody>
@@ -7232,7 +9756,7 @@
         <p:spPr>
           <a:xfrm>
             <a:off x="548640" y="1737360"/>
-            <a:ext cx="6949440" cy="4114800"/>
+            <a:ext cx="8138160" cy="4572000"/>
           </a:xfrm>
           <a:prstGeom prst="roundRect">
             <a:avLst/>
@@ -7269,151 +9793,343 @@
               </a:spcAft>
             </a:pPr>
             <a:r>
-              <a:rPr sz="1300" b="1">
+              <a:rPr sz="1000" b="1">
                 <a:solidFill>
                   <a:srgbClr val="F59E0B"/>
                 </a:solidFill>
                 <a:latin typeface="Courier New"/>
               </a:rPr>
-              <a:t>frontend/src/types/firestore.ts  (append)</a:t>
-            </a:r>
-          </a:p>
-          <a:p>
-            <a:pPr>
-              <a:spcAft>
-                <a:spcPts val="100"/>
-              </a:spcAft>
-            </a:pPr>
-            <a:r>
-              <a:rPr sz="1400">
-                <a:solidFill>
-                  <a:srgbClr val="E2E8F0"/>
-                </a:solidFill>
-                <a:latin typeface="Courier New"/>
-              </a:rPr>
-              <a:t>export interface Note {</a:t>
-            </a:r>
-          </a:p>
-          <a:p>
-            <a:pPr>
-              <a:spcAft>
-                <a:spcPts val="100"/>
-              </a:spcAft>
-            </a:pPr>
-            <a:r>
-              <a:rPr sz="1400">
-                <a:solidFill>
-                  <a:srgbClr val="E2E8F0"/>
-                </a:solidFill>
-                <a:latin typeface="Courier New"/>
-              </a:rPr>
-              <a:t>  id: string</a:t>
-            </a:r>
-          </a:p>
-          <a:p>
-            <a:pPr>
-              <a:spcAft>
-                <a:spcPts val="100"/>
-              </a:spcAft>
-            </a:pPr>
-            <a:r>
-              <a:rPr sz="1400">
-                <a:solidFill>
-                  <a:srgbClr val="E2E8F0"/>
-                </a:solidFill>
-                <a:latin typeface="Courier New"/>
-              </a:rPr>
-              <a:t>  uid: string  // owner — used by security rules</a:t>
-            </a:r>
-          </a:p>
-          <a:p>
-            <a:pPr>
-              <a:spcAft>
-                <a:spcPts val="100"/>
-              </a:spcAft>
-            </a:pPr>
-            <a:r>
-              <a:rPr sz="1400">
-                <a:solidFill>
-                  <a:srgbClr val="E2E8F0"/>
-                </a:solidFill>
-                <a:latin typeface="Courier New"/>
-              </a:rPr>
-              <a:t>  title: string</a:t>
-            </a:r>
-          </a:p>
-          <a:p>
-            <a:pPr>
-              <a:spcAft>
-                <a:spcPts val="100"/>
-              </a:spcAft>
-            </a:pPr>
-            <a:r>
-              <a:rPr sz="1400">
-                <a:solidFill>
-                  <a:srgbClr val="E2E8F0"/>
-                </a:solidFill>
-                <a:latin typeface="Courier New"/>
-              </a:rPr>
-              <a:t>  body: string</a:t>
-            </a:r>
-          </a:p>
-          <a:p>
-            <a:pPr>
-              <a:spcAft>
-                <a:spcPts val="100"/>
-              </a:spcAft>
-            </a:pPr>
-            <a:r>
-              <a:rPr sz="1400">
-                <a:solidFill>
-                  <a:srgbClr val="E2E8F0"/>
-                </a:solidFill>
-                <a:latin typeface="Courier New"/>
-              </a:rPr>
-              <a:t>  createdAt: Timestamp</a:t>
-            </a:r>
-          </a:p>
-          <a:p>
-            <a:pPr>
-              <a:spcAft>
-                <a:spcPts val="100"/>
-              </a:spcAft>
-            </a:pPr>
-            <a:r>
-              <a:rPr sz="1400">
-                <a:solidFill>
-                  <a:srgbClr val="E2E8F0"/>
-                </a:solidFill>
-                <a:latin typeface="Courier New"/>
-              </a:rPr>
-              <a:t>  updatedAt: Timestamp</a:t>
-            </a:r>
-          </a:p>
-          <a:p>
-            <a:pPr>
-              <a:spcAft>
-                <a:spcPts val="100"/>
-              </a:spcAft>
-            </a:pPr>
-            <a:r>
-              <a:rPr sz="1400">
-                <a:solidFill>
-                  <a:srgbClr val="E2E8F0"/>
-                </a:solidFill>
-                <a:latin typeface="Courier New"/>
-              </a:rPr>
-              <a:t>  _schemaVersion: 1</a:t>
-            </a:r>
-          </a:p>
-          <a:p>
-            <a:pPr>
-              <a:spcAft>
-                <a:spcPts val="100"/>
-              </a:spcAft>
-            </a:pPr>
-            <a:r>
-              <a:rPr sz="1400">
+              <a:t>frontend/src/features/notes/components/CreateNoteForm.tsx  (new)</a:t>
+            </a:r>
+          </a:p>
+          <a:p>
+            <a:pPr>
+              <a:spcAft>
+                <a:spcPts val="100"/>
+              </a:spcAft>
+            </a:pPr>
+            <a:r>
+              <a:rPr sz="1100">
+                <a:solidFill>
+                  <a:srgbClr val="E2E8F0"/>
+                </a:solidFill>
+                <a:latin typeface="Courier New"/>
+              </a:rPr>
+              <a:t>'use client'</a:t>
+            </a:r>
+          </a:p>
+          <a:p>
+            <a:pPr>
+              <a:spcAft>
+                <a:spcPts val="100"/>
+              </a:spcAft>
+            </a:pPr>
+            <a:r>
+              <a:rPr sz="1100">
+                <a:solidFill>
+                  <a:srgbClr val="E2E8F0"/>
+                </a:solidFill>
+                <a:latin typeface="Courier New"/>
+              </a:rPr>
+              <a:t> </a:t>
+            </a:r>
+          </a:p>
+          <a:p>
+            <a:pPr>
+              <a:spcAft>
+                <a:spcPts val="100"/>
+              </a:spcAft>
+            </a:pPr>
+            <a:r>
+              <a:rPr sz="1100">
+                <a:solidFill>
+                  <a:srgbClr val="E2E8F0"/>
+                </a:solidFill>
+                <a:latin typeface="Courier New"/>
+              </a:rPr>
+              <a:t>import { useForm } from 'react-hook-form'</a:t>
+            </a:r>
+          </a:p>
+          <a:p>
+            <a:pPr>
+              <a:spcAft>
+                <a:spcPts val="100"/>
+              </a:spcAft>
+            </a:pPr>
+            <a:r>
+              <a:rPr sz="1100">
+                <a:solidFill>
+                  <a:srgbClr val="E2E8F0"/>
+                </a:solidFill>
+                <a:latin typeface="Courier New"/>
+              </a:rPr>
+              <a:t>import { zodResolver } from '@hookform/resolvers/zod'</a:t>
+            </a:r>
+          </a:p>
+          <a:p>
+            <a:pPr>
+              <a:spcAft>
+                <a:spcPts val="100"/>
+              </a:spcAft>
+            </a:pPr>
+            <a:r>
+              <a:rPr sz="1100">
+                <a:solidFill>
+                  <a:srgbClr val="E2E8F0"/>
+                </a:solidFill>
+                <a:latin typeface="Courier New"/>
+              </a:rPr>
+              <a:t>import { toast } from 'sonner'</a:t>
+            </a:r>
+          </a:p>
+          <a:p>
+            <a:pPr>
+              <a:spcAft>
+                <a:spcPts val="100"/>
+              </a:spcAft>
+            </a:pPr>
+            <a:r>
+              <a:rPr sz="1100">
+                <a:solidFill>
+                  <a:srgbClr val="E2E8F0"/>
+                </a:solidFill>
+                <a:latin typeface="Courier New"/>
+              </a:rPr>
+              <a:t>import { createNote } from '@/features/notes/actions/notes.actions'</a:t>
+            </a:r>
+          </a:p>
+          <a:p>
+            <a:pPr>
+              <a:spcAft>
+                <a:spcPts val="100"/>
+              </a:spcAft>
+            </a:pPr>
+            <a:r>
+              <a:rPr sz="1100">
+                <a:solidFill>
+                  <a:srgbClr val="E2E8F0"/>
+                </a:solidFill>
+                <a:latin typeface="Courier New"/>
+              </a:rPr>
+              <a:t> </a:t>
+            </a:r>
+          </a:p>
+          <a:p>
+            <a:pPr>
+              <a:spcAft>
+                <a:spcPts val="100"/>
+              </a:spcAft>
+            </a:pPr>
+            <a:r>
+              <a:rPr sz="1100">
+                <a:solidFill>
+                  <a:srgbClr val="E2E8F0"/>
+                </a:solidFill>
+                <a:latin typeface="Courier New"/>
+              </a:rPr>
+              <a:t>const createNoteFormSchema = z.object({</a:t>
+            </a:r>
+          </a:p>
+          <a:p>
+            <a:pPr>
+              <a:spcAft>
+                <a:spcPts val="100"/>
+              </a:spcAft>
+            </a:pPr>
+            <a:r>
+              <a:rPr sz="1100">
+                <a:solidFill>
+                  <a:srgbClr val="E2E8F0"/>
+                </a:solidFill>
+                <a:latin typeface="Courier New"/>
+              </a:rPr>
+              <a:t>  title: z.string().min(1, 'Title is required').max(200),</a:t>
+            </a:r>
+          </a:p>
+          <a:p>
+            <a:pPr>
+              <a:spcAft>
+                <a:spcPts val="100"/>
+              </a:spcAft>
+            </a:pPr>
+            <a:r>
+              <a:rPr sz="1100">
+                <a:solidFill>
+                  <a:srgbClr val="E2E8F0"/>
+                </a:solidFill>
+                <a:latin typeface="Courier New"/>
+              </a:rPr>
+              <a:t>  body: z.string().max(10_000),</a:t>
+            </a:r>
+          </a:p>
+          <a:p>
+            <a:pPr>
+              <a:spcAft>
+                <a:spcPts val="100"/>
+              </a:spcAft>
+            </a:pPr>
+            <a:r>
+              <a:rPr sz="1100">
+                <a:solidFill>
+                  <a:srgbClr val="E2E8F0"/>
+                </a:solidFill>
+                <a:latin typeface="Courier New"/>
+              </a:rPr>
+              <a:t>})</a:t>
+            </a:r>
+          </a:p>
+          <a:p>
+            <a:pPr>
+              <a:spcAft>
+                <a:spcPts val="100"/>
+              </a:spcAft>
+            </a:pPr>
+            <a:r>
+              <a:rPr sz="1100">
+                <a:solidFill>
+                  <a:srgbClr val="E2E8F0"/>
+                </a:solidFill>
+                <a:latin typeface="Courier New"/>
+              </a:rPr>
+              <a:t> </a:t>
+            </a:r>
+          </a:p>
+          <a:p>
+            <a:pPr>
+              <a:spcAft>
+                <a:spcPts val="100"/>
+              </a:spcAft>
+            </a:pPr>
+            <a:r>
+              <a:rPr sz="1100">
+                <a:solidFill>
+                  <a:srgbClr val="E2E8F0"/>
+                </a:solidFill>
+                <a:latin typeface="Courier New"/>
+              </a:rPr>
+              <a:t>export function CreateNoteForm() {</a:t>
+            </a:r>
+          </a:p>
+          <a:p>
+            <a:pPr>
+              <a:spcAft>
+                <a:spcPts val="100"/>
+              </a:spcAft>
+            </a:pPr>
+            <a:r>
+              <a:rPr sz="1100">
+                <a:solidFill>
+                  <a:srgbClr val="E2E8F0"/>
+                </a:solidFill>
+                <a:latin typeface="Courier New"/>
+              </a:rPr>
+              <a:t>  const { register, handleSubmit, reset, formState } = useForm(...)</a:t>
+            </a:r>
+          </a:p>
+          <a:p>
+            <a:pPr>
+              <a:spcAft>
+                <a:spcPts val="100"/>
+              </a:spcAft>
+            </a:pPr>
+            <a:r>
+              <a:rPr sz="1100">
+                <a:solidFill>
+                  <a:srgbClr val="E2E8F0"/>
+                </a:solidFill>
+                <a:latin typeface="Courier New"/>
+              </a:rPr>
+              <a:t> </a:t>
+            </a:r>
+          </a:p>
+          <a:p>
+            <a:pPr>
+              <a:spcAft>
+                <a:spcPts val="100"/>
+              </a:spcAft>
+            </a:pPr>
+            <a:r>
+              <a:rPr sz="1100">
+                <a:solidFill>
+                  <a:srgbClr val="E2E8F0"/>
+                </a:solidFill>
+                <a:latin typeface="Courier New"/>
+              </a:rPr>
+              <a:t>  const onSubmit = async (data) =&gt; {</a:t>
+            </a:r>
+          </a:p>
+          <a:p>
+            <a:pPr>
+              <a:spcAft>
+                <a:spcPts val="100"/>
+              </a:spcAft>
+            </a:pPr>
+            <a:r>
+              <a:rPr sz="1100">
+                <a:solidFill>
+                  <a:srgbClr val="E2E8F0"/>
+                </a:solidFill>
+                <a:latin typeface="Courier New"/>
+              </a:rPr>
+              <a:t>    const result = await createNote(data)</a:t>
+            </a:r>
+          </a:p>
+          <a:p>
+            <a:pPr>
+              <a:spcAft>
+                <a:spcPts val="100"/>
+              </a:spcAft>
+            </a:pPr>
+            <a:r>
+              <a:rPr sz="1100">
+                <a:solidFill>
+                  <a:srgbClr val="E2E8F0"/>
+                </a:solidFill>
+                <a:latin typeface="Courier New"/>
+              </a:rPr>
+              <a:t>    if (result.success) { toast.success('Note created'); reset() }</a:t>
+            </a:r>
+          </a:p>
+          <a:p>
+            <a:pPr>
+              <a:spcAft>
+                <a:spcPts val="100"/>
+              </a:spcAft>
+            </a:pPr>
+            <a:r>
+              <a:rPr sz="1100">
+                <a:solidFill>
+                  <a:srgbClr val="E2E8F0"/>
+                </a:solidFill>
+                <a:latin typeface="Courier New"/>
+              </a:rPr>
+              <a:t>    else toast.error(result.error ?? 'Failed to create note')</a:t>
+            </a:r>
+          </a:p>
+          <a:p>
+            <a:pPr>
+              <a:spcAft>
+                <a:spcPts val="100"/>
+              </a:spcAft>
+            </a:pPr>
+            <a:r>
+              <a:rPr sz="1100">
+                <a:solidFill>
+                  <a:srgbClr val="E2E8F0"/>
+                </a:solidFill>
+                <a:latin typeface="Courier New"/>
+              </a:rPr>
+              <a:t>  }</a:t>
+            </a:r>
+          </a:p>
+          <a:p>
+            <a:pPr>
+              <a:spcAft>
+                <a:spcPts val="100"/>
+              </a:spcAft>
+            </a:pPr>
+            <a:r>
+              <a:rPr sz="1100">
                 <a:solidFill>
                   <a:srgbClr val="E2E8F0"/>
                 </a:solidFill>
@@ -7432,8 +10148,8 @@
         </p:nvSpPr>
         <p:spPr>
           <a:xfrm>
-            <a:off x="7772400" y="1828800"/>
-            <a:ext cx="3931920" cy="4572000"/>
+            <a:off x="8961120" y="1828800"/>
+            <a:ext cx="2834640" cy="4572000"/>
           </a:xfrm>
           <a:prstGeom prst="rect">
             <a:avLst/>
@@ -7452,20 +10168,20 @@
               </a:spcAft>
             </a:pPr>
             <a:r>
-              <a:rPr sz="1500" b="1">
+              <a:rPr sz="1300" b="1">
                 <a:solidFill>
                   <a:srgbClr val="F59E0B"/>
                 </a:solidFill>
               </a:rPr>
-              <a:t>•  </a:t>
-            </a:r>
-            <a:r>
-              <a:rPr sz="1500" b="0">
+              <a:t>react-hook-form + zod — same pattern as the sign-up form</a:t>
+            </a:r>
+            <a:r>
+              <a:rPr sz="1300" b="0">
                 <a:solidFill>
                   <a:srgbClr val="334155"/>
                 </a:solidFill>
               </a:rPr>
-              <a:t>uid ties every note to its owner — rules and queries both key on it</a:t>
+              <a:t/>
             </a:r>
           </a:p>
           <a:p>
@@ -7475,20 +10191,20 @@
               </a:spcAft>
             </a:pPr>
             <a:r>
-              <a:rPr sz="1500" b="1">
+              <a:rPr sz="1300" b="1">
                 <a:solidFill>
                   <a:srgbClr val="F59E0B"/>
                 </a:solidFill>
               </a:rPr>
-              <a:t>•  </a:t>
-            </a:r>
-            <a:r>
-              <a:rPr sz="1500" b="0">
+              <a:t>onSubmit calls createNote(data) directly, no fetch needed</a:t>
+            </a:r>
+            <a:r>
+              <a:rPr sz="1300" b="0">
                 <a:solidFill>
                   <a:srgbClr val="334155"/>
                 </a:solidFill>
               </a:rPr>
-              <a:t>_schemaVersion is mandatory on every collection (enables lazy migration via /evolve-schema)</a:t>
+              <a:t/>
             </a:r>
           </a:p>
           <a:p>
@@ -7498,20 +10214,20 @@
               </a:spcAft>
             </a:pPr>
             <a:r>
-              <a:rPr sz="1500" b="1">
+              <a:rPr sz="1300" b="1">
                 <a:solidFill>
                   <a:srgbClr val="F59E0B"/>
                 </a:solidFill>
               </a:rPr>
-              <a:t>•  </a:t>
-            </a:r>
-            <a:r>
-              <a:rPr sz="1500" b="0">
+              <a:t>No manual refresh — NotesList's onSnapshot picks up the write</a:t>
+            </a:r>
+            <a:r>
+              <a:rPr sz="1300" b="0">
                 <a:solidFill>
                   <a:srgbClr val="334155"/>
                 </a:solidFill>
               </a:rPr>
-              <a:t>Timestamps come from Firestore, not JS Dates</a:t>
+              <a:t/>
             </a:r>
           </a:p>
         </p:txBody>
@@ -7524,7 +10240,7 @@
 </p:sld>
 </file>
 
-<file path=ppt/slides/slide4.xml><?xml version="1.0" encoding="utf-8"?>
+<file path=ppt/slides/slide9.xml><?xml version="1.0" encoding="utf-8"?>
 <p:sld xmlns:a="http://schemas.openxmlformats.org/drawingml/2006/main" xmlns:p="http://schemas.openxmlformats.org/presentationml/2006/main" xmlns:r="http://schemas.openxmlformats.org/officeDocument/2006/relationships">
   <p:cSld>
     <p:bg>
@@ -7589,2051 +10305,6 @@
                   <a:srgbClr val="0F172A"/>
                 </a:solidFill>
               </a:rPr>
-              <a:t>STEP 1b</a:t>
-            </a:r>
-          </a:p>
-        </p:txBody>
-      </p:sp>
-      <p:sp>
-        <p:nvSpPr>
-          <p:cNvPr id="3" name="TextBox 2"/>
-          <p:cNvSpPr txBox="1"/>
-          <p:nvPr/>
-        </p:nvSpPr>
-        <p:spPr>
-          <a:xfrm>
-            <a:off x="2194560" y="384048"/>
-            <a:ext cx="9692640" cy="685800"/>
-          </a:xfrm>
-          <a:prstGeom prst="rect">
-            <a:avLst/>
-          </a:prstGeom>
-          <a:noFill/>
-        </p:spPr>
-        <p:txBody>
-          <a:bodyPr wrap="square">
-            <a:spAutoFit/>
-          </a:bodyPr>
-          <a:lstStyle/>
-          <a:p>
-            <a:pPr algn="l">
-              <a:spcAft>
-                <a:spcPts val="800"/>
-              </a:spcAft>
-            </a:pPr>
-            <a:r>
-              <a:rPr sz="3000" b="1">
-                <a:solidFill>
-                  <a:srgbClr val="0F172A"/>
-                </a:solidFill>
-              </a:rPr>
-              <a:t>The typed collection</a:t>
-            </a:r>
-          </a:p>
-        </p:txBody>
-      </p:sp>
-      <p:sp>
-        <p:nvSpPr>
-          <p:cNvPr id="4" name="TextBox 3"/>
-          <p:cNvSpPr txBox="1"/>
-          <p:nvPr/>
-        </p:nvSpPr>
-        <p:spPr>
-          <a:xfrm>
-            <a:off x="548640" y="1115568"/>
-            <a:ext cx="11064240" cy="457200"/>
-          </a:xfrm>
-          <a:prstGeom prst="rect">
-            <a:avLst/>
-          </a:prstGeom>
-          <a:noFill/>
-        </p:spPr>
-        <p:txBody>
-          <a:bodyPr wrap="square">
-            <a:spAutoFit/>
-          </a:bodyPr>
-          <a:lstStyle/>
-          <a:p>
-            <a:pPr algn="l">
-              <a:spcAft>
-                <a:spcPts val="800"/>
-              </a:spcAft>
-            </a:pPr>
-            <a:r>
-              <a:rPr sz="1500" b="0">
-                <a:solidFill>
-                  <a:srgbClr val="64748B"/>
-                </a:solidFill>
-              </a:rPr>
-              <a:t>Follow the existing getUsersCollection() pattern — function-style, lazy client init</a:t>
-            </a:r>
-          </a:p>
-        </p:txBody>
-      </p:sp>
-      <p:sp>
-        <p:nvSpPr>
-          <p:cNvPr id="5" name="Rounded Rectangle 4"/>
-          <p:cNvSpPr/>
-          <p:nvPr/>
-        </p:nvSpPr>
-        <p:spPr>
-          <a:xfrm>
-            <a:off x="548640" y="1737360"/>
-            <a:ext cx="6949440" cy="3840480"/>
-          </a:xfrm>
-          <a:prstGeom prst="roundRect">
-            <a:avLst/>
-          </a:prstGeom>
-          <a:solidFill>
-            <a:srgbClr val="1E293B"/>
-          </a:solidFill>
-          <a:ln>
-            <a:noFill/>
-          </a:ln>
-          <a:effectLst/>
-        </p:spPr>
-        <p:style>
-          <a:lnRef idx="1">
-            <a:schemeClr val="accent1"/>
-          </a:lnRef>
-          <a:fillRef idx="3">
-            <a:schemeClr val="accent1"/>
-          </a:fillRef>
-          <a:effectRef idx="2">
-            <a:schemeClr val="accent1"/>
-          </a:effectRef>
-          <a:fontRef idx="minor">
-            <a:schemeClr val="lt1"/>
-          </a:fontRef>
-        </p:style>
-        <p:txBody>
-          <a:bodyPr rtlCol="0" anchor="t" wrap="none" lIns="228600" rIns="182880" tIns="128016"/>
-          <a:lstStyle/>
-          <a:p>
-            <a:pPr algn="ctr">
-              <a:spcAft>
-                <a:spcPts val="700"/>
-              </a:spcAft>
-            </a:pPr>
-            <a:r>
-              <a:rPr sz="1300" b="1">
-                <a:solidFill>
-                  <a:srgbClr val="F59E0B"/>
-                </a:solidFill>
-                <a:latin typeface="Courier New"/>
-              </a:rPr>
-              <a:t>frontend/src/lib/firebase/firestore.ts  (append)</a:t>
-            </a:r>
-          </a:p>
-          <a:p>
-            <a:pPr>
-              <a:spcAft>
-                <a:spcPts val="100"/>
-              </a:spcAft>
-            </a:pPr>
-            <a:r>
-              <a:rPr sz="1400">
-                <a:solidFill>
-                  <a:srgbClr val="E2E8F0"/>
-                </a:solidFill>
-                <a:latin typeface="Courier New"/>
-              </a:rPr>
-              <a:t>import type { Note, UserProfile } from '@/types/firestore'</a:t>
-            </a:r>
-          </a:p>
-          <a:p>
-            <a:pPr>
-              <a:spcAft>
-                <a:spcPts val="100"/>
-              </a:spcAft>
-            </a:pPr>
-            <a:r>
-              <a:rPr sz="1400">
-                <a:solidFill>
-                  <a:srgbClr val="E2E8F0"/>
-                </a:solidFill>
-                <a:latin typeface="Courier New"/>
-              </a:rPr>
-              <a:t> </a:t>
-            </a:r>
-          </a:p>
-          <a:p>
-            <a:pPr>
-              <a:spcAft>
-                <a:spcPts val="100"/>
-              </a:spcAft>
-            </a:pPr>
-            <a:r>
-              <a:rPr sz="1400">
-                <a:solidFill>
-                  <a:srgbClr val="E2E8F0"/>
-                </a:solidFill>
-                <a:latin typeface="Courier New"/>
-              </a:rPr>
-              <a:t>export function getNotesCollection() {</a:t>
-            </a:r>
-          </a:p>
-          <a:p>
-            <a:pPr>
-              <a:spcAft>
-                <a:spcPts val="100"/>
-              </a:spcAft>
-            </a:pPr>
-            <a:r>
-              <a:rPr sz="1400">
-                <a:solidFill>
-                  <a:srgbClr val="E2E8F0"/>
-                </a:solidFill>
-                <a:latin typeface="Courier New"/>
-              </a:rPr>
-              <a:t>  return typedCollection&lt;Note&gt;('notes')</a:t>
-            </a:r>
-          </a:p>
-          <a:p>
-            <a:pPr>
-              <a:spcAft>
-                <a:spcPts val="100"/>
-              </a:spcAft>
-            </a:pPr>
-            <a:r>
-              <a:rPr sz="1400">
-                <a:solidFill>
-                  <a:srgbClr val="E2E8F0"/>
-                </a:solidFill>
-                <a:latin typeface="Courier New"/>
-              </a:rPr>
-              <a:t>}</a:t>
-            </a:r>
-          </a:p>
-          <a:p>
-            <a:pPr>
-              <a:spcAft>
-                <a:spcPts val="100"/>
-              </a:spcAft>
-            </a:pPr>
-            <a:r>
-              <a:rPr sz="1400">
-                <a:solidFill>
-                  <a:srgbClr val="E2E8F0"/>
-                </a:solidFill>
-                <a:latin typeface="Courier New"/>
-              </a:rPr>
-              <a:t> </a:t>
-            </a:r>
-          </a:p>
-          <a:p>
-            <a:pPr>
-              <a:spcAft>
-                <a:spcPts val="100"/>
-              </a:spcAft>
-            </a:pPr>
-            <a:r>
-              <a:rPr sz="1400">
-                <a:solidFill>
-                  <a:srgbClr val="E2E8F0"/>
-                </a:solidFill>
-                <a:latin typeface="Courier New"/>
-              </a:rPr>
-              <a:t>export function noteDoc(id: string) {</a:t>
-            </a:r>
-          </a:p>
-          <a:p>
-            <a:pPr>
-              <a:spcAft>
-                <a:spcPts val="100"/>
-              </a:spcAft>
-            </a:pPr>
-            <a:r>
-              <a:rPr sz="1400">
-                <a:solidFill>
-                  <a:srgbClr val="E2E8F0"/>
-                </a:solidFill>
-                <a:latin typeface="Courier New"/>
-              </a:rPr>
-              <a:t>  return doc(getNotesCollection(), id)</a:t>
-            </a:r>
-          </a:p>
-          <a:p>
-            <a:pPr>
-              <a:spcAft>
-                <a:spcPts val="100"/>
-              </a:spcAft>
-            </a:pPr>
-            <a:r>
-              <a:rPr sz="1400">
-                <a:solidFill>
-                  <a:srgbClr val="E2E8F0"/>
-                </a:solidFill>
-                <a:latin typeface="Courier New"/>
-              </a:rPr>
-              <a:t>}</a:t>
-            </a:r>
-          </a:p>
-        </p:txBody>
-      </p:sp>
-      <p:sp>
-        <p:nvSpPr>
-          <p:cNvPr id="6" name="TextBox 5"/>
-          <p:cNvSpPr txBox="1"/>
-          <p:nvPr/>
-        </p:nvSpPr>
-        <p:spPr>
-          <a:xfrm>
-            <a:off x="7772400" y="1828800"/>
-            <a:ext cx="3931920" cy="4572000"/>
-          </a:xfrm>
-          <a:prstGeom prst="rect">
-            <a:avLst/>
-          </a:prstGeom>
-          <a:noFill/>
-        </p:spPr>
-        <p:txBody>
-          <a:bodyPr wrap="square">
-            <a:spAutoFit/>
-          </a:bodyPr>
-          <a:lstStyle/>
-          <a:p>
-            <a:pPr algn="l">
-              <a:spcAft>
-                <a:spcPts val="1000"/>
-              </a:spcAft>
-            </a:pPr>
-            <a:r>
-              <a:rPr sz="1500" b="1">
-                <a:solidFill>
-                  <a:srgbClr val="F59E0B"/>
-                </a:solidFill>
-              </a:rPr>
-              <a:t>•  </a:t>
-            </a:r>
-            <a:r>
-              <a:rPr sz="1500" b="0">
-                <a:solidFill>
-                  <a:srgbClr val="334155"/>
-                </a:solidFill>
-              </a:rPr>
-              <a:t>Everything that touches the 'notes' collection goes through this — one place, fully typed</a:t>
-            </a:r>
-          </a:p>
-          <a:p>
-            <a:pPr algn="l">
-              <a:spcAft>
-                <a:spcPts val="1000"/>
-              </a:spcAft>
-            </a:pPr>
-            <a:r>
-              <a:rPr sz="1500" b="1">
-                <a:solidFill>
-                  <a:srgbClr val="F59E0B"/>
-                </a:solidFill>
-              </a:rPr>
-              <a:t>•  </a:t>
-            </a:r>
-            <a:r>
-              <a:rPr sz="1500" b="0">
-                <a:solidFill>
-                  <a:srgbClr val="334155"/>
-                </a:solidFill>
-              </a:rPr>
-              <a:t>typedCollection is module-private on purpose; collections are exposed as functions</a:t>
-            </a:r>
-          </a:p>
-        </p:txBody>
-      </p:sp>
-    </p:spTree>
-  </p:cSld>
-  <p:clrMapOvr>
-    <a:masterClrMapping/>
-  </p:clrMapOvr>
-</p:sld>
-</file>
-
-<file path=ppt/slides/slide5.xml><?xml version="1.0" encoding="utf-8"?>
-<p:sld xmlns:a="http://schemas.openxmlformats.org/drawingml/2006/main" xmlns:p="http://schemas.openxmlformats.org/presentationml/2006/main" xmlns:r="http://schemas.openxmlformats.org/officeDocument/2006/relationships">
-  <p:cSld>
-    <p:bg>
-      <p:bgPr>
-        <a:solidFill>
-          <a:srgbClr val="FFFFFF"/>
-        </a:solidFill>
-        <a:effectLst/>
-      </p:bgPr>
-    </p:bg>
-    <p:spTree>
-      <p:nvGrpSpPr>
-        <p:cNvPr id="1" name=""/>
-        <p:cNvGrpSpPr/>
-        <p:nvPr/>
-      </p:nvGrpSpPr>
-      <p:grpSpPr/>
-      <p:sp>
-        <p:nvSpPr>
-          <p:cNvPr id="2" name="Rounded Rectangle 1"/>
-          <p:cNvSpPr/>
-          <p:nvPr/>
-        </p:nvSpPr>
-        <p:spPr>
-          <a:xfrm>
-            <a:off x="548640" y="457200"/>
-            <a:ext cx="1417320" cy="457200"/>
-          </a:xfrm>
-          <a:prstGeom prst="roundRect">
-            <a:avLst/>
-          </a:prstGeom>
-          <a:solidFill>
-            <a:srgbClr val="F59E0B"/>
-          </a:solidFill>
-          <a:ln>
-            <a:noFill/>
-          </a:ln>
-          <a:effectLst/>
-        </p:spPr>
-        <p:style>
-          <a:lnRef idx="1">
-            <a:schemeClr val="accent1"/>
-          </a:lnRef>
-          <a:fillRef idx="3">
-            <a:schemeClr val="accent1"/>
-          </a:fillRef>
-          <a:effectRef idx="2">
-            <a:schemeClr val="accent1"/>
-          </a:effectRef>
-          <a:fontRef idx="minor">
-            <a:schemeClr val="lt1"/>
-          </a:fontRef>
-        </p:style>
-        <p:txBody>
-          <a:bodyPr rtlCol="0" anchor="ctr"/>
-          <a:lstStyle/>
-          <a:p>
-            <a:pPr algn="ctr"/>
-            <a:r>
-              <a:rPr sz="1600" b="1">
-                <a:solidFill>
-                  <a:srgbClr val="0F172A"/>
-                </a:solidFill>
-              </a:rPr>
-              <a:t>STEP 1c</a:t>
-            </a:r>
-          </a:p>
-        </p:txBody>
-      </p:sp>
-      <p:sp>
-        <p:nvSpPr>
-          <p:cNvPr id="3" name="TextBox 2"/>
-          <p:cNvSpPr txBox="1"/>
-          <p:nvPr/>
-        </p:nvSpPr>
-        <p:spPr>
-          <a:xfrm>
-            <a:off x="2194560" y="384048"/>
-            <a:ext cx="9692640" cy="685800"/>
-          </a:xfrm>
-          <a:prstGeom prst="rect">
-            <a:avLst/>
-          </a:prstGeom>
-          <a:noFill/>
-        </p:spPr>
-        <p:txBody>
-          <a:bodyPr wrap="square">
-            <a:spAutoFit/>
-          </a:bodyPr>
-          <a:lstStyle/>
-          <a:p>
-            <a:pPr algn="l">
-              <a:spcAft>
-                <a:spcPts val="800"/>
-              </a:spcAft>
-            </a:pPr>
-            <a:r>
-              <a:rPr sz="3000" b="1">
-                <a:solidFill>
-                  <a:srgbClr val="0F172A"/>
-                </a:solidFill>
-              </a:rPr>
-              <a:t>Security rules</a:t>
-            </a:r>
-          </a:p>
-        </p:txBody>
-      </p:sp>
-      <p:sp>
-        <p:nvSpPr>
-          <p:cNvPr id="4" name="TextBox 3"/>
-          <p:cNvSpPr txBox="1"/>
-          <p:nvPr/>
-        </p:nvSpPr>
-        <p:spPr>
-          <a:xfrm>
-            <a:off x="548640" y="1115568"/>
-            <a:ext cx="11064240" cy="457200"/>
-          </a:xfrm>
-          <a:prstGeom prst="rect">
-            <a:avLst/>
-          </a:prstGeom>
-          <a:noFill/>
-        </p:spPr>
-        <p:txBody>
-          <a:bodyPr wrap="square">
-            <a:spAutoFit/>
-          </a:bodyPr>
-          <a:lstStyle/>
-          <a:p>
-            <a:pPr algn="l">
-              <a:spcAft>
-                <a:spcPts val="800"/>
-              </a:spcAft>
-            </a:pPr>
-            <a:r>
-              <a:rPr sz="1500" b="0">
-                <a:solidFill>
-                  <a:srgbClr val="64748B"/>
-                </a:solidFill>
-              </a:rPr>
-              <a:t>The last line of defence — assume the client is hostile</a:t>
-            </a:r>
-          </a:p>
-        </p:txBody>
-      </p:sp>
-      <p:sp>
-        <p:nvSpPr>
-          <p:cNvPr id="5" name="Rounded Rectangle 4"/>
-          <p:cNvSpPr/>
-          <p:nvPr/>
-        </p:nvSpPr>
-        <p:spPr>
-          <a:xfrm>
-            <a:off x="548640" y="1737360"/>
-            <a:ext cx="8138160" cy="4297680"/>
-          </a:xfrm>
-          <a:prstGeom prst="roundRect">
-            <a:avLst/>
-          </a:prstGeom>
-          <a:solidFill>
-            <a:srgbClr val="1E293B"/>
-          </a:solidFill>
-          <a:ln>
-            <a:noFill/>
-          </a:ln>
-          <a:effectLst/>
-        </p:spPr>
-        <p:style>
-          <a:lnRef idx="1">
-            <a:schemeClr val="accent1"/>
-          </a:lnRef>
-          <a:fillRef idx="3">
-            <a:schemeClr val="accent1"/>
-          </a:fillRef>
-          <a:effectRef idx="2">
-            <a:schemeClr val="accent1"/>
-          </a:effectRef>
-          <a:fontRef idx="minor">
-            <a:schemeClr val="lt1"/>
-          </a:fontRef>
-        </p:style>
-        <p:txBody>
-          <a:bodyPr rtlCol="0" anchor="t" wrap="none" lIns="228600" rIns="182880" tIns="128016"/>
-          <a:lstStyle/>
-          <a:p>
-            <a:pPr algn="ctr">
-              <a:spcAft>
-                <a:spcPts val="700"/>
-              </a:spcAft>
-            </a:pPr>
-            <a:r>
-              <a:rPr sz="1000" b="1">
-                <a:solidFill>
-                  <a:srgbClr val="F59E0B"/>
-                </a:solidFill>
-                <a:latin typeface="Courier New"/>
-              </a:rPr>
-              <a:t>firebase/firestore.rules  (add above the marker comment)</a:t>
-            </a:r>
-          </a:p>
-          <a:p>
-            <a:pPr>
-              <a:spcAft>
-                <a:spcPts val="100"/>
-              </a:spcAft>
-            </a:pPr>
-            <a:r>
-              <a:rPr sz="1100">
-                <a:solidFill>
-                  <a:srgbClr val="E2E8F0"/>
-                </a:solidFill>
-                <a:latin typeface="Courier New"/>
-              </a:rPr>
-              <a:t>match /notes/{noteId} {</a:t>
-            </a:r>
-          </a:p>
-          <a:p>
-            <a:pPr>
-              <a:spcAft>
-                <a:spcPts val="100"/>
-              </a:spcAft>
-            </a:pPr>
-            <a:r>
-              <a:rPr sz="1100">
-                <a:solidFill>
-                  <a:srgbClr val="E2E8F0"/>
-                </a:solidFill>
-                <a:latin typeface="Courier New"/>
-              </a:rPr>
-              <a:t>  allow read: if isAuthenticated() &amp;&amp; isOwner(resource.data.uid)</a:t>
-            </a:r>
-          </a:p>
-          <a:p>
-            <a:pPr>
-              <a:spcAft>
-                <a:spcPts val="100"/>
-              </a:spcAft>
-            </a:pPr>
-            <a:r>
-              <a:rPr sz="1100">
-                <a:solidFill>
-                  <a:srgbClr val="E2E8F0"/>
-                </a:solidFill>
-                <a:latin typeface="Courier New"/>
-              </a:rPr>
-              <a:t>              &amp;&amp; notDeleted();</a:t>
-            </a:r>
-          </a:p>
-          <a:p>
-            <a:pPr>
-              <a:spcAft>
-                <a:spcPts val="100"/>
-              </a:spcAft>
-            </a:pPr>
-            <a:r>
-              <a:rPr sz="1100">
-                <a:solidFill>
-                  <a:srgbClr val="E2E8F0"/>
-                </a:solidFill>
-                <a:latin typeface="Courier New"/>
-              </a:rPr>
-              <a:t> </a:t>
-            </a:r>
-          </a:p>
-          <a:p>
-            <a:pPr>
-              <a:spcAft>
-                <a:spcPts val="100"/>
-              </a:spcAft>
-            </a:pPr>
-            <a:r>
-              <a:rPr sz="1100">
-                <a:solidFill>
-                  <a:srgbClr val="E2E8F0"/>
-                </a:solidFill>
-                <a:latin typeface="Courier New"/>
-              </a:rPr>
-              <a:t>  allow create: if isAuthenticated()</a:t>
-            </a:r>
-          </a:p>
-          <a:p>
-            <a:pPr>
-              <a:spcAft>
-                <a:spcPts val="100"/>
-              </a:spcAft>
-            </a:pPr>
-            <a:r>
-              <a:rPr sz="1100">
-                <a:solidFill>
-                  <a:srgbClr val="E2E8F0"/>
-                </a:solidFill>
-                <a:latin typeface="Courier New"/>
-              </a:rPr>
-              <a:t>    &amp;&amp; isOwner(request.resource.data.uid)</a:t>
-            </a:r>
-          </a:p>
-          <a:p>
-            <a:pPr>
-              <a:spcAft>
-                <a:spcPts val="100"/>
-              </a:spcAft>
-            </a:pPr>
-            <a:r>
-              <a:rPr sz="1100">
-                <a:solidFill>
-                  <a:srgbClr val="E2E8F0"/>
-                </a:solidFill>
-                <a:latin typeface="Courier New"/>
-              </a:rPr>
-              <a:t>    &amp;&amp; request.resource.data.keys().hasOnly(</a:t>
-            </a:r>
-          </a:p>
-          <a:p>
-            <a:pPr>
-              <a:spcAft>
-                <a:spcPts val="100"/>
-              </a:spcAft>
-            </a:pPr>
-            <a:r>
-              <a:rPr sz="1100">
-                <a:solidFill>
-                  <a:srgbClr val="E2E8F0"/>
-                </a:solidFill>
-                <a:latin typeface="Courier New"/>
-              </a:rPr>
-              <a:t>         ['uid','title','body','createdAt','updatedAt','_schemaVersion']);</a:t>
-            </a:r>
-          </a:p>
-          <a:p>
-            <a:pPr>
-              <a:spcAft>
-                <a:spcPts val="100"/>
-              </a:spcAft>
-            </a:pPr>
-            <a:r>
-              <a:rPr sz="1100">
-                <a:solidFill>
-                  <a:srgbClr val="E2E8F0"/>
-                </a:solidFill>
-                <a:latin typeface="Courier New"/>
-              </a:rPr>
-              <a:t> </a:t>
-            </a:r>
-          </a:p>
-          <a:p>
-            <a:pPr>
-              <a:spcAft>
-                <a:spcPts val="100"/>
-              </a:spcAft>
-            </a:pPr>
-            <a:r>
-              <a:rPr sz="1100">
-                <a:solidFill>
-                  <a:srgbClr val="E2E8F0"/>
-                </a:solidFill>
-                <a:latin typeface="Courier New"/>
-              </a:rPr>
-              <a:t>  allow update: if isAuthenticated() &amp;&amp; isOwner(resource.data.uid)</a:t>
-            </a:r>
-          </a:p>
-          <a:p>
-            <a:pPr>
-              <a:spcAft>
-                <a:spcPts val="100"/>
-              </a:spcAft>
-            </a:pPr>
-            <a:r>
-              <a:rPr sz="1100">
-                <a:solidFill>
-                  <a:srgbClr val="E2E8F0"/>
-                </a:solidFill>
-                <a:latin typeface="Courier New"/>
-              </a:rPr>
-              <a:t>    &amp;&amp; request.resource.data.uid == resource.data.uid  // uid immutable</a:t>
-            </a:r>
-          </a:p>
-          <a:p>
-            <a:pPr>
-              <a:spcAft>
-                <a:spcPts val="100"/>
-              </a:spcAft>
-            </a:pPr>
-            <a:r>
-              <a:rPr sz="1100">
-                <a:solidFill>
-                  <a:srgbClr val="E2E8F0"/>
-                </a:solidFill>
-                <a:latin typeface="Courier New"/>
-              </a:rPr>
-              <a:t>    &amp;&amp; request.resource.data.keys().hasOnly([...]);</a:t>
-            </a:r>
-          </a:p>
-          <a:p>
-            <a:pPr>
-              <a:spcAft>
-                <a:spcPts val="100"/>
-              </a:spcAft>
-            </a:pPr>
-            <a:r>
-              <a:rPr sz="1100">
-                <a:solidFill>
-                  <a:srgbClr val="E2E8F0"/>
-                </a:solidFill>
-                <a:latin typeface="Courier New"/>
-              </a:rPr>
-              <a:t> </a:t>
-            </a:r>
-          </a:p>
-          <a:p>
-            <a:pPr>
-              <a:spcAft>
-                <a:spcPts val="100"/>
-              </a:spcAft>
-            </a:pPr>
-            <a:r>
-              <a:rPr sz="1100">
-                <a:solidFill>
-                  <a:srgbClr val="E2E8F0"/>
-                </a:solidFill>
-                <a:latin typeface="Courier New"/>
-              </a:rPr>
-              <a:t>  allow delete: if false;  // soft-delete only — set deletedAt</a:t>
-            </a:r>
-          </a:p>
-          <a:p>
-            <a:pPr>
-              <a:spcAft>
-                <a:spcPts val="100"/>
-              </a:spcAft>
-            </a:pPr>
-            <a:r>
-              <a:rPr sz="1100">
-                <a:solidFill>
-                  <a:srgbClr val="E2E8F0"/>
-                </a:solidFill>
-                <a:latin typeface="Courier New"/>
-              </a:rPr>
-              <a:t>}</a:t>
-            </a:r>
-          </a:p>
-        </p:txBody>
-      </p:sp>
-      <p:sp>
-        <p:nvSpPr>
-          <p:cNvPr id="6" name="TextBox 5"/>
-          <p:cNvSpPr txBox="1"/>
-          <p:nvPr/>
-        </p:nvSpPr>
-        <p:spPr>
-          <a:xfrm>
-            <a:off x="8961120" y="1828800"/>
-            <a:ext cx="2834640" cy="4572000"/>
-          </a:xfrm>
-          <a:prstGeom prst="rect">
-            <a:avLst/>
-          </a:prstGeom>
-          <a:noFill/>
-        </p:spPr>
-        <p:txBody>
-          <a:bodyPr wrap="square">
-            <a:spAutoFit/>
-          </a:bodyPr>
-          <a:lstStyle/>
-          <a:p>
-            <a:pPr algn="l">
-              <a:spcAft>
-                <a:spcPts val="1000"/>
-              </a:spcAft>
-            </a:pPr>
-            <a:r>
-              <a:rPr sz="1300" b="1">
-                <a:solidFill>
-                  <a:srgbClr val="F59E0B"/>
-                </a:solidFill>
-              </a:rPr>
-              <a:t>•  </a:t>
-            </a:r>
-            <a:r>
-              <a:rPr sz="1300" b="0">
-                <a:solidFill>
-                  <a:srgbClr val="334155"/>
-                </a:solidFill>
-              </a:rPr>
-              <a:t>Owner-only via isOwner(uid)</a:t>
-            </a:r>
-          </a:p>
-          <a:p>
-            <a:pPr algn="l">
-              <a:spcAft>
-                <a:spcPts val="1000"/>
-              </a:spcAft>
-            </a:pPr>
-            <a:r>
-              <a:rPr sz="1300" b="1">
-                <a:solidFill>
-                  <a:srgbClr val="F59E0B"/>
-                </a:solidFill>
-              </a:rPr>
-              <a:t>•  </a:t>
-            </a:r>
-            <a:r>
-              <a:rPr sz="1300" b="0">
-                <a:solidFill>
-                  <a:srgbClr val="334155"/>
-                </a:solidFill>
-              </a:rPr>
-              <a:t>hasOnly() blocks smuggled fields</a:t>
-            </a:r>
-          </a:p>
-          <a:p>
-            <a:pPr algn="l">
-              <a:spcAft>
-                <a:spcPts val="1000"/>
-              </a:spcAft>
-            </a:pPr>
-            <a:r>
-              <a:rPr sz="1300" b="1">
-                <a:solidFill>
-                  <a:srgbClr val="F59E0B"/>
-                </a:solidFill>
-              </a:rPr>
-              <a:t>•  </a:t>
-            </a:r>
-            <a:r>
-              <a:rPr sz="1300" b="0">
-                <a:solidFill>
-                  <a:srgbClr val="334155"/>
-                </a:solidFill>
-              </a:rPr>
-              <a:t>uid can never change</a:t>
-            </a:r>
-          </a:p>
-          <a:p>
-            <a:pPr algn="l">
-              <a:spcAft>
-                <a:spcPts val="1000"/>
-              </a:spcAft>
-            </a:pPr>
-            <a:r>
-              <a:rPr sz="1300" b="1">
-                <a:solidFill>
-                  <a:srgbClr val="F59E0B"/>
-                </a:solidFill>
-              </a:rPr>
-              <a:t>•  </a:t>
-            </a:r>
-            <a:r>
-              <a:rPr sz="1300" b="0">
-                <a:solidFill>
-                  <a:srgbClr val="334155"/>
-                </a:solidFill>
-              </a:rPr>
-              <a:t>No hard deletes, ever</a:t>
-            </a:r>
-          </a:p>
-          <a:p>
-            <a:pPr algn="l">
-              <a:spcAft>
-                <a:spcPts val="1000"/>
-              </a:spcAft>
-            </a:pPr>
-            <a:r>
-              <a:rPr sz="1300" b="1">
-                <a:solidFill>
-                  <a:srgbClr val="F59E0B"/>
-                </a:solidFill>
-              </a:rPr>
-              <a:t>•  </a:t>
-            </a:r>
-            <a:r>
-              <a:rPr sz="1300" b="0">
-                <a:solidFill>
-                  <a:srgbClr val="334155"/>
-                </a:solidFill>
-              </a:rPr>
-              <a:t>Deploy it: firebase deploy --only firestore:rules</a:t>
-            </a:r>
-          </a:p>
-        </p:txBody>
-      </p:sp>
-    </p:spTree>
-  </p:cSld>
-  <p:clrMapOvr>
-    <a:masterClrMapping/>
-  </p:clrMapOvr>
-</p:sld>
-</file>
-
-<file path=ppt/slides/slide6.xml><?xml version="1.0" encoding="utf-8"?>
-<p:sld xmlns:a="http://schemas.openxmlformats.org/drawingml/2006/main" xmlns:p="http://schemas.openxmlformats.org/presentationml/2006/main" xmlns:r="http://schemas.openxmlformats.org/officeDocument/2006/relationships">
-  <p:cSld>
-    <p:bg>
-      <p:bgPr>
-        <a:solidFill>
-          <a:srgbClr val="FFFFFF"/>
-        </a:solidFill>
-        <a:effectLst/>
-      </p:bgPr>
-    </p:bg>
-    <p:spTree>
-      <p:nvGrpSpPr>
-        <p:cNvPr id="1" name=""/>
-        <p:cNvGrpSpPr/>
-        <p:nvPr/>
-      </p:nvGrpSpPr>
-      <p:grpSpPr/>
-      <p:sp>
-        <p:nvSpPr>
-          <p:cNvPr id="2" name="Rounded Rectangle 1"/>
-          <p:cNvSpPr/>
-          <p:nvPr/>
-        </p:nvSpPr>
-        <p:spPr>
-          <a:xfrm>
-            <a:off x="548640" y="457200"/>
-            <a:ext cx="1417320" cy="457200"/>
-          </a:xfrm>
-          <a:prstGeom prst="roundRect">
-            <a:avLst/>
-          </a:prstGeom>
-          <a:solidFill>
-            <a:srgbClr val="F59E0B"/>
-          </a:solidFill>
-          <a:ln>
-            <a:noFill/>
-          </a:ln>
-          <a:effectLst/>
-        </p:spPr>
-        <p:style>
-          <a:lnRef idx="1">
-            <a:schemeClr val="accent1"/>
-          </a:lnRef>
-          <a:fillRef idx="3">
-            <a:schemeClr val="accent1"/>
-          </a:fillRef>
-          <a:effectRef idx="2">
-            <a:schemeClr val="accent1"/>
-          </a:effectRef>
-          <a:fontRef idx="minor">
-            <a:schemeClr val="lt1"/>
-          </a:fontRef>
-        </p:style>
-        <p:txBody>
-          <a:bodyPr rtlCol="0" anchor="ctr"/>
-          <a:lstStyle/>
-          <a:p>
-            <a:pPr algn="ctr"/>
-            <a:r>
-              <a:rPr sz="1600" b="1">
-                <a:solidFill>
-                  <a:srgbClr val="0F172A"/>
-                </a:solidFill>
-              </a:rPr>
-              <a:t>STEP 1d</a:t>
-            </a:r>
-          </a:p>
-        </p:txBody>
-      </p:sp>
-      <p:sp>
-        <p:nvSpPr>
-          <p:cNvPr id="3" name="TextBox 2"/>
-          <p:cNvSpPr txBox="1"/>
-          <p:nvPr/>
-        </p:nvSpPr>
-        <p:spPr>
-          <a:xfrm>
-            <a:off x="2194560" y="384048"/>
-            <a:ext cx="9692640" cy="685800"/>
-          </a:xfrm>
-          <a:prstGeom prst="rect">
-            <a:avLst/>
-          </a:prstGeom>
-          <a:noFill/>
-        </p:spPr>
-        <p:txBody>
-          <a:bodyPr wrap="square">
-            <a:spAutoFit/>
-          </a:bodyPr>
-          <a:lstStyle/>
-          <a:p>
-            <a:pPr algn="l">
-              <a:spcAft>
-                <a:spcPts val="800"/>
-              </a:spcAft>
-            </a:pPr>
-            <a:r>
-              <a:rPr sz="3000" b="1">
-                <a:solidFill>
-                  <a:srgbClr val="0F172A"/>
-                </a:solidFill>
-              </a:rPr>
-              <a:t>Document the schema</a:t>
-            </a:r>
-          </a:p>
-        </p:txBody>
-      </p:sp>
-      <p:sp>
-        <p:nvSpPr>
-          <p:cNvPr id="4" name="TextBox 3"/>
-          <p:cNvSpPr txBox="1"/>
-          <p:nvPr/>
-        </p:nvSpPr>
-        <p:spPr>
-          <a:xfrm>
-            <a:off x="548640" y="1115568"/>
-            <a:ext cx="11064240" cy="457200"/>
-          </a:xfrm>
-          <a:prstGeom prst="rect">
-            <a:avLst/>
-          </a:prstGeom>
-          <a:noFill/>
-        </p:spPr>
-        <p:txBody>
-          <a:bodyPr wrap="square">
-            <a:spAutoFit/>
-          </a:bodyPr>
-          <a:lstStyle/>
-          <a:p>
-            <a:pPr algn="l">
-              <a:spcAft>
-                <a:spcPts val="800"/>
-              </a:spcAft>
-            </a:pPr>
-            <a:r>
-              <a:rPr sz="1500" b="0">
-                <a:solidFill>
-                  <a:srgbClr val="64748B"/>
-                </a:solidFill>
-              </a:rPr>
-              <a:t>docs/FIRESTORE-SCHEMA.md — so the next person (or next Claude session) knows the shape</a:t>
-            </a:r>
-          </a:p>
-        </p:txBody>
-      </p:sp>
-      <p:sp>
-        <p:nvSpPr>
-          <p:cNvPr id="5" name="Rounded Rectangle 4"/>
-          <p:cNvSpPr/>
-          <p:nvPr/>
-        </p:nvSpPr>
-        <p:spPr>
-          <a:xfrm>
-            <a:off x="548640" y="1737360"/>
-            <a:ext cx="7498079" cy="3291840"/>
-          </a:xfrm>
-          <a:prstGeom prst="roundRect">
-            <a:avLst/>
-          </a:prstGeom>
-          <a:solidFill>
-            <a:srgbClr val="1E293B"/>
-          </a:solidFill>
-          <a:ln>
-            <a:noFill/>
-          </a:ln>
-          <a:effectLst/>
-        </p:spPr>
-        <p:style>
-          <a:lnRef idx="1">
-            <a:schemeClr val="accent1"/>
-          </a:lnRef>
-          <a:fillRef idx="3">
-            <a:schemeClr val="accent1"/>
-          </a:fillRef>
-          <a:effectRef idx="2">
-            <a:schemeClr val="accent1"/>
-          </a:effectRef>
-          <a:fontRef idx="minor">
-            <a:schemeClr val="lt1"/>
-          </a:fontRef>
-        </p:style>
-        <p:txBody>
-          <a:bodyPr rtlCol="0" anchor="t" wrap="none" lIns="228600" rIns="182880" tIns="128016"/>
-          <a:lstStyle/>
-          <a:p>
-            <a:pPr algn="ctr">
-              <a:spcAft>
-                <a:spcPts val="700"/>
-              </a:spcAft>
-            </a:pPr>
-            <a:r>
-              <a:rPr sz="1100" b="1">
-                <a:solidFill>
-                  <a:srgbClr val="F59E0B"/>
-                </a:solidFill>
-                <a:latin typeface="Courier New"/>
-              </a:rPr>
-              <a:t>docs/FIRESTORE-SCHEMA.md  (append)</a:t>
-            </a:r>
-          </a:p>
-          <a:p>
-            <a:pPr>
-              <a:spcAft>
-                <a:spcPts val="100"/>
-              </a:spcAft>
-            </a:pPr>
-            <a:r>
-              <a:rPr sz="1200">
-                <a:solidFill>
-                  <a:srgbClr val="94A3B8"/>
-                </a:solidFill>
-                <a:latin typeface="Courier New"/>
-              </a:rPr>
-              <a:t>## `notes` collection</a:t>
-            </a:r>
-          </a:p>
-          <a:p>
-            <a:pPr>
-              <a:spcAft>
-                <a:spcPts val="100"/>
-              </a:spcAft>
-            </a:pPr>
-            <a:r>
-              <a:rPr sz="1200">
-                <a:solidFill>
-                  <a:srgbClr val="E2E8F0"/>
-                </a:solidFill>
-                <a:latin typeface="Courier New"/>
-              </a:rPr>
-              <a:t> </a:t>
-            </a:r>
-          </a:p>
-          <a:p>
-            <a:pPr>
-              <a:spcAft>
-                <a:spcPts val="100"/>
-              </a:spcAft>
-            </a:pPr>
-            <a:r>
-              <a:rPr sz="1200">
-                <a:solidFill>
-                  <a:srgbClr val="E2E8F0"/>
-                </a:solidFill>
-                <a:latin typeface="Courier New"/>
-              </a:rPr>
-              <a:t>**Path:** /notes/{noteId}   **Access:** owner-only</a:t>
-            </a:r>
-          </a:p>
-          <a:p>
-            <a:pPr>
-              <a:spcAft>
-                <a:spcPts val="100"/>
-              </a:spcAft>
-            </a:pPr>
-            <a:r>
-              <a:rPr sz="1200">
-                <a:solidFill>
-                  <a:srgbClr val="E2E8F0"/>
-                </a:solidFill>
-                <a:latin typeface="Courier New"/>
-              </a:rPr>
-              <a:t> </a:t>
-            </a:r>
-          </a:p>
-          <a:p>
-            <a:pPr>
-              <a:spcAft>
-                <a:spcPts val="100"/>
-              </a:spcAft>
-            </a:pPr>
-            <a:r>
-              <a:rPr sz="1200">
-                <a:solidFill>
-                  <a:srgbClr val="E2E8F0"/>
-                </a:solidFill>
-                <a:latin typeface="Courier New"/>
-              </a:rPr>
-              <a:t>| Field          | Type      | Description            |</a:t>
-            </a:r>
-          </a:p>
-          <a:p>
-            <a:pPr>
-              <a:spcAft>
-                <a:spcPts val="100"/>
-              </a:spcAft>
-            </a:pPr>
-            <a:r>
-              <a:rPr sz="1200">
-                <a:solidFill>
-                  <a:srgbClr val="E2E8F0"/>
-                </a:solidFill>
-                <a:latin typeface="Courier New"/>
-              </a:rPr>
-              <a:t>| uid            | string    | Owner's Auth UID       |</a:t>
-            </a:r>
-          </a:p>
-          <a:p>
-            <a:pPr>
-              <a:spcAft>
-                <a:spcPts val="100"/>
-              </a:spcAft>
-            </a:pPr>
-            <a:r>
-              <a:rPr sz="1200">
-                <a:solidFill>
-                  <a:srgbClr val="E2E8F0"/>
-                </a:solidFill>
-                <a:latin typeface="Courier New"/>
-              </a:rPr>
-              <a:t>| title          | string    | 1–200 chars            |</a:t>
-            </a:r>
-          </a:p>
-          <a:p>
-            <a:pPr>
-              <a:spcAft>
-                <a:spcPts val="100"/>
-              </a:spcAft>
-            </a:pPr>
-            <a:r>
-              <a:rPr sz="1200">
-                <a:solidFill>
-                  <a:srgbClr val="E2E8F0"/>
-                </a:solidFill>
-                <a:latin typeface="Courier New"/>
-              </a:rPr>
-              <a:t>| body           | string    | up to 10 000 chars     |</a:t>
-            </a:r>
-          </a:p>
-          <a:p>
-            <a:pPr>
-              <a:spcAft>
-                <a:spcPts val="100"/>
-              </a:spcAft>
-            </a:pPr>
-            <a:r>
-              <a:rPr sz="1200">
-                <a:solidFill>
-                  <a:srgbClr val="E2E8F0"/>
-                </a:solidFill>
-                <a:latin typeface="Courier New"/>
-              </a:rPr>
-              <a:t>| _schemaVersion | 1         | for lazy migration     |</a:t>
-            </a:r>
-          </a:p>
-        </p:txBody>
-      </p:sp>
-      <p:sp>
-        <p:nvSpPr>
-          <p:cNvPr id="6" name="TextBox 5"/>
-          <p:cNvSpPr txBox="1"/>
-          <p:nvPr/>
-        </p:nvSpPr>
-        <p:spPr>
-          <a:xfrm>
-            <a:off x="548640" y="6172200"/>
-            <a:ext cx="11064240" cy="548640"/>
-          </a:xfrm>
-          <a:prstGeom prst="rect">
-            <a:avLst/>
-          </a:prstGeom>
-          <a:noFill/>
-        </p:spPr>
-        <p:txBody>
-          <a:bodyPr wrap="square">
-            <a:spAutoFit/>
-          </a:bodyPr>
-          <a:lstStyle/>
-          <a:p>
-            <a:pPr algn="l">
-              <a:spcAft>
-                <a:spcPts val="800"/>
-              </a:spcAft>
-            </a:pPr>
-            <a:r>
-              <a:rPr sz="1400" b="0">
-                <a:solidFill>
-                  <a:srgbClr val="F59E0B"/>
-                </a:solidFill>
-              </a:rPr>
-              <a:t>Shortcut: the /firebase-collection skill does steps 1a–1d in one go — type, collection, rules, and docs.</a:t>
-            </a:r>
-          </a:p>
-        </p:txBody>
-      </p:sp>
-    </p:spTree>
-  </p:cSld>
-  <p:clrMapOvr>
-    <a:masterClrMapping/>
-  </p:clrMapOvr>
-</p:sld>
-</file>
-
-<file path=ppt/slides/slide7.xml><?xml version="1.0" encoding="utf-8"?>
-<p:sld xmlns:a="http://schemas.openxmlformats.org/drawingml/2006/main" xmlns:p="http://schemas.openxmlformats.org/presentationml/2006/main" xmlns:r="http://schemas.openxmlformats.org/officeDocument/2006/relationships">
-  <p:cSld>
-    <p:bg>
-      <p:bgPr>
-        <a:solidFill>
-          <a:srgbClr val="FFFFFF"/>
-        </a:solidFill>
-        <a:effectLst/>
-      </p:bgPr>
-    </p:bg>
-    <p:spTree>
-      <p:nvGrpSpPr>
-        <p:cNvPr id="1" name=""/>
-        <p:cNvGrpSpPr/>
-        <p:nvPr/>
-      </p:nvGrpSpPr>
-      <p:grpSpPr/>
-      <p:sp>
-        <p:nvSpPr>
-          <p:cNvPr id="2" name="Rounded Rectangle 1"/>
-          <p:cNvSpPr/>
-          <p:nvPr/>
-        </p:nvSpPr>
-        <p:spPr>
-          <a:xfrm>
-            <a:off x="548640" y="457200"/>
-            <a:ext cx="1417320" cy="457200"/>
-          </a:xfrm>
-          <a:prstGeom prst="roundRect">
-            <a:avLst/>
-          </a:prstGeom>
-          <a:solidFill>
-            <a:srgbClr val="F59E0B"/>
-          </a:solidFill>
-          <a:ln>
-            <a:noFill/>
-          </a:ln>
-          <a:effectLst/>
-        </p:spPr>
-        <p:style>
-          <a:lnRef idx="1">
-            <a:schemeClr val="accent1"/>
-          </a:lnRef>
-          <a:fillRef idx="3">
-            <a:schemeClr val="accent1"/>
-          </a:fillRef>
-          <a:effectRef idx="2">
-            <a:schemeClr val="accent1"/>
-          </a:effectRef>
-          <a:fontRef idx="minor">
-            <a:schemeClr val="lt1"/>
-          </a:fontRef>
-        </p:style>
-        <p:txBody>
-          <a:bodyPr rtlCol="0" anchor="ctr"/>
-          <a:lstStyle/>
-          <a:p>
-            <a:pPr algn="ctr"/>
-            <a:r>
-              <a:rPr sz="1600" b="1">
-                <a:solidFill>
-                  <a:srgbClr val="0F172A"/>
-                </a:solidFill>
-              </a:rPr>
-              <a:t>STEP 2</a:t>
-            </a:r>
-          </a:p>
-        </p:txBody>
-      </p:sp>
-      <p:sp>
-        <p:nvSpPr>
-          <p:cNvPr id="3" name="TextBox 2"/>
-          <p:cNvSpPr txBox="1"/>
-          <p:nvPr/>
-        </p:nvSpPr>
-        <p:spPr>
-          <a:xfrm>
-            <a:off x="2194560" y="384048"/>
-            <a:ext cx="9692640" cy="685800"/>
-          </a:xfrm>
-          <a:prstGeom prst="rect">
-            <a:avLst/>
-          </a:prstGeom>
-          <a:noFill/>
-        </p:spPr>
-        <p:txBody>
-          <a:bodyPr wrap="square">
-            <a:spAutoFit/>
-          </a:bodyPr>
-          <a:lstStyle/>
-          <a:p>
-            <a:pPr algn="l">
-              <a:spcAft>
-                <a:spcPts val="800"/>
-              </a:spcAft>
-            </a:pPr>
-            <a:r>
-              <a:rPr sz="3000" b="1">
-                <a:solidFill>
-                  <a:srgbClr val="0F172A"/>
-                </a:solidFill>
-              </a:rPr>
-              <a:t>The mutation — a Server Action</a:t>
-            </a:r>
-          </a:p>
-        </p:txBody>
-      </p:sp>
-      <p:sp>
-        <p:nvSpPr>
-          <p:cNvPr id="4" name="TextBox 3"/>
-          <p:cNvSpPr txBox="1"/>
-          <p:nvPr/>
-        </p:nvSpPr>
-        <p:spPr>
-          <a:xfrm>
-            <a:off x="548640" y="1115568"/>
-            <a:ext cx="11064240" cy="457200"/>
-          </a:xfrm>
-          <a:prstGeom prst="rect">
-            <a:avLst/>
-          </a:prstGeom>
-          <a:noFill/>
-        </p:spPr>
-        <p:txBody>
-          <a:bodyPr wrap="square">
-            <a:spAutoFit/>
-          </a:bodyPr>
-          <a:lstStyle/>
-          <a:p>
-            <a:pPr algn="l">
-              <a:spcAft>
-                <a:spcPts val="800"/>
-              </a:spcAft>
-            </a:pPr>
-            <a:r>
-              <a:rPr sz="1500" b="0">
-                <a:solidFill>
-                  <a:srgbClr val="64748B"/>
-                </a:solidFill>
-              </a:rPr>
-              <a:t>Runs on the server, called like a function · the three-beat pattern</a:t>
-            </a:r>
-          </a:p>
-        </p:txBody>
-      </p:sp>
-      <p:sp>
-        <p:nvSpPr>
-          <p:cNvPr id="5" name="Rounded Rectangle 4"/>
-          <p:cNvSpPr/>
-          <p:nvPr/>
-        </p:nvSpPr>
-        <p:spPr>
-          <a:xfrm>
-            <a:off x="548640" y="1737360"/>
-            <a:ext cx="8138160" cy="4572000"/>
-          </a:xfrm>
-          <a:prstGeom prst="roundRect">
-            <a:avLst/>
-          </a:prstGeom>
-          <a:solidFill>
-            <a:srgbClr val="1E293B"/>
-          </a:solidFill>
-          <a:ln>
-            <a:noFill/>
-          </a:ln>
-          <a:effectLst/>
-        </p:spPr>
-        <p:style>
-          <a:lnRef idx="1">
-            <a:schemeClr val="accent1"/>
-          </a:lnRef>
-          <a:fillRef idx="3">
-            <a:schemeClr val="accent1"/>
-          </a:fillRef>
-          <a:effectRef idx="2">
-            <a:schemeClr val="accent1"/>
-          </a:effectRef>
-          <a:fontRef idx="minor">
-            <a:schemeClr val="lt1"/>
-          </a:fontRef>
-        </p:style>
-        <p:txBody>
-          <a:bodyPr rtlCol="0" anchor="t" wrap="none" lIns="228600" rIns="182880" tIns="128016"/>
-          <a:lstStyle/>
-          <a:p>
-            <a:pPr algn="ctr">
-              <a:spcAft>
-                <a:spcPts val="700"/>
-              </a:spcAft>
-            </a:pPr>
-            <a:r>
-              <a:rPr sz="1000" b="1">
-                <a:solidFill>
-                  <a:srgbClr val="F59E0B"/>
-                </a:solidFill>
-                <a:latin typeface="Courier New"/>
-              </a:rPr>
-              <a:t>frontend/src/features/notes/actions/notes.actions.ts  (new)</a:t>
-            </a:r>
-          </a:p>
-          <a:p>
-            <a:pPr>
-              <a:spcAft>
-                <a:spcPts val="100"/>
-              </a:spcAft>
-            </a:pPr>
-            <a:r>
-              <a:rPr sz="1100">
-                <a:solidFill>
-                  <a:srgbClr val="E2E8F0"/>
-                </a:solidFill>
-                <a:latin typeface="Courier New"/>
-              </a:rPr>
-              <a:t>'use server'</a:t>
-            </a:r>
-          </a:p>
-          <a:p>
-            <a:pPr>
-              <a:spcAft>
-                <a:spcPts val="100"/>
-              </a:spcAft>
-            </a:pPr>
-            <a:r>
-              <a:rPr sz="1100">
-                <a:solidFill>
-                  <a:srgbClr val="E2E8F0"/>
-                </a:solidFill>
-                <a:latin typeface="Courier New"/>
-              </a:rPr>
-              <a:t> </a:t>
-            </a:r>
-          </a:p>
-          <a:p>
-            <a:pPr>
-              <a:spcAft>
-                <a:spcPts val="100"/>
-              </a:spcAft>
-            </a:pPr>
-            <a:r>
-              <a:rPr sz="1100">
-                <a:solidFill>
-                  <a:srgbClr val="E2E8F0"/>
-                </a:solidFill>
-                <a:latin typeface="Courier New"/>
-              </a:rPr>
-              <a:t>const createNoteSchema = z.object({</a:t>
-            </a:r>
-          </a:p>
-          <a:p>
-            <a:pPr>
-              <a:spcAft>
-                <a:spcPts val="100"/>
-              </a:spcAft>
-            </a:pPr>
-            <a:r>
-              <a:rPr sz="1100">
-                <a:solidFill>
-                  <a:srgbClr val="E2E8F0"/>
-                </a:solidFill>
-                <a:latin typeface="Courier New"/>
-              </a:rPr>
-              <a:t>  title: z.string().min(1).max(200),</a:t>
-            </a:r>
-          </a:p>
-          <a:p>
-            <a:pPr>
-              <a:spcAft>
-                <a:spcPts val="100"/>
-              </a:spcAft>
-            </a:pPr>
-            <a:r>
-              <a:rPr sz="1100">
-                <a:solidFill>
-                  <a:srgbClr val="E2E8F0"/>
-                </a:solidFill>
-                <a:latin typeface="Courier New"/>
-              </a:rPr>
-              <a:t>  body: z.string().max(10_000),</a:t>
-            </a:r>
-          </a:p>
-          <a:p>
-            <a:pPr>
-              <a:spcAft>
-                <a:spcPts val="100"/>
-              </a:spcAft>
-            </a:pPr>
-            <a:r>
-              <a:rPr sz="1100">
-                <a:solidFill>
-                  <a:srgbClr val="E2E8F0"/>
-                </a:solidFill>
-                <a:latin typeface="Courier New"/>
-              </a:rPr>
-              <a:t>})</a:t>
-            </a:r>
-          </a:p>
-          <a:p>
-            <a:pPr>
-              <a:spcAft>
-                <a:spcPts val="100"/>
-              </a:spcAft>
-            </a:pPr>
-            <a:r>
-              <a:rPr sz="1100">
-                <a:solidFill>
-                  <a:srgbClr val="E2E8F0"/>
-                </a:solidFill>
-                <a:latin typeface="Courier New"/>
-              </a:rPr>
-              <a:t> </a:t>
-            </a:r>
-          </a:p>
-          <a:p>
-            <a:pPr>
-              <a:spcAft>
-                <a:spcPts val="100"/>
-              </a:spcAft>
-            </a:pPr>
-            <a:r>
-              <a:rPr sz="1100">
-                <a:solidFill>
-                  <a:srgbClr val="E2E8F0"/>
-                </a:solidFill>
-                <a:latin typeface="Courier New"/>
-              </a:rPr>
-              <a:t>export async function createNote(input: unknown):</a:t>
-            </a:r>
-          </a:p>
-          <a:p>
-            <a:pPr>
-              <a:spcAft>
-                <a:spcPts val="100"/>
-              </a:spcAft>
-            </a:pPr>
-            <a:r>
-              <a:rPr sz="1100">
-                <a:solidFill>
-                  <a:srgbClr val="E2E8F0"/>
-                </a:solidFill>
-                <a:latin typeface="Courier New"/>
-              </a:rPr>
-              <a:t>    Promise&lt;ActionResult&lt;string&gt;&gt; {</a:t>
-            </a:r>
-          </a:p>
-          <a:p>
-            <a:pPr>
-              <a:spcAft>
-                <a:spcPts val="100"/>
-              </a:spcAft>
-            </a:pPr>
-            <a:r>
-              <a:rPr sz="1100">
-                <a:solidFill>
-                  <a:srgbClr val="E2E8F0"/>
-                </a:solidFill>
-                <a:latin typeface="Courier New"/>
-              </a:rPr>
-              <a:t>  const session = await requireAuth()              // beat 1: who?</a:t>
-            </a:r>
-          </a:p>
-          <a:p>
-            <a:pPr>
-              <a:spcAft>
-                <a:spcPts val="100"/>
-              </a:spcAft>
-            </a:pPr>
-            <a:r>
-              <a:rPr sz="1100">
-                <a:solidFill>
-                  <a:srgbClr val="E2E8F0"/>
-                </a:solidFill>
-                <a:latin typeface="Courier New"/>
-              </a:rPr>
-              <a:t> </a:t>
-            </a:r>
-          </a:p>
-          <a:p>
-            <a:pPr>
-              <a:spcAft>
-                <a:spcPts val="100"/>
-              </a:spcAft>
-            </a:pPr>
-            <a:r>
-              <a:rPr sz="1100">
-                <a:solidFill>
-                  <a:srgbClr val="E2E8F0"/>
-                </a:solidFill>
-                <a:latin typeface="Courier New"/>
-              </a:rPr>
-              <a:t>  const parsed = createNoteSchema.safeParse(input) // beat 2: sane?</a:t>
-            </a:r>
-          </a:p>
-          <a:p>
-            <a:pPr>
-              <a:spcAft>
-                <a:spcPts val="100"/>
-              </a:spcAft>
-            </a:pPr>
-            <a:r>
-              <a:rPr sz="1100">
-                <a:solidFill>
-                  <a:srgbClr val="E2E8F0"/>
-                </a:solidFill>
-                <a:latin typeface="Courier New"/>
-              </a:rPr>
-              <a:t>  if (!parsed.success)</a:t>
-            </a:r>
-          </a:p>
-          <a:p>
-            <a:pPr>
-              <a:spcAft>
-                <a:spcPts val="100"/>
-              </a:spcAft>
-            </a:pPr>
-            <a:r>
-              <a:rPr sz="1100">
-                <a:solidFill>
-                  <a:srgbClr val="E2E8F0"/>
-                </a:solidFill>
-                <a:latin typeface="Courier New"/>
-              </a:rPr>
-              <a:t>    return { success: false, error: '…' }</a:t>
-            </a:r>
-          </a:p>
-          <a:p>
-            <a:pPr>
-              <a:spcAft>
-                <a:spcPts val="100"/>
-              </a:spcAft>
-            </a:pPr>
-            <a:r>
-              <a:rPr sz="1100">
-                <a:solidFill>
-                  <a:srgbClr val="E2E8F0"/>
-                </a:solidFill>
-                <a:latin typeface="Courier New"/>
-              </a:rPr>
-              <a:t> </a:t>
-            </a:r>
-          </a:p>
-          <a:p>
-            <a:pPr>
-              <a:spcAft>
-                <a:spcPts val="100"/>
-              </a:spcAft>
-            </a:pPr>
-            <a:r>
-              <a:rPr sz="1100">
-                <a:solidFill>
-                  <a:srgbClr val="E2E8F0"/>
-                </a:solidFill>
-                <a:latin typeface="Courier New"/>
-              </a:rPr>
-              <a:t>  const ref = await adminDb.collection('notes').add({  // beat 3</a:t>
-            </a:r>
-          </a:p>
-          <a:p>
-            <a:pPr>
-              <a:spcAft>
-                <a:spcPts val="100"/>
-              </a:spcAft>
-            </a:pPr>
-            <a:r>
-              <a:rPr sz="1100">
-                <a:solidFill>
-                  <a:srgbClr val="E2E8F0"/>
-                </a:solidFill>
-                <a:latin typeface="Courier New"/>
-              </a:rPr>
-              <a:t>    ...parsed.data, uid: session.uid,</a:t>
-            </a:r>
-          </a:p>
-          <a:p>
-            <a:pPr>
-              <a:spcAft>
-                <a:spcPts val="100"/>
-              </a:spcAft>
-            </a:pPr>
-            <a:r>
-              <a:rPr sz="1100">
-                <a:solidFill>
-                  <a:srgbClr val="E2E8F0"/>
-                </a:solidFill>
-                <a:latin typeface="Courier New"/>
-              </a:rPr>
-              <a:t>    createdAt: now, updatedAt: now, _schemaVersion: 1,</a:t>
-            </a:r>
-          </a:p>
-          <a:p>
-            <a:pPr>
-              <a:spcAft>
-                <a:spcPts val="100"/>
-              </a:spcAft>
-            </a:pPr>
-            <a:r>
-              <a:rPr sz="1100">
-                <a:solidFill>
-                  <a:srgbClr val="E2E8F0"/>
-                </a:solidFill>
-                <a:latin typeface="Courier New"/>
-              </a:rPr>
-              <a:t>  })</a:t>
-            </a:r>
-          </a:p>
-          <a:p>
-            <a:pPr>
-              <a:spcAft>
-                <a:spcPts val="100"/>
-              </a:spcAft>
-            </a:pPr>
-            <a:r>
-              <a:rPr sz="1100">
-                <a:solidFill>
-                  <a:srgbClr val="E2E8F0"/>
-                </a:solidFill>
-                <a:latin typeface="Courier New"/>
-              </a:rPr>
-              <a:t>  return { success: true, data: ref.id }</a:t>
-            </a:r>
-          </a:p>
-          <a:p>
-            <a:pPr>
-              <a:spcAft>
-                <a:spcPts val="100"/>
-              </a:spcAft>
-            </a:pPr>
-            <a:r>
-              <a:rPr sz="1100">
-                <a:solidFill>
-                  <a:srgbClr val="E2E8F0"/>
-                </a:solidFill>
-                <a:latin typeface="Courier New"/>
-              </a:rPr>
-              <a:t>}</a:t>
-            </a:r>
-          </a:p>
-        </p:txBody>
-      </p:sp>
-      <p:sp>
-        <p:nvSpPr>
-          <p:cNvPr id="6" name="TextBox 5"/>
-          <p:cNvSpPr txBox="1"/>
-          <p:nvPr/>
-        </p:nvSpPr>
-        <p:spPr>
-          <a:xfrm>
-            <a:off x="8961120" y="1828800"/>
-            <a:ext cx="2834640" cy="4572000"/>
-          </a:xfrm>
-          <a:prstGeom prst="rect">
-            <a:avLst/>
-          </a:prstGeom>
-          <a:noFill/>
-        </p:spPr>
-        <p:txBody>
-          <a:bodyPr wrap="square">
-            <a:spAutoFit/>
-          </a:bodyPr>
-          <a:lstStyle/>
-          <a:p>
-            <a:pPr algn="l">
-              <a:spcAft>
-                <a:spcPts val="1000"/>
-              </a:spcAft>
-            </a:pPr>
-            <a:r>
-              <a:rPr sz="1300" b="1">
-                <a:solidFill>
-                  <a:srgbClr val="F59E0B"/>
-                </a:solidFill>
-              </a:rPr>
-              <a:t>•  </a:t>
-            </a:r>
-            <a:r>
-              <a:rPr sz="1300" b="0">
-                <a:solidFill>
-                  <a:srgbClr val="334155"/>
-                </a:solidFill>
-              </a:rPr>
-              <a:t>1 · requireAuth() — redirects if nobody</a:t>
-            </a:r>
-          </a:p>
-          <a:p>
-            <a:pPr algn="l">
-              <a:spcAft>
-                <a:spcPts val="1000"/>
-              </a:spcAft>
-            </a:pPr>
-            <a:r>
-              <a:rPr sz="1300" b="1">
-                <a:solidFill>
-                  <a:srgbClr val="F59E0B"/>
-                </a:solidFill>
-              </a:rPr>
-              <a:t>•  </a:t>
-            </a:r>
-            <a:r>
-              <a:rPr sz="1300" b="0">
-                <a:solidFill>
-                  <a:srgbClr val="334155"/>
-                </a:solidFill>
-              </a:rPr>
-              <a:t>2 · Zod parse — nothing unvalidated touches the DB</a:t>
-            </a:r>
-          </a:p>
-          <a:p>
-            <a:pPr algn="l">
-              <a:spcAft>
-                <a:spcPts val="1000"/>
-              </a:spcAft>
-            </a:pPr>
-            <a:r>
-              <a:rPr sz="1300" b="1">
-                <a:solidFill>
-                  <a:srgbClr val="F59E0B"/>
-                </a:solidFill>
-              </a:rPr>
-              <a:t>•  </a:t>
-            </a:r>
-            <a:r>
-              <a:rPr sz="1300" b="0">
-                <a:solidFill>
-                  <a:srgbClr val="334155"/>
-                </a:solidFill>
-              </a:rPr>
-              <a:t>3 · return ActionResult — never throw at the caller</a:t>
-            </a:r>
-          </a:p>
-        </p:txBody>
-      </p:sp>
-    </p:spTree>
-  </p:cSld>
-  <p:clrMapOvr>
-    <a:masterClrMapping/>
-  </p:clrMapOvr>
-</p:sld>
-</file>
-
-<file path=ppt/slides/slide8.xml><?xml version="1.0" encoding="utf-8"?>
-<p:sld xmlns:a="http://schemas.openxmlformats.org/drawingml/2006/main" xmlns:p="http://schemas.openxmlformats.org/presentationml/2006/main" xmlns:r="http://schemas.openxmlformats.org/officeDocument/2006/relationships">
-  <p:cSld>
-    <p:bg>
-      <p:bgPr>
-        <a:solidFill>
-          <a:srgbClr val="FFFFFF"/>
-        </a:solidFill>
-        <a:effectLst/>
-      </p:bgPr>
-    </p:bg>
-    <p:spTree>
-      <p:nvGrpSpPr>
-        <p:cNvPr id="1" name=""/>
-        <p:cNvGrpSpPr/>
-        <p:nvPr/>
-      </p:nvGrpSpPr>
-      <p:grpSpPr/>
-      <p:sp>
-        <p:nvSpPr>
-          <p:cNvPr id="2" name="Rounded Rectangle 1"/>
-          <p:cNvSpPr/>
-          <p:nvPr/>
-        </p:nvSpPr>
-        <p:spPr>
-          <a:xfrm>
-            <a:off x="548640" y="457200"/>
-            <a:ext cx="1417320" cy="457200"/>
-          </a:xfrm>
-          <a:prstGeom prst="roundRect">
-            <a:avLst/>
-          </a:prstGeom>
-          <a:solidFill>
-            <a:srgbClr val="F59E0B"/>
-          </a:solidFill>
-          <a:ln>
-            <a:noFill/>
-          </a:ln>
-          <a:effectLst/>
-        </p:spPr>
-        <p:style>
-          <a:lnRef idx="1">
-            <a:schemeClr val="accent1"/>
-          </a:lnRef>
-          <a:fillRef idx="3">
-            <a:schemeClr val="accent1"/>
-          </a:fillRef>
-          <a:effectRef idx="2">
-            <a:schemeClr val="accent1"/>
-          </a:effectRef>
-          <a:fontRef idx="minor">
-            <a:schemeClr val="lt1"/>
-          </a:fontRef>
-        </p:style>
-        <p:txBody>
-          <a:bodyPr rtlCol="0" anchor="ctr"/>
-          <a:lstStyle/>
-          <a:p>
-            <a:pPr algn="ctr"/>
-            <a:r>
-              <a:rPr sz="1600" b="1">
-                <a:solidFill>
-                  <a:srgbClr val="0F172A"/>
-                </a:solidFill>
-              </a:rPr>
               <a:t>STEP 3b</a:t>
             </a:r>
           </a:p>
@@ -10148,677 +10819,6 @@
                 </a:solidFill>
               </a:rPr>
               <a:t>(dashboard) group = app shell + sidebar</a:t>
-            </a:r>
-          </a:p>
-        </p:txBody>
-      </p:sp>
-    </p:spTree>
-  </p:cSld>
-  <p:clrMapOvr>
-    <a:masterClrMapping/>
-  </p:clrMapOvr>
-</p:sld>
-</file>
-
-<file path=ppt/slides/slide9.xml><?xml version="1.0" encoding="utf-8"?>
-<p:sld xmlns:a="http://schemas.openxmlformats.org/drawingml/2006/main" xmlns:p="http://schemas.openxmlformats.org/presentationml/2006/main" xmlns:r="http://schemas.openxmlformats.org/officeDocument/2006/relationships">
-  <p:cSld>
-    <p:bg>
-      <p:bgPr>
-        <a:solidFill>
-          <a:srgbClr val="FFFFFF"/>
-        </a:solidFill>
-        <a:effectLst/>
-      </p:bgPr>
-    </p:bg>
-    <p:spTree>
-      <p:nvGrpSpPr>
-        <p:cNvPr id="1" name=""/>
-        <p:cNvGrpSpPr/>
-        <p:nvPr/>
-      </p:nvGrpSpPr>
-      <p:grpSpPr/>
-      <p:sp>
-        <p:nvSpPr>
-          <p:cNvPr id="2" name="Rounded Rectangle 1"/>
-          <p:cNvSpPr/>
-          <p:nvPr/>
-        </p:nvSpPr>
-        <p:spPr>
-          <a:xfrm>
-            <a:off x="548640" y="457200"/>
-            <a:ext cx="1417320" cy="457200"/>
-          </a:xfrm>
-          <a:prstGeom prst="roundRect">
-            <a:avLst/>
-          </a:prstGeom>
-          <a:solidFill>
-            <a:srgbClr val="F59E0B"/>
-          </a:solidFill>
-          <a:ln>
-            <a:noFill/>
-          </a:ln>
-          <a:effectLst/>
-        </p:spPr>
-        <p:style>
-          <a:lnRef idx="1">
-            <a:schemeClr val="accent1"/>
-          </a:lnRef>
-          <a:fillRef idx="3">
-            <a:schemeClr val="accent1"/>
-          </a:fillRef>
-          <a:effectRef idx="2">
-            <a:schemeClr val="accent1"/>
-          </a:effectRef>
-          <a:fontRef idx="minor">
-            <a:schemeClr val="lt1"/>
-          </a:fontRef>
-        </p:style>
-        <p:txBody>
-          <a:bodyPr rtlCol="0" anchor="ctr"/>
-          <a:lstStyle/>
-          <a:p>
-            <a:pPr algn="ctr"/>
-            <a:r>
-              <a:rPr sz="1600" b="1">
-                <a:solidFill>
-                  <a:srgbClr val="0F172A"/>
-                </a:solidFill>
-              </a:rPr>
-              <a:t>STEP 3c</a:t>
-            </a:r>
-          </a:p>
-        </p:txBody>
-      </p:sp>
-      <p:sp>
-        <p:nvSpPr>
-          <p:cNvPr id="3" name="TextBox 2"/>
-          <p:cNvSpPr txBox="1"/>
-          <p:nvPr/>
-        </p:nvSpPr>
-        <p:spPr>
-          <a:xfrm>
-            <a:off x="2194560" y="384048"/>
-            <a:ext cx="9692640" cy="685800"/>
-          </a:xfrm>
-          <a:prstGeom prst="rect">
-            <a:avLst/>
-          </a:prstGeom>
-          <a:noFill/>
-        </p:spPr>
-        <p:txBody>
-          <a:bodyPr wrap="square">
-            <a:spAutoFit/>
-          </a:bodyPr>
-          <a:lstStyle/>
-          <a:p>
-            <a:pPr algn="l">
-              <a:spcAft>
-                <a:spcPts val="800"/>
-              </a:spcAft>
-            </a:pPr>
-            <a:r>
-              <a:rPr sz="3000" b="1">
-                <a:solidFill>
-                  <a:srgbClr val="0F172A"/>
-                </a:solidFill>
-              </a:rPr>
-              <a:t>The live list — a Client Component</a:t>
-            </a:r>
-          </a:p>
-        </p:txBody>
-      </p:sp>
-      <p:sp>
-        <p:nvSpPr>
-          <p:cNvPr id="4" name="TextBox 3"/>
-          <p:cNvSpPr txBox="1"/>
-          <p:nvPr/>
-        </p:nvSpPr>
-        <p:spPr>
-          <a:xfrm>
-            <a:off x="548640" y="1115568"/>
-            <a:ext cx="11064240" cy="457200"/>
-          </a:xfrm>
-          <a:prstGeom prst="rect">
-            <a:avLst/>
-          </a:prstGeom>
-          <a:noFill/>
-        </p:spPr>
-        <p:txBody>
-          <a:bodyPr wrap="square">
-            <a:spAutoFit/>
-          </a:bodyPr>
-          <a:lstStyle/>
-          <a:p>
-            <a:pPr algn="l">
-              <a:spcAft>
-                <a:spcPts val="800"/>
-              </a:spcAft>
-            </a:pPr>
-            <a:r>
-              <a:rPr sz="1500" b="0">
-                <a:solidFill>
-                  <a:srgbClr val="64748B"/>
-                </a:solidFill>
-              </a:rPr>
-              <a:t>'use client' earns its place here: a real-time Firestore subscription</a:t>
-            </a:r>
-          </a:p>
-        </p:txBody>
-      </p:sp>
-      <p:sp>
-        <p:nvSpPr>
-          <p:cNvPr id="5" name="Rounded Rectangle 4"/>
-          <p:cNvSpPr/>
-          <p:nvPr/>
-        </p:nvSpPr>
-        <p:spPr>
-          <a:xfrm>
-            <a:off x="548640" y="1737360"/>
-            <a:ext cx="8138160" cy="4572000"/>
-          </a:xfrm>
-          <a:prstGeom prst="roundRect">
-            <a:avLst/>
-          </a:prstGeom>
-          <a:solidFill>
-            <a:srgbClr val="1E293B"/>
-          </a:solidFill>
-          <a:ln>
-            <a:noFill/>
-          </a:ln>
-          <a:effectLst/>
-        </p:spPr>
-        <p:style>
-          <a:lnRef idx="1">
-            <a:schemeClr val="accent1"/>
-          </a:lnRef>
-          <a:fillRef idx="3">
-            <a:schemeClr val="accent1"/>
-          </a:fillRef>
-          <a:effectRef idx="2">
-            <a:schemeClr val="accent1"/>
-          </a:effectRef>
-          <a:fontRef idx="minor">
-            <a:schemeClr val="lt1"/>
-          </a:fontRef>
-        </p:style>
-        <p:txBody>
-          <a:bodyPr rtlCol="0" anchor="t" wrap="none" lIns="228600" rIns="182880" tIns="128016"/>
-          <a:lstStyle/>
-          <a:p>
-            <a:pPr algn="ctr">
-              <a:spcAft>
-                <a:spcPts val="700"/>
-              </a:spcAft>
-            </a:pPr>
-            <a:r>
-              <a:rPr sz="1000" b="1">
-                <a:solidFill>
-                  <a:srgbClr val="F59E0B"/>
-                </a:solidFill>
-                <a:latin typeface="Courier New"/>
-              </a:rPr>
-              <a:t>frontend/src/features/notes/components/NotesList.tsx  (new)</a:t>
-            </a:r>
-          </a:p>
-          <a:p>
-            <a:pPr>
-              <a:spcAft>
-                <a:spcPts val="100"/>
-              </a:spcAft>
-            </a:pPr>
-            <a:r>
-              <a:rPr sz="1100">
-                <a:solidFill>
-                  <a:srgbClr val="E2E8F0"/>
-                </a:solidFill>
-                <a:latin typeface="Courier New"/>
-              </a:rPr>
-              <a:t>'use client'</a:t>
-            </a:r>
-          </a:p>
-          <a:p>
-            <a:pPr>
-              <a:spcAft>
-                <a:spcPts val="100"/>
-              </a:spcAft>
-            </a:pPr>
-            <a:r>
-              <a:rPr sz="1100">
-                <a:solidFill>
-                  <a:srgbClr val="E2E8F0"/>
-                </a:solidFill>
-                <a:latin typeface="Courier New"/>
-              </a:rPr>
-              <a:t> </a:t>
-            </a:r>
-          </a:p>
-          <a:p>
-            <a:pPr>
-              <a:spcAft>
-                <a:spcPts val="100"/>
-              </a:spcAft>
-            </a:pPr>
-            <a:r>
-              <a:rPr sz="1100">
-                <a:solidFill>
-                  <a:srgbClr val="E2E8F0"/>
-                </a:solidFill>
-                <a:latin typeface="Courier New"/>
-              </a:rPr>
-              <a:t>export function NotesList() {</a:t>
-            </a:r>
-          </a:p>
-          <a:p>
-            <a:pPr>
-              <a:spcAft>
-                <a:spcPts val="100"/>
-              </a:spcAft>
-            </a:pPr>
-            <a:r>
-              <a:rPr sz="1100">
-                <a:solidFill>
-                  <a:srgbClr val="E2E8F0"/>
-                </a:solidFill>
-                <a:latin typeface="Courier New"/>
-              </a:rPr>
-              <a:t>  const { user } = useAuth()</a:t>
-            </a:r>
-          </a:p>
-          <a:p>
-            <a:pPr>
-              <a:spcAft>
-                <a:spcPts val="100"/>
-              </a:spcAft>
-            </a:pPr>
-            <a:r>
-              <a:rPr sz="1100">
-                <a:solidFill>
-                  <a:srgbClr val="E2E8F0"/>
-                </a:solidFill>
-                <a:latin typeface="Courier New"/>
-              </a:rPr>
-              <a:t>  const { data: notes, loading } = useCollection(</a:t>
-            </a:r>
-          </a:p>
-          <a:p>
-            <a:pPr>
-              <a:spcAft>
-                <a:spcPts val="100"/>
-              </a:spcAft>
-            </a:pPr>
-            <a:r>
-              <a:rPr sz="1100">
-                <a:solidFill>
-                  <a:srgbClr val="E2E8F0"/>
-                </a:solidFill>
-                <a:latin typeface="Courier New"/>
-              </a:rPr>
-              <a:t>    getNotesCollection(),</a:t>
-            </a:r>
-          </a:p>
-          <a:p>
-            <a:pPr>
-              <a:spcAft>
-                <a:spcPts val="100"/>
-              </a:spcAft>
-            </a:pPr>
-            <a:r>
-              <a:rPr sz="1100">
-                <a:solidFill>
-                  <a:srgbClr val="E2E8F0"/>
-                </a:solidFill>
-                <a:latin typeface="Courier New"/>
-              </a:rPr>
-              <a:t>    where('uid', '==', user?.uid ?? ''),</a:t>
-            </a:r>
-          </a:p>
-          <a:p>
-            <a:pPr>
-              <a:spcAft>
-                <a:spcPts val="100"/>
-              </a:spcAft>
-            </a:pPr>
-            <a:r>
-              <a:rPr sz="1100">
-                <a:solidFill>
-                  <a:srgbClr val="E2E8F0"/>
-                </a:solidFill>
-                <a:latin typeface="Courier New"/>
-              </a:rPr>
-              <a:t>  )</a:t>
-            </a:r>
-          </a:p>
-          <a:p>
-            <a:pPr>
-              <a:spcAft>
-                <a:spcPts val="100"/>
-              </a:spcAft>
-            </a:pPr>
-            <a:r>
-              <a:rPr sz="1100">
-                <a:solidFill>
-                  <a:srgbClr val="E2E8F0"/>
-                </a:solidFill>
-                <a:latin typeface="Courier New"/>
-              </a:rPr>
-              <a:t> </a:t>
-            </a:r>
-          </a:p>
-          <a:p>
-            <a:pPr>
-              <a:spcAft>
-                <a:spcPts val="100"/>
-              </a:spcAft>
-            </a:pPr>
-            <a:r>
-              <a:rPr sz="1100">
-                <a:solidFill>
-                  <a:srgbClr val="E2E8F0"/>
-                </a:solidFill>
-                <a:latin typeface="Courier New"/>
-              </a:rPr>
-              <a:t>  if (loading) return &lt;LoadingSpinner /&gt;</a:t>
-            </a:r>
-          </a:p>
-          <a:p>
-            <a:pPr>
-              <a:spcAft>
-                <a:spcPts val="100"/>
-              </a:spcAft>
-            </a:pPr>
-            <a:r>
-              <a:rPr sz="1100">
-                <a:solidFill>
-                  <a:srgbClr val="E2E8F0"/>
-                </a:solidFill>
-                <a:latin typeface="Courier New"/>
-              </a:rPr>
-              <a:t>  if (notes.length === 0) return &lt;EmptyState title="No notes yet" /&gt;</a:t>
-            </a:r>
-          </a:p>
-          <a:p>
-            <a:pPr>
-              <a:spcAft>
-                <a:spcPts val="100"/>
-              </a:spcAft>
-            </a:pPr>
-            <a:r>
-              <a:rPr sz="1100">
-                <a:solidFill>
-                  <a:srgbClr val="E2E8F0"/>
-                </a:solidFill>
-                <a:latin typeface="Courier New"/>
-              </a:rPr>
-              <a:t> </a:t>
-            </a:r>
-          </a:p>
-          <a:p>
-            <a:pPr>
-              <a:spcAft>
-                <a:spcPts val="100"/>
-              </a:spcAft>
-            </a:pPr>
-            <a:r>
-              <a:rPr sz="1100">
-                <a:solidFill>
-                  <a:srgbClr val="E2E8F0"/>
-                </a:solidFill>
-                <a:latin typeface="Courier New"/>
-              </a:rPr>
-              <a:t>  return (</a:t>
-            </a:r>
-          </a:p>
-          <a:p>
-            <a:pPr>
-              <a:spcAft>
-                <a:spcPts val="100"/>
-              </a:spcAft>
-            </a:pPr>
-            <a:r>
-              <a:rPr sz="1100">
-                <a:solidFill>
-                  <a:srgbClr val="E2E8F0"/>
-                </a:solidFill>
-                <a:latin typeface="Courier New"/>
-              </a:rPr>
-              <a:t>    &lt;ul className="space-y-2"&gt;</a:t>
-            </a:r>
-          </a:p>
-          <a:p>
-            <a:pPr>
-              <a:spcAft>
-                <a:spcPts val="100"/>
-              </a:spcAft>
-            </a:pPr>
-            <a:r>
-              <a:rPr sz="1100">
-                <a:solidFill>
-                  <a:srgbClr val="E2E8F0"/>
-                </a:solidFill>
-                <a:latin typeface="Courier New"/>
-              </a:rPr>
-              <a:t>      {notes.map((note) =&gt; (</a:t>
-            </a:r>
-          </a:p>
-          <a:p>
-            <a:pPr>
-              <a:spcAft>
-                <a:spcPts val="100"/>
-              </a:spcAft>
-            </a:pPr>
-            <a:r>
-              <a:rPr sz="1100">
-                <a:solidFill>
-                  <a:srgbClr val="E2E8F0"/>
-                </a:solidFill>
-                <a:latin typeface="Courier New"/>
-              </a:rPr>
-              <a:t>        &lt;li key={note.id} className="rounded-lg border p-4"&gt;</a:t>
-            </a:r>
-          </a:p>
-          <a:p>
-            <a:pPr>
-              <a:spcAft>
-                <a:spcPts val="100"/>
-              </a:spcAft>
-            </a:pPr>
-            <a:r>
-              <a:rPr sz="1100">
-                <a:solidFill>
-                  <a:srgbClr val="E2E8F0"/>
-                </a:solidFill>
-                <a:latin typeface="Courier New"/>
-              </a:rPr>
-              <a:t>          &lt;h3 className="font-medium"&gt;{note.title}&lt;/h3&gt;</a:t>
-            </a:r>
-          </a:p>
-          <a:p>
-            <a:pPr>
-              <a:spcAft>
-                <a:spcPts val="100"/>
-              </a:spcAft>
-            </a:pPr>
-            <a:r>
-              <a:rPr sz="1100">
-                <a:solidFill>
-                  <a:srgbClr val="E2E8F0"/>
-                </a:solidFill>
-                <a:latin typeface="Courier New"/>
-              </a:rPr>
-              <a:t>          &lt;p className="text-sm text-zinc-500"&gt;{note.body}&lt;/p&gt;</a:t>
-            </a:r>
-          </a:p>
-          <a:p>
-            <a:pPr>
-              <a:spcAft>
-                <a:spcPts val="100"/>
-              </a:spcAft>
-            </a:pPr>
-            <a:r>
-              <a:rPr sz="1100">
-                <a:solidFill>
-                  <a:srgbClr val="E2E8F0"/>
-                </a:solidFill>
-                <a:latin typeface="Courier New"/>
-              </a:rPr>
-              <a:t>        &lt;/li&gt;</a:t>
-            </a:r>
-          </a:p>
-          <a:p>
-            <a:pPr>
-              <a:spcAft>
-                <a:spcPts val="100"/>
-              </a:spcAft>
-            </a:pPr>
-            <a:r>
-              <a:rPr sz="1100">
-                <a:solidFill>
-                  <a:srgbClr val="E2E8F0"/>
-                </a:solidFill>
-                <a:latin typeface="Courier New"/>
-              </a:rPr>
-              <a:t>      ))}</a:t>
-            </a:r>
-          </a:p>
-          <a:p>
-            <a:pPr>
-              <a:spcAft>
-                <a:spcPts val="100"/>
-              </a:spcAft>
-            </a:pPr>
-            <a:r>
-              <a:rPr sz="1100">
-                <a:solidFill>
-                  <a:srgbClr val="E2E8F0"/>
-                </a:solidFill>
-                <a:latin typeface="Courier New"/>
-              </a:rPr>
-              <a:t>    &lt;/ul&gt;</a:t>
-            </a:r>
-          </a:p>
-          <a:p>
-            <a:pPr>
-              <a:spcAft>
-                <a:spcPts val="100"/>
-              </a:spcAft>
-            </a:pPr>
-            <a:r>
-              <a:rPr sz="1100">
-                <a:solidFill>
-                  <a:srgbClr val="E2E8F0"/>
-                </a:solidFill>
-                <a:latin typeface="Courier New"/>
-              </a:rPr>
-              <a:t>  )</a:t>
-            </a:r>
-          </a:p>
-          <a:p>
-            <a:pPr>
-              <a:spcAft>
-                <a:spcPts val="100"/>
-              </a:spcAft>
-            </a:pPr>
-            <a:r>
-              <a:rPr sz="1100">
-                <a:solidFill>
-                  <a:srgbClr val="E2E8F0"/>
-                </a:solidFill>
-                <a:latin typeface="Courier New"/>
-              </a:rPr>
-              <a:t>}</a:t>
-            </a:r>
-          </a:p>
-        </p:txBody>
-      </p:sp>
-      <p:sp>
-        <p:nvSpPr>
-          <p:cNvPr id="6" name="TextBox 5"/>
-          <p:cNvSpPr txBox="1"/>
-          <p:nvPr/>
-        </p:nvSpPr>
-        <p:spPr>
-          <a:xfrm>
-            <a:off x="8961120" y="1828800"/>
-            <a:ext cx="2834640" cy="4572000"/>
-          </a:xfrm>
-          <a:prstGeom prst="rect">
-            <a:avLst/>
-          </a:prstGeom>
-          <a:noFill/>
-        </p:spPr>
-        <p:txBody>
-          <a:bodyPr wrap="square">
-            <a:spAutoFit/>
-          </a:bodyPr>
-          <a:lstStyle/>
-          <a:p>
-            <a:pPr algn="l">
-              <a:spcAft>
-                <a:spcPts val="1000"/>
-              </a:spcAft>
-            </a:pPr>
-            <a:r>
-              <a:rPr sz="1300" b="1">
-                <a:solidFill>
-                  <a:srgbClr val="F59E0B"/>
-                </a:solidFill>
-              </a:rPr>
-              <a:t>•  </a:t>
-            </a:r>
-            <a:r>
-              <a:rPr sz="1300" b="0">
-                <a:solidFill>
-                  <a:srgbClr val="334155"/>
-                </a:solidFill>
-              </a:rPr>
-              <a:t>useCollection() → onSnapshot: UI updates live</a:t>
-            </a:r>
-          </a:p>
-          <a:p>
-            <a:pPr algn="l">
-              <a:spcAft>
-                <a:spcPts val="1000"/>
-              </a:spcAft>
-            </a:pPr>
-            <a:r>
-              <a:rPr sz="1300" b="1">
-                <a:solidFill>
-                  <a:srgbClr val="F59E0B"/>
-                </a:solidFill>
-              </a:rPr>
-              <a:t>•  </a:t>
-            </a:r>
-            <a:r>
-              <a:rPr sz="1300" b="0">
-                <a:solidFill>
-                  <a:srgbClr val="334155"/>
-                </a:solidFill>
-              </a:rPr>
-              <a:t>Query filters by uid — and the rules enforce it anyway</a:t>
-            </a:r>
-          </a:p>
-          <a:p>
-            <a:pPr algn="l">
-              <a:spcAft>
-                <a:spcPts val="1000"/>
-              </a:spcAft>
-            </a:pPr>
-            <a:r>
-              <a:rPr sz="1300" b="1">
-                <a:solidFill>
-                  <a:srgbClr val="F59E0B"/>
-                </a:solidFill>
-              </a:rPr>
-              <a:t>•  </a:t>
-            </a:r>
-            <a:r>
-              <a:rPr sz="1300" b="0">
-                <a:solidFill>
-                  <a:srgbClr val="334155"/>
-                </a:solidFill>
-              </a:rPr>
-              <a:t>Loading / empty states from shared components</a:t>
             </a:r>
           </a:p>
         </p:txBody>
